--- a/docs/content/nonparametric_t_tests/nonparametric_t_tests_lecture.pptx
+++ b/docs/content/nonparametric_t_tests/nonparametric_t_tests_lecture.pptx
@@ -40,6 +40,11 @@
     <p:sldId id="288" r:id="rId34"/>
     <p:sldId id="289" r:id="rId35"/>
     <p:sldId id="290" r:id="rId36"/>
+    <p:sldId id="291" r:id="rId37"/>
+    <p:sldId id="292" r:id="rId38"/>
+    <p:sldId id="293" r:id="rId39"/>
+    <p:sldId id="294" r:id="rId40"/>
+    <p:sldId id="295" r:id="rId41"/>
   </p:sldIdLst>
   <p:sldSz cx="9144000" cy="5143500" type="screen16x9"/>
   <p:notesSz cx="6858000" cy="9144000"/>
@@ -3739,7 +3744,7 @@
       </p:sp>
       <p:pic>
         <p:nvPicPr>
-          <p:cNvPr descr="nonparametric_t_tests_lecture_files/figure-pptx/unnamed-chunk-4-1.png" id="0" name="Picture 1"/>
+          <p:cNvPr descr="nonparametric_t_tests_lecture_files/figure-pptx/nonparametric-t-tests-04-1.png" id="0" name="Picture 1"/>
           <p:cNvPicPr>
             <a:picLocks noGrp="1" noChangeAspect="1"/>
           </p:cNvPicPr>
@@ -4017,7 +4022,7 @@
       </p:sp>
       <p:pic>
         <p:nvPicPr>
-          <p:cNvPr descr="nonparametric_t_tests_lecture_files/figure-pptx/unnamed-chunk-6-1.png" id="0" name="Picture 1"/>
+          <p:cNvPr descr="nonparametric_t_tests_lecture_files/figure-pptx/nonparametric-t-tests-06-1.png" id="0" name="Picture 1"/>
           <p:cNvPicPr>
             <a:picLocks noGrp="1" noChangeAspect="1"/>
           </p:cNvPicPr>
@@ -4172,7 +4177,7 @@
       </p:sp>
       <p:pic>
         <p:nvPicPr>
-          <p:cNvPr descr="nonparametric_t_tests_lecture_files/figure-pptx/unnamed-chunk-7-1.png" id="0" name="Picture 1"/>
+          <p:cNvPr descr="nonparametric_t_tests_lecture_files/figure-pptx/nonparametric-t-tests-07-1.png" id="0" name="Picture 1"/>
           <p:cNvPicPr>
             <a:picLocks noGrp="1" noChangeAspect="1"/>
           </p:cNvPicPr>
@@ -4379,7 +4384,7 @@
       </p:sp>
       <p:pic>
         <p:nvPicPr>
-          <p:cNvPr descr="nonparametric_t_tests_lecture_files/figure-pptx/unnamed-chunk-8-1.png" id="0" name="Picture 1"/>
+          <p:cNvPr descr="nonparametric_t_tests_lecture_files/figure-pptx/nonparametric-t-tests-08-1.png" id="0" name="Picture 1"/>
           <p:cNvPicPr>
             <a:picLocks noGrp="1" noChangeAspect="1"/>
           </p:cNvPicPr>
@@ -4514,7 +4519,7 @@
       </p:sp>
       <p:pic>
         <p:nvPicPr>
-          <p:cNvPr descr="nonparametric_t_tests_lecture_files/figure-pptx/unnamed-chunk-9-1.png" id="0" name="Picture 1"/>
+          <p:cNvPr descr="nonparametric_t_tests_lecture_files/figure-pptx/nonparametric-t-tests-09-1.png" id="0" name="Picture 1"/>
           <p:cNvPicPr>
             <a:picLocks noGrp="1" noChangeAspect="1"/>
           </p:cNvPicPr>
@@ -4828,7 +4833,15 @@
             <a:pPr lvl="0"/>
             <a:r>
               <a:rPr/>
-              <a:t>Power — what it is and why we talk about it</a:t>
+              <a:t>One-sample, two-sample, and </a:t>
+            </a:r>
+            <a:r>
+              <a:rPr b="1"/>
+              <a:t>paired</a:t>
+            </a:r>
+            <a:r>
+              <a:rPr/>
+              <a:t> t-tests — and how much more the paired test got out of the same four trees</a:t>
             </a:r>
           </a:p>
           <a:p>
@@ -5127,7 +5140,7 @@
       </p:sp>
       <p:pic>
         <p:nvPicPr>
-          <p:cNvPr descr="nonparametric_t_tests_lecture_files/figure-pptx/unnamed-chunk-10-1.png" id="0" name="Picture 1"/>
+          <p:cNvPr descr="nonparametric_t_tests_lecture_files/figure-pptx/nonparametric-t-tests-10-1.png" id="0" name="Picture 1"/>
           <p:cNvPicPr>
             <a:picLocks noGrp="1" noChangeAspect="1"/>
           </p:cNvPicPr>
@@ -5771,7 +5784,7 @@
             </a:pPr>
             <a:r>
               <a:rPr/>
-              <a:t>Part 6 · Permutation Tests</a:t>
+              <a:t>Part 5b · Back to Our Pine Needles</a:t>
             </a:r>
           </a:p>
         </p:txBody>
@@ -5826,7 +5839,7 @@
             </a:pPr>
             <a:r>
               <a:rPr/>
-              <a:t>Permutation Tests — Concept</a:t>
+              <a:t>The same question, the non-parametric way</a:t>
             </a:r>
           </a:p>
         </p:txBody>
@@ -5846,62 +5859,1987 @@
           <a:bodyPr/>
           <a:lstStyle/>
           <a:p>
+            <a:pPr lvl="0" indent="0" marL="0">
+              <a:buNone/>
+            </a:pPr>
+            <a:r>
+              <a:rPr/>
+              <a:t>Last week we tested our own needle data two ways. Let’s run the rank-based versions of </a:t>
+            </a:r>
+            <a:r>
+              <a:rPr b="1"/>
+              <a:t>exactly the same two comparisons</a:t>
+            </a:r>
+            <a:r>
+              <a:rPr/>
+              <a:t> and see what changes.</a:t>
+            </a:r>
+          </a:p>
+          <a:p>
+            <a:pPr lvl="0" indent="0">
+              <a:buNone/>
+            </a:pPr>
+            <a:r>
+              <a:rPr>
+                <a:solidFill>
+                  <a:srgbClr val="003B4F"/>
+                </a:solidFill>
+                <a:latin typeface="Courier"/>
+              </a:rPr>
+              <a:t>pine_df &lt;- </a:t>
+            </a:r>
+            <a:r>
+              <a:rPr>
+                <a:solidFill>
+                  <a:srgbClr val="4758AB"/>
+                </a:solidFill>
+                <a:latin typeface="Courier"/>
+              </a:rPr>
+              <a:t>read_csv</a:t>
+            </a:r>
+            <a:r>
+              <a:rPr>
+                <a:solidFill>
+                  <a:srgbClr val="003B4F"/>
+                </a:solidFill>
+                <a:latin typeface="Courier"/>
+              </a:rPr>
+              <a:t>(</a:t>
+            </a:r>
+            <a:r>
+              <a:rPr>
+                <a:solidFill>
+                  <a:srgbClr val="20794D"/>
+                </a:solidFill>
+                <a:latin typeface="Courier"/>
+              </a:rPr>
+              <a:t>"data/pine_data.csv"</a:t>
+            </a:r>
+            <a:r>
+              <a:rPr>
+                <a:solidFill>
+                  <a:srgbClr val="003B4F"/>
+                </a:solidFill>
+                <a:latin typeface="Courier"/>
+              </a:rPr>
+              <a:t>)</a:t>
+            </a:r>
+            <a:br/>
+            <a:br/>
+            <a:r>
+              <a:rPr>
+                <a:solidFill>
+                  <a:srgbClr val="5E5E5E"/>
+                </a:solidFill>
+                <a:latin typeface="Courier"/>
+              </a:rPr>
+              <a:t># same two-stage summary as last week: one value per tree per side</a:t>
+            </a:r>
+            <a:br/>
+            <a:r>
+              <a:rPr>
+                <a:solidFill>
+                  <a:srgbClr val="003B4F"/>
+                </a:solidFill>
+                <a:latin typeface="Courier"/>
+              </a:rPr>
+              <a:t>p_df &lt;- pine_df </a:t>
+            </a:r>
+            <a:r>
+              <a:rPr>
+                <a:solidFill>
+                  <a:srgbClr val="5E5E5E"/>
+                </a:solidFill>
+                <a:latin typeface="Courier"/>
+              </a:rPr>
+              <a:t>%&gt;%</a:t>
+            </a:r>
+            <a:br/>
+            <a:r>
+              <a:rPr>
+                <a:solidFill>
+                  <a:srgbClr val="003B4F"/>
+                </a:solidFill>
+                <a:latin typeface="Courier"/>
+              </a:rPr>
+              <a:t>  </a:t>
+            </a:r>
+            <a:r>
+              <a:rPr>
+                <a:solidFill>
+                  <a:srgbClr val="4758AB"/>
+                </a:solidFill>
+                <a:latin typeface="Courier"/>
+              </a:rPr>
+              <a:t>group_by</a:t>
+            </a:r>
+            <a:r>
+              <a:rPr>
+                <a:solidFill>
+                  <a:srgbClr val="003B4F"/>
+                </a:solidFill>
+                <a:latin typeface="Courier"/>
+              </a:rPr>
+              <a:t>(team, side) </a:t>
+            </a:r>
+            <a:r>
+              <a:rPr>
+                <a:solidFill>
+                  <a:srgbClr val="5E5E5E"/>
+                </a:solidFill>
+                <a:latin typeface="Courier"/>
+              </a:rPr>
+              <a:t>%&gt;%</a:t>
+            </a:r>
+            <a:br/>
+            <a:r>
+              <a:rPr>
+                <a:solidFill>
+                  <a:srgbClr val="003B4F"/>
+                </a:solidFill>
+                <a:latin typeface="Courier"/>
+              </a:rPr>
+              <a:t>  </a:t>
+            </a:r>
+            <a:r>
+              <a:rPr>
+                <a:solidFill>
+                  <a:srgbClr val="4758AB"/>
+                </a:solidFill>
+                <a:latin typeface="Courier"/>
+              </a:rPr>
+              <a:t>summarise</a:t>
+            </a:r>
+            <a:r>
+              <a:rPr>
+                <a:solidFill>
+                  <a:srgbClr val="003B4F"/>
+                </a:solidFill>
+                <a:latin typeface="Courier"/>
+              </a:rPr>
+              <a:t>(</a:t>
+            </a:r>
+            <a:r>
+              <a:rPr>
+                <a:solidFill>
+                  <a:srgbClr val="657422"/>
+                </a:solidFill>
+                <a:latin typeface="Courier"/>
+              </a:rPr>
+              <a:t>needle_length_mm =</a:t>
+            </a:r>
+            <a:r>
+              <a:rPr>
+                <a:solidFill>
+                  <a:srgbClr val="003B4F"/>
+                </a:solidFill>
+                <a:latin typeface="Courier"/>
+              </a:rPr>
+              <a:t> </a:t>
+            </a:r>
+            <a:r>
+              <a:rPr>
+                <a:solidFill>
+                  <a:srgbClr val="4758AB"/>
+                </a:solidFill>
+                <a:latin typeface="Courier"/>
+              </a:rPr>
+              <a:t>mean</a:t>
+            </a:r>
+            <a:r>
+              <a:rPr>
+                <a:solidFill>
+                  <a:srgbClr val="003B4F"/>
+                </a:solidFill>
+                <a:latin typeface="Courier"/>
+              </a:rPr>
+              <a:t>(needle_length_mm, </a:t>
+            </a:r>
+            <a:r>
+              <a:rPr>
+                <a:solidFill>
+                  <a:srgbClr val="657422"/>
+                </a:solidFill>
+                <a:latin typeface="Courier"/>
+              </a:rPr>
+              <a:t>na.rm =</a:t>
+            </a:r>
+            <a:r>
+              <a:rPr>
+                <a:solidFill>
+                  <a:srgbClr val="003B4F"/>
+                </a:solidFill>
+                <a:latin typeface="Courier"/>
+              </a:rPr>
+              <a:t> </a:t>
+            </a:r>
+            <a:r>
+              <a:rPr>
+                <a:solidFill>
+                  <a:srgbClr val="8F5902"/>
+                </a:solidFill>
+                <a:latin typeface="Courier"/>
+              </a:rPr>
+              <a:t>TRUE</a:t>
+            </a:r>
+            <a:r>
+              <a:rPr>
+                <a:solidFill>
+                  <a:srgbClr val="003B4F"/>
+                </a:solidFill>
+                <a:latin typeface="Courier"/>
+              </a:rPr>
+              <a:t>),</a:t>
+            </a:r>
+            <a:br/>
+            <a:r>
+              <a:rPr>
+                <a:solidFill>
+                  <a:srgbClr val="003B4F"/>
+                </a:solidFill>
+                <a:latin typeface="Courier"/>
+              </a:rPr>
+              <a:t>            </a:t>
+            </a:r>
+            <a:r>
+              <a:rPr>
+                <a:solidFill>
+                  <a:srgbClr val="657422"/>
+                </a:solidFill>
+                <a:latin typeface="Courier"/>
+              </a:rPr>
+              <a:t>.groups =</a:t>
+            </a:r>
+            <a:r>
+              <a:rPr>
+                <a:solidFill>
+                  <a:srgbClr val="003B4F"/>
+                </a:solidFill>
+                <a:latin typeface="Courier"/>
+              </a:rPr>
+              <a:t> </a:t>
+            </a:r>
+            <a:r>
+              <a:rPr>
+                <a:solidFill>
+                  <a:srgbClr val="20794D"/>
+                </a:solidFill>
+                <a:latin typeface="Courier"/>
+              </a:rPr>
+              <a:t>"drop"</a:t>
+            </a:r>
+            <a:r>
+              <a:rPr>
+                <a:solidFill>
+                  <a:srgbClr val="003B4F"/>
+                </a:solidFill>
+                <a:latin typeface="Courier"/>
+              </a:rPr>
+              <a:t>)</a:t>
+            </a:r>
+            <a:br/>
+            <a:br/>
+            <a:r>
+              <a:rPr>
+                <a:solidFill>
+                  <a:srgbClr val="003B4F"/>
+                </a:solidFill>
+                <a:latin typeface="Courier"/>
+              </a:rPr>
+              <a:t>p_wide_df &lt;- p_df </a:t>
+            </a:r>
+            <a:r>
+              <a:rPr>
+                <a:solidFill>
+                  <a:srgbClr val="5E5E5E"/>
+                </a:solidFill>
+                <a:latin typeface="Courier"/>
+              </a:rPr>
+              <a:t>%&gt;%</a:t>
+            </a:r>
+            <a:br/>
+            <a:r>
+              <a:rPr>
+                <a:solidFill>
+                  <a:srgbClr val="003B4F"/>
+                </a:solidFill>
+                <a:latin typeface="Courier"/>
+              </a:rPr>
+              <a:t>  </a:t>
+            </a:r>
+            <a:r>
+              <a:rPr>
+                <a:solidFill>
+                  <a:srgbClr val="4758AB"/>
+                </a:solidFill>
+                <a:latin typeface="Courier"/>
+              </a:rPr>
+              <a:t>pivot_wider</a:t>
+            </a:r>
+            <a:r>
+              <a:rPr>
+                <a:solidFill>
+                  <a:srgbClr val="003B4F"/>
+                </a:solidFill>
+                <a:latin typeface="Courier"/>
+              </a:rPr>
+              <a:t>(</a:t>
+            </a:r>
+            <a:r>
+              <a:rPr>
+                <a:solidFill>
+                  <a:srgbClr val="657422"/>
+                </a:solidFill>
+                <a:latin typeface="Courier"/>
+              </a:rPr>
+              <a:t>names_from =</a:t>
+            </a:r>
+            <a:r>
+              <a:rPr>
+                <a:solidFill>
+                  <a:srgbClr val="003B4F"/>
+                </a:solidFill>
+                <a:latin typeface="Courier"/>
+              </a:rPr>
+              <a:t> side, </a:t>
+            </a:r>
+            <a:r>
+              <a:rPr>
+                <a:solidFill>
+                  <a:srgbClr val="657422"/>
+                </a:solidFill>
+                <a:latin typeface="Courier"/>
+              </a:rPr>
+              <a:t>values_from =</a:t>
+            </a:r>
+            <a:r>
+              <a:rPr>
+                <a:solidFill>
+                  <a:srgbClr val="003B4F"/>
+                </a:solidFill>
+                <a:latin typeface="Courier"/>
+              </a:rPr>
+              <a:t> needle_length_mm)</a:t>
+            </a:r>
+            <a:br/>
+            <a:br/>
+            <a:r>
+              <a:rPr>
+                <a:solidFill>
+                  <a:srgbClr val="003B4F"/>
+                </a:solidFill>
+                <a:latin typeface="Courier"/>
+              </a:rPr>
+              <a:t>p_wide_df</a:t>
+            </a:r>
+          </a:p>
+          <a:p>
+            <a:pPr lvl="0" indent="0">
+              <a:buNone/>
+            </a:pPr>
+            <a:r>
+              <a:rPr>
+                <a:latin typeface="Courier"/>
+              </a:rPr>
+              <a:t># A tibble: 4 × 3
+  team       shady sunny
+  &lt;chr&gt;      &lt;dbl&gt; &lt;dbl&gt;
+1 botany      16.1  17.3
+2 grace_jace  15.4  15.5
+3 one         13.2  14.2
+4 waterbugs   11.7  13.8</a:t>
+            </a:r>
+          </a:p>
+          <a:p>
+            <a:pPr lvl="0" indent="0" marL="0">
+              <a:buNone/>
+            </a:pPr>
+            <a:r>
+              <a:rPr>
+                <a:hlinkClick r:id="rId2"/>
+              </a:rPr>
+              <a:t>📥 Download the data</a:t>
+            </a:r>
+          </a:p>
+        </p:txBody>
+      </p:sp>
+      <p:sp>
+        <p:nvSpPr>
+          <p:cNvPr id="4" name="Content Placeholder 3"/>
+          <p:cNvSpPr>
+            <a:spLocks noGrp="1"/>
+          </p:cNvSpPr>
+          <p:nvPr>
+            <p:ph idx="2" sz="half"/>
+          </p:nvPr>
+        </p:nvSpPr>
+        <p:spPr/>
+        <p:txBody>
+          <a:bodyPr/>
+          <a:lstStyle/>
+          <a:p>
+            <a:pPr lvl="0" indent="0" marL="1270000">
+              <a:buNone/>
+            </a:pPr>
+            <a:r>
+              <a:rPr sz="2000" b="1"/>
+              <a:t>Note</a:t>
+            </a:r>
+          </a:p>
+          <a:p>
+            <a:pPr lvl="0" indent="0" marL="1270000">
+              <a:buNone/>
+            </a:pPr>
+            <a:r>
+              <a:rPr sz="2000" b="1"/>
+              <a:t>✅ Reminder</a:t>
+            </a:r>
+          </a:p>
+          <a:p>
+            <a:pPr lvl="0" indent="0" marL="1270000">
+              <a:buNone/>
+            </a:pPr>
+            <a:r>
+              <a:rPr sz="2000"/>
+              <a:t>4 teams, 4 trees, both sides of each tree. The data are </a:t>
+            </a:r>
+            <a:r>
+              <a:rPr sz="2000" b="1"/>
+              <a:t>paired</a:t>
+            </a:r>
+            <a:r>
+              <a:rPr sz="2000"/>
+              <a:t> by design.</a:t>
+            </a:r>
+          </a:p>
+        </p:txBody>
+      </p:sp>
+    </p:spTree>
+  </p:cSld>
+</p:sld>
+</file>
+
+<file path=ppt/slides/slide28.xml><?xml version="1.0" encoding="utf-8"?>
+<p:sld xmlns:a="http://schemas.openxmlformats.org/drawingml/2006/main" xmlns:r="http://schemas.openxmlformats.org/officeDocument/2006/relationships" xmlns:p="http://schemas.openxmlformats.org/presentationml/2006/main">
+  <p:cSld>
+    <p:spTree>
+      <p:nvGrpSpPr>
+        <p:cNvPr id="1" name=""/>
+        <p:cNvGrpSpPr/>
+        <p:nvPr/>
+      </p:nvGrpSpPr>
+      <p:grpSpPr>
+        <a:xfrm>
+          <a:off x="0" y="0"/>
+          <a:ext cx="0" cy="0"/>
+          <a:chOff x="0" y="0"/>
+          <a:chExt cx="0" cy="0"/>
+        </a:xfrm>
+      </p:grpSpPr>
+      <p:sp>
+        <p:nvSpPr>
+          <p:cNvPr id="2" name="Title 1"/>
+          <p:cNvSpPr>
+            <a:spLocks noGrp="1"/>
+          </p:cNvSpPr>
+          <p:nvPr>
+            <p:ph type="title"/>
+          </p:nvPr>
+        </p:nvSpPr>
+        <p:spPr>
+          <a:xfrm>
+            <a:off x="0" y="0"/>
+            <a:ext cx="9144000" cy="602780"/>
+          </a:xfrm>
+          <a:solidFill>
+            <a:srgbClr val="70121D"/>
+          </a:solidFill>
+        </p:spPr>
+        <p:txBody>
+          <a:bodyPr/>
+          <a:lstStyle/>
+          <a:p>
+            <a:pPr lvl="0" indent="0" marL="0">
+              <a:buNone/>
+            </a:pPr>
+            <a:r>
+              <a:rPr/>
+              <a:t>Running both rank-based tests</a:t>
+            </a:r>
+          </a:p>
+        </p:txBody>
+      </p:sp>
+      <p:sp>
+        <p:nvSpPr>
+          <p:cNvPr id="3" name="Content Placeholder 2"/>
+          <p:cNvSpPr>
+            <a:spLocks noGrp="1"/>
+          </p:cNvSpPr>
+          <p:nvPr>
+            <p:ph idx="1" sz="half"/>
+          </p:nvPr>
+        </p:nvSpPr>
+        <p:spPr/>
+        <p:txBody>
+          <a:bodyPr/>
+          <a:lstStyle/>
+          <a:p>
+            <a:pPr lvl="0" indent="0">
+              <a:buNone/>
+            </a:pPr>
+            <a:r>
+              <a:rPr>
+                <a:solidFill>
+                  <a:srgbClr val="5E5E5E"/>
+                </a:solidFill>
+                <a:latin typeface="Courier"/>
+              </a:rPr>
+              <a:t># Unpaired: Mann-Whitney U  (the t-test's two-sample partner)</a:t>
+            </a:r>
+            <a:br/>
+            <a:r>
+              <a:rPr>
+                <a:solidFill>
+                  <a:srgbClr val="4758AB"/>
+                </a:solidFill>
+                <a:latin typeface="Courier"/>
+              </a:rPr>
+              <a:t>wilcox.test</a:t>
+            </a:r>
+            <a:r>
+              <a:rPr>
+                <a:solidFill>
+                  <a:srgbClr val="003B4F"/>
+                </a:solidFill>
+                <a:latin typeface="Courier"/>
+              </a:rPr>
+              <a:t>(needle_length_mm </a:t>
+            </a:r>
+            <a:r>
+              <a:rPr>
+                <a:solidFill>
+                  <a:srgbClr val="5E5E5E"/>
+                </a:solidFill>
+                <a:latin typeface="Courier"/>
+              </a:rPr>
+              <a:t>~</a:t>
+            </a:r>
+            <a:r>
+              <a:rPr>
+                <a:solidFill>
+                  <a:srgbClr val="003B4F"/>
+                </a:solidFill>
+                <a:latin typeface="Courier"/>
+              </a:rPr>
+              <a:t> side, </a:t>
+            </a:r>
+            <a:r>
+              <a:rPr>
+                <a:solidFill>
+                  <a:srgbClr val="657422"/>
+                </a:solidFill>
+                <a:latin typeface="Courier"/>
+              </a:rPr>
+              <a:t>data =</a:t>
+            </a:r>
+            <a:r>
+              <a:rPr>
+                <a:solidFill>
+                  <a:srgbClr val="003B4F"/>
+                </a:solidFill>
+                <a:latin typeface="Courier"/>
+              </a:rPr>
+              <a:t> p_df)</a:t>
+            </a:r>
+          </a:p>
+          <a:p>
+            <a:pPr lvl="0" indent="0">
+              <a:buNone/>
+            </a:pPr>
+            <a:r>
+              <a:rPr>
+                <a:latin typeface="Courier"/>
+              </a:rPr>
+              <a:t>
+    Wilcoxon rank sum exact test
+data:  needle_length_mm by side
+W = 5, p-value = 0.4857
+alternative hypothesis: true location shift is not equal to 0</a:t>
+            </a:r>
+          </a:p>
+          <a:p>
+            <a:pPr lvl="0" indent="0">
+              <a:buNone/>
+            </a:pPr>
+            <a:r>
+              <a:rPr>
+                <a:solidFill>
+                  <a:srgbClr val="5E5E5E"/>
+                </a:solidFill>
+                <a:latin typeface="Courier"/>
+              </a:rPr>
+              <a:t># Paired: Wilcoxon signed-rank  (the paired t-test's partner)</a:t>
+            </a:r>
+            <a:br/>
+            <a:r>
+              <a:rPr>
+                <a:solidFill>
+                  <a:srgbClr val="4758AB"/>
+                </a:solidFill>
+                <a:latin typeface="Courier"/>
+              </a:rPr>
+              <a:t>wilcox.test</a:t>
+            </a:r>
+            <a:r>
+              <a:rPr>
+                <a:solidFill>
+                  <a:srgbClr val="003B4F"/>
+                </a:solidFill>
+                <a:latin typeface="Courier"/>
+              </a:rPr>
+              <a:t>(p_wide_df</a:t>
+            </a:r>
+            <a:r>
+              <a:rPr>
+                <a:solidFill>
+                  <a:srgbClr val="5E5E5E"/>
+                </a:solidFill>
+                <a:latin typeface="Courier"/>
+              </a:rPr>
+              <a:t>$</a:t>
+            </a:r>
+            <a:r>
+              <a:rPr>
+                <a:solidFill>
+                  <a:srgbClr val="003B4F"/>
+                </a:solidFill>
+                <a:latin typeface="Courier"/>
+              </a:rPr>
+              <a:t>shady, p_wide_df</a:t>
+            </a:r>
+            <a:r>
+              <a:rPr>
+                <a:solidFill>
+                  <a:srgbClr val="5E5E5E"/>
+                </a:solidFill>
+                <a:latin typeface="Courier"/>
+              </a:rPr>
+              <a:t>$</a:t>
+            </a:r>
+            <a:r>
+              <a:rPr>
+                <a:solidFill>
+                  <a:srgbClr val="003B4F"/>
+                </a:solidFill>
+                <a:latin typeface="Courier"/>
+              </a:rPr>
+              <a:t>sunny, </a:t>
+            </a:r>
+            <a:r>
+              <a:rPr>
+                <a:solidFill>
+                  <a:srgbClr val="657422"/>
+                </a:solidFill>
+                <a:latin typeface="Courier"/>
+              </a:rPr>
+              <a:t>paired =</a:t>
+            </a:r>
+            <a:r>
+              <a:rPr>
+                <a:solidFill>
+                  <a:srgbClr val="003B4F"/>
+                </a:solidFill>
+                <a:latin typeface="Courier"/>
+              </a:rPr>
+              <a:t> </a:t>
+            </a:r>
+            <a:r>
+              <a:rPr>
+                <a:solidFill>
+                  <a:srgbClr val="8F5902"/>
+                </a:solidFill>
+                <a:latin typeface="Courier"/>
+              </a:rPr>
+              <a:t>TRUE</a:t>
+            </a:r>
+            <a:r>
+              <a:rPr>
+                <a:solidFill>
+                  <a:srgbClr val="003B4F"/>
+                </a:solidFill>
+                <a:latin typeface="Courier"/>
+              </a:rPr>
+              <a:t>)</a:t>
+            </a:r>
+          </a:p>
+          <a:p>
+            <a:pPr lvl="0" indent="0">
+              <a:buNone/>
+            </a:pPr>
+            <a:r>
+              <a:rPr>
+                <a:latin typeface="Courier"/>
+              </a:rPr>
+              <a:t>
+    Wilcoxon signed rank exact test
+data:  p_wide_df$shady and p_wide_df$sunny
+V = 0, p-value = 0.125
+alternative hypothesis: true location shift is not equal to 0</a:t>
+            </a:r>
+          </a:p>
+        </p:txBody>
+      </p:sp>
+      <p:sp>
+        <p:nvSpPr>
+          <p:cNvPr id="4" name="Content Placeholder 3"/>
+          <p:cNvSpPr>
+            <a:spLocks noGrp="1"/>
+          </p:cNvSpPr>
+          <p:nvPr>
+            <p:ph idx="2" sz="half"/>
+          </p:nvPr>
+        </p:nvSpPr>
+        <p:spPr/>
+        <p:txBody>
+          <a:bodyPr/>
+          <a:lstStyle/>
+          <a:p>
+            <a:pPr lvl="0" indent="0" marL="1270000">
+              <a:buNone/>
+            </a:pPr>
+            <a:r>
+              <a:rPr sz="2000" b="1"/>
+              <a:t>Tip</a:t>
+            </a:r>
+          </a:p>
+          <a:p>
+            <a:pPr lvl="0" indent="0" marL="1270000">
+              <a:buNone/>
+            </a:pPr>
+            <a:r>
+              <a:rPr sz="2000" b="1"/>
+              <a:t>🖐 Notice </a:t>
+            </a:r>
+            <a:r>
+              <a:rPr sz="2000" b="1">
+                <a:latin typeface="Courier"/>
+              </a:rPr>
+              <a:t>V = 0</a:t>
+            </a:r>
+          </a:p>
+          <a:p>
+            <a:pPr lvl="0" indent="0" marL="1270000">
+              <a:buNone/>
+            </a:pPr>
+            <a:r>
+              <a:rPr sz="2000"/>
+              <a:t>The signed-rank statistic is </a:t>
+            </a:r>
+            <a:r>
+              <a:rPr sz="2000" b="1"/>
+              <a:t>zero</a:t>
+            </a:r>
+            <a:r>
+              <a:rPr sz="2000"/>
+              <a:t> — meaning </a:t>
+            </a:r>
+            <a:r>
+              <a:rPr sz="2000" i="1"/>
+              <a:t>every single tree</a:t>
+            </a:r>
+            <a:r>
+              <a:rPr sz="2000"/>
+              <a:t> moved in the same direction. There is no arrangement of these four trees that would look more consistent.</a:t>
+            </a:r>
+          </a:p>
+          <a:p>
+            <a:pPr lvl="0" indent="0" marL="1270000">
+              <a:buNone/>
+            </a:pPr>
+            <a:r>
+              <a:rPr sz="2000"/>
+              <a:t>Notice too that R says </a:t>
+            </a:r>
+            <a:r>
+              <a:rPr sz="2000" b="1"/>
+              <a:t>“exact test”</a:t>
+            </a:r>
+            <a:r>
+              <a:rPr sz="2000"/>
+              <a:t> for both. With no tied values it enumerates every possible arrangement rather than approximating. Hold on to that word — the next slide explains why it matters.</a:t>
+            </a:r>
+          </a:p>
+        </p:txBody>
+      </p:sp>
+    </p:spTree>
+  </p:cSld>
+</p:sld>
+</file>
+
+<file path=ppt/slides/slide29.xml><?xml version="1.0" encoding="utf-8"?>
+<p:sld xmlns:a="http://schemas.openxmlformats.org/drawingml/2006/main" xmlns:r="http://schemas.openxmlformats.org/officeDocument/2006/relationships" xmlns:p="http://schemas.openxmlformats.org/presentationml/2006/main">
+  <p:cSld>
+    <p:spTree>
+      <p:nvGrpSpPr>
+        <p:cNvPr id="1" name=""/>
+        <p:cNvGrpSpPr/>
+        <p:nvPr/>
+      </p:nvGrpSpPr>
+      <p:grpSpPr>
+        <a:xfrm>
+          <a:off x="0" y="0"/>
+          <a:ext cx="0" cy="0"/>
+          <a:chOff x="0" y="0"/>
+          <a:chExt cx="0" cy="0"/>
+        </a:xfrm>
+      </p:grpSpPr>
+      <p:sp>
+        <p:nvSpPr>
+          <p:cNvPr id="2" name="Title 1"/>
+          <p:cNvSpPr>
+            <a:spLocks noGrp="1"/>
+          </p:cNvSpPr>
+          <p:nvPr>
+            <p:ph type="title"/>
+          </p:nvPr>
+        </p:nvSpPr>
+        <p:spPr>
+          <a:xfrm>
+            <a:off x="0" y="0"/>
+            <a:ext cx="9144000" cy="602780"/>
+          </a:xfrm>
+          <a:solidFill>
+            <a:srgbClr val="70121D"/>
+          </a:solidFill>
+        </p:spPr>
+        <p:txBody>
+          <a:bodyPr/>
+          <a:lstStyle/>
+          <a:p>
+            <a:pPr lvl="0" indent="0" marL="0">
+              <a:buNone/>
+            </a:pPr>
+            <a:r>
+              <a:rPr/>
+              <a:t>Same answer, less power</a:t>
+            </a:r>
+          </a:p>
+        </p:txBody>
+      </p:sp>
+      <p:graphicFrame>
+        <p:nvGraphicFramePr>
+          <p:cNvPr id="6" name="Content Placeholder 5"/>
+          <p:cNvGraphicFramePr>
+            <a:graphicFrameLocks noGrp="1"/>
+          </p:cNvGraphicFramePr>
+          <p:nvPr>
+            <p:ph idx="1"/>
+          </p:nvPr>
+        </p:nvGraphicFramePr>
+        <p:xfrm>
+          <a:off x="0" y="660400"/>
+          <a:ext cx="6007100" cy="4470400"/>
+        </p:xfrm>
+        <a:graphic>
+          <a:graphicData uri="http://schemas.openxmlformats.org/drawingml/2006/table">
+            <a:tbl>
+              <a:tblPr firstRow="1" bandRow="1">
+                <a:tableStyleId>{5C22544A-7EE6-4342-B048-85BDC9FD1C3A}</a:tableStyleId>
+              </a:tblPr>
+              <a:tblGrid>
+                <a:gridCol w="2006600"/>
+                <a:gridCol w="2006600"/>
+                <a:gridCol w="2006600"/>
+              </a:tblGrid>
+              <a:tr h="0">
+                <a:tc>
+                  <a:txBody>
+                    <a:bodyPr/>
+                    <a:lstStyle/>
+                    <a:p>
+                      <a:pPr lvl="0" indent="0" marL="0">
+                        <a:buNone/>
+                      </a:pPr>
+                      <a:r>
+                        <a:rPr/>
+                        <a:t>Comparison</a:t>
+                      </a:r>
+                    </a:p>
+                  </a:txBody>
+                  <a:tcPr/>
+                </a:tc>
+                <a:tc>
+                  <a:txBody>
+                    <a:bodyPr/>
+                    <a:lstStyle/>
+                    <a:p>
+                      <a:pPr lvl="0" indent="0" marL="0">
+                        <a:buNone/>
+                      </a:pPr>
+                      <a:r>
+                        <a:rPr/>
+                        <a:t>Parametric</a:t>
+                      </a:r>
+                    </a:p>
+                  </a:txBody>
+                  <a:tcPr/>
+                </a:tc>
+                <a:tc>
+                  <a:txBody>
+                    <a:bodyPr/>
+                    <a:lstStyle/>
+                    <a:p>
+                      <a:pPr lvl="0" indent="0" marL="0">
+                        <a:buNone/>
+                      </a:pPr>
+                      <a:r>
+                        <a:rPr/>
+                        <a:t>Non-parametric</a:t>
+                      </a:r>
+                    </a:p>
+                  </a:txBody>
+                  <a:tcPr/>
+                </a:tc>
+              </a:tr>
+              <a:tr h="0">
+                <a:tc>
+                  <a:txBody>
+                    <a:bodyPr/>
+                    <a:lstStyle/>
+                    <a:p>
+                      <a:pPr lvl="0" indent="0" marL="0">
+                        <a:buNone/>
+                      </a:pPr>
+                      <a:r>
+                        <a:rPr/>
+                        <a:t>Unpaired (2 groups)</a:t>
+                      </a:r>
+                    </a:p>
+                  </a:txBody>
+                </a:tc>
+                <a:tc>
+                  <a:txBody>
+                    <a:bodyPr/>
+                    <a:lstStyle/>
+                    <a:p>
+                      <a:pPr lvl="0" indent="0" marL="0">
+                        <a:buNone/>
+                      </a:pPr>
+                      <a:r>
+                        <a:rPr/>
+                        <a:t>t-test </a:t>
+                      </a:r>
+                      <a:r>
+                        <a:rPr b="1"/>
+                        <a:t>p = 0.425</a:t>
+                      </a:r>
+                    </a:p>
+                  </a:txBody>
+                </a:tc>
+                <a:tc>
+                  <a:txBody>
+                    <a:bodyPr/>
+                    <a:lstStyle/>
+                    <a:p>
+                      <a:pPr lvl="0" indent="0" marL="0">
+                        <a:buNone/>
+                      </a:pPr>
+                      <a:r>
+                        <a:rPr/>
+                        <a:t>Mann-Whitney </a:t>
+                      </a:r>
+                      <a:r>
+                        <a:rPr b="1"/>
+                        <a:t>p = 0.486</a:t>
+                      </a:r>
+                    </a:p>
+                  </a:txBody>
+                </a:tc>
+              </a:tr>
+              <a:tr h="0">
+                <a:tc>
+                  <a:txBody>
+                    <a:bodyPr/>
+                    <a:lstStyle/>
+                    <a:p>
+                      <a:pPr lvl="0" indent="0" marL="0">
+                        <a:buNone/>
+                      </a:pPr>
+                      <a:r>
+                        <a:rPr/>
+                        <a:t>Paired (4 trees)</a:t>
+                      </a:r>
+                    </a:p>
+                  </a:txBody>
+                </a:tc>
+                <a:tc>
+                  <a:txBody>
+                    <a:bodyPr/>
+                    <a:lstStyle/>
+                    <a:p>
+                      <a:pPr lvl="0" indent="0" marL="0">
+                        <a:buNone/>
+                      </a:pPr>
+                      <a:r>
+                        <a:rPr/>
+                        <a:t>paired t </a:t>
+                      </a:r>
+                      <a:r>
+                        <a:rPr b="1"/>
+                        <a:t>p = 0.072</a:t>
+                      </a:r>
+                    </a:p>
+                  </a:txBody>
+                </a:tc>
+                <a:tc>
+                  <a:txBody>
+                    <a:bodyPr/>
+                    <a:lstStyle/>
+                    <a:p>
+                      <a:pPr lvl="0" indent="0" marL="0">
+                        <a:buNone/>
+                      </a:pPr>
+                      <a:r>
+                        <a:rPr/>
+                        <a:t>signed-rank </a:t>
+                      </a:r>
+                      <a:r>
+                        <a:rPr b="1"/>
+                        <a:t>p = 0.125</a:t>
+                      </a:r>
+                    </a:p>
+                  </a:txBody>
+                </a:tc>
+              </a:tr>
+            </a:tbl>
+          </a:graphicData>
+        </a:graphic>
+      </p:graphicFrame>
+      <p:sp>
+        <p:nvSpPr>
+          <p:cNvPr id="4" name="Content Placeholder 3"/>
+          <p:cNvSpPr>
+            <a:spLocks noGrp="1"/>
+          </p:cNvSpPr>
+          <p:nvPr>
+            <p:ph idx="2" sz="half"/>
+          </p:nvPr>
+        </p:nvSpPr>
+        <p:spPr/>
+        <p:txBody>
+          <a:bodyPr/>
+          <a:lstStyle/>
+          <a:p>
+            <a:pPr lvl="0" indent="0" marL="1270000">
+              <a:buNone/>
+            </a:pPr>
+            <a:r>
+              <a:rPr sz="2000" b="1"/>
+              <a:t>Important</a:t>
+            </a:r>
+          </a:p>
+          <a:p>
+            <a:pPr lvl="0" indent="0" marL="1270000">
+              <a:buNone/>
+            </a:pPr>
+            <a:r>
+              <a:rPr sz="2000" b="1"/>
+              <a:t>⚠️ At n = 4, the signed-rank test hits a wall</a:t>
+            </a:r>
+          </a:p>
+          <a:p>
+            <a:pPr lvl="0" indent="0" marL="1270000">
+              <a:buNone/>
+            </a:pPr>
+            <a:r>
+              <a:rPr sz="2000"/>
+              <a:t>With 4 pairs there are only 2⁴ = </a:t>
+            </a:r>
+            <a:r>
+              <a:rPr sz="2000" b="1"/>
+              <a:t>16</a:t>
+            </a:r>
+            <a:r>
+              <a:rPr sz="2000"/>
+              <a:t> possible arrangements of plus and minus signs. The most extreme possible result — all four the same way, which is exactly what we got — has a two-sided p of 2/16 = </a:t>
+            </a:r>
+            <a:r>
+              <a:rPr sz="2000" b="1"/>
+              <a:t>0.125</a:t>
+            </a:r>
+            <a:r>
+              <a:rPr sz="2000"/>
+              <a:t>.</a:t>
+            </a:r>
+          </a:p>
+          <a:p>
+            <a:pPr lvl="0" indent="0" marL="1270000">
+              <a:buNone/>
+            </a:pPr>
+            <a:r>
+              <a:rPr sz="2000"/>
+              <a:t>So with four trees, a Wilcoxon signed-rank test </a:t>
+            </a:r>
+            <a:r>
+              <a:rPr sz="2000" b="1"/>
+              <a:t>can never return a p-value below 0.125</a:t>
+            </a:r>
+            <a:r>
+              <a:rPr sz="2000"/>
+              <a:t>, no matter how enormous the effect.</a:t>
+            </a:r>
+          </a:p>
+          <a:p>
+            <a:pPr lvl="0" indent="0">
+              <a:buNone/>
+            </a:pPr>
+            <a:r>
+              <a:rPr>
+                <a:solidFill>
+                  <a:srgbClr val="AD0000"/>
+                </a:solidFill>
+                <a:latin typeface="Courier"/>
+              </a:rPr>
+              <a:t>2</a:t>
+            </a:r>
+            <a:r>
+              <a:rPr>
+                <a:solidFill>
+                  <a:srgbClr val="003B4F"/>
+                </a:solidFill>
+                <a:latin typeface="Courier"/>
+              </a:rPr>
+              <a:t> </a:t>
+            </a:r>
+            <a:r>
+              <a:rPr>
+                <a:solidFill>
+                  <a:srgbClr val="5E5E5E"/>
+                </a:solidFill>
+                <a:latin typeface="Courier"/>
+              </a:rPr>
+              <a:t>/</a:t>
+            </a:r>
+            <a:r>
+              <a:rPr>
+                <a:solidFill>
+                  <a:srgbClr val="003B4F"/>
+                </a:solidFill>
+                <a:latin typeface="Courier"/>
+              </a:rPr>
+              <a:t> </a:t>
+            </a:r>
+            <a:r>
+              <a:rPr>
+                <a:solidFill>
+                  <a:srgbClr val="AD0000"/>
+                </a:solidFill>
+                <a:latin typeface="Courier"/>
+              </a:rPr>
+              <a:t>2</a:t>
+            </a:r>
+            <a:r>
+              <a:rPr>
+                <a:solidFill>
+                  <a:srgbClr val="5E5E5E"/>
+                </a:solidFill>
+                <a:latin typeface="Courier"/>
+              </a:rPr>
+              <a:t>^</a:t>
+            </a:r>
+            <a:r>
+              <a:rPr>
+                <a:solidFill>
+                  <a:srgbClr val="AD0000"/>
+                </a:solidFill>
+                <a:latin typeface="Courier"/>
+              </a:rPr>
+              <a:t>4</a:t>
+            </a:r>
+            <a:r>
+              <a:rPr>
+                <a:solidFill>
+                  <a:srgbClr val="003B4F"/>
+                </a:solidFill>
+                <a:latin typeface="Courier"/>
+              </a:rPr>
+              <a:t>     </a:t>
+            </a:r>
+            <a:r>
+              <a:rPr>
+                <a:solidFill>
+                  <a:srgbClr val="5E5E5E"/>
+                </a:solidFill>
+                <a:latin typeface="Courier"/>
+              </a:rPr>
+              <a:t># smallest possible two-sided p, 4 pairs</a:t>
+            </a:r>
+          </a:p>
+          <a:p>
+            <a:pPr lvl="0" indent="0">
+              <a:buNone/>
+            </a:pPr>
+            <a:r>
+              <a:rPr sz="2000">
+                <a:latin typeface="Courier"/>
+              </a:rPr>
+              <a:t>[1] 0.125</a:t>
+            </a:r>
+          </a:p>
+          <a:p>
+            <a:pPr lvl="0" indent="0" marL="1270000">
+              <a:buNone/>
+            </a:pPr>
+            <a:r>
+              <a:rPr sz="2000"/>
+              <a:t>The test did not fail to find our effect. It was </a:t>
+            </a:r>
+            <a:r>
+              <a:rPr sz="2000" b="1"/>
+              <a:t>arithmetically incapable</a:t>
+            </a:r>
+            <a:r>
+              <a:rPr sz="2000"/>
+              <a:t> of declaring it significant.</a:t>
+            </a:r>
+          </a:p>
+        </p:txBody>
+      </p:sp>
+    </p:spTree>
+  </p:cSld>
+</p:sld>
+</file>
+
+<file path=ppt/slides/slide3.xml><?xml version="1.0" encoding="utf-8"?>
+<p:sld xmlns:a="http://schemas.openxmlformats.org/drawingml/2006/main" xmlns:r="http://schemas.openxmlformats.org/officeDocument/2006/relationships" xmlns:p="http://schemas.openxmlformats.org/presentationml/2006/main">
+  <p:cSld>
+    <p:spTree>
+      <p:nvGrpSpPr>
+        <p:cNvPr id="1" name=""/>
+        <p:cNvGrpSpPr/>
+        <p:nvPr/>
+      </p:nvGrpSpPr>
+      <p:grpSpPr>
+        <a:xfrm>
+          <a:off x="0" y="0"/>
+          <a:ext cx="0" cy="0"/>
+          <a:chOff x="0" y="0"/>
+          <a:chExt cx="0" cy="0"/>
+        </a:xfrm>
+      </p:grpSpPr>
+      <p:sp>
+        <p:nvSpPr>
+          <p:cNvPr id="2" name="Title 1"/>
+          <p:cNvSpPr>
+            <a:spLocks noGrp="1"/>
+          </p:cNvSpPr>
+          <p:nvPr>
+            <p:ph type="title"/>
+          </p:nvPr>
+        </p:nvSpPr>
+        <p:spPr>
+          <a:xfrm>
+            <a:off x="139485" y="78119"/>
+            <a:ext cx="8229600" cy="607682"/>
+          </a:xfrm>
+        </p:spPr>
+        <p:txBody>
+          <a:bodyPr/>
+          <a:lstStyle/>
+          <a:p>
+            <a:pPr lvl="0" indent="0" marL="0">
+              <a:buNone/>
+            </a:pPr>
+            <a:r>
+              <a:rPr/>
+              <a:t>Today’s Overview</a:t>
+            </a:r>
+          </a:p>
+        </p:txBody>
+      </p:sp>
+      <p:sp>
+        <p:nvSpPr>
+          <p:cNvPr id="3" name="Text Placeholder 2"/>
+          <p:cNvSpPr>
+            <a:spLocks noGrp="1"/>
+          </p:cNvSpPr>
+          <p:nvPr>
+            <p:ph idx="1" type="body"/>
+          </p:nvPr>
+        </p:nvSpPr>
+        <p:spPr/>
+        <p:txBody>
+          <a:bodyPr/>
+          <a:lstStyle/>
+          <a:p>
+            <a:pPr lvl="0" indent="0" marL="0">
+              <a:buNone/>
+            </a:pPr>
+            <a:r>
+              <a:rPr/>
+              <a:t>What we will cover today:</a:t>
+            </a:r>
+          </a:p>
+          <a:p>
             <a:pPr lvl="0"/>
             <a:r>
               <a:rPr/>
-              <a:t>Permutation tests are based on resampling: reshuffling the original data</a:t>
+              <a:t>What are the assumptions again, and how do you assess them?</a:t>
             </a:r>
           </a:p>
           <a:p>
             <a:pPr lvl="0"/>
             <a:r>
               <a:rPr/>
-              <a:t>Resampling allows parameter estimation when the distribution is unknown, including SEs and CIs of statistics (means, medians)</a:t>
-            </a:r>
-          </a:p>
-          <a:p>
-            <a:pPr lvl="0"/>
-            <a:r>
-              <a:rPr/>
-              <a:t>A common approach is the bootstrap: resample with replacement many times, recalculate sample stats</a:t>
-            </a:r>
-          </a:p>
-          <a:p>
-            <a:pPr lvl="0"/>
-            <a:r>
-              <a:rPr/>
-              <a:t>We use the </a:t>
-            </a:r>
-            <a:r>
-              <a:rPr>
-                <a:latin typeface="Courier"/>
-              </a:rPr>
-              <a:t>perm</a:t>
-            </a:r>
-            <a:r>
-              <a:rPr/>
-              <a:t> package</a:t>
-            </a:r>
-          </a:p>
-          <a:p>
-            <a:pPr lvl="0"/>
-            <a:r>
-              <a:rPr/>
-              <a:t>H₀: µ_A = µ_B, Hₐ: µ_A ≠ µ_B</a:t>
-            </a:r>
-          </a:p>
-          <a:p>
-            <a:pPr lvl="0"/>
-            <a:r>
-              <a:rPr/>
-              <a:t>Calculates the difference Δ in means between two groups</a:t>
+              <a:t>What to do when assumptions fail:</a:t>
+            </a:r>
+          </a:p>
+          <a:p>
+            <a:pPr lvl="1"/>
+            <a:r>
+              <a:rPr/>
+              <a:t>Robust tests</a:t>
+            </a:r>
+          </a:p>
+          <a:p>
+            <a:pPr lvl="1"/>
+            <a:r>
+              <a:rPr/>
+              <a:t>Rank-based tests</a:t>
+            </a:r>
+          </a:p>
+          <a:p>
+            <a:pPr lvl="1"/>
+            <a:r>
+              <a:rPr/>
+              <a:t>Permutation tests</a:t>
+            </a:r>
+          </a:p>
+        </p:txBody>
+      </p:sp>
+      <p:sp>
+        <p:nvSpPr>
+          <p:cNvPr id="5" name="Text Placeholder 4"/>
+          <p:cNvSpPr>
+            <a:spLocks noGrp="1"/>
+          </p:cNvSpPr>
+          <p:nvPr>
+            <p:ph idx="3" sz="quarter" type="body"/>
+          </p:nvPr>
+        </p:nvSpPr>
+        <p:spPr/>
+        <p:txBody>
+          <a:bodyPr/>
+          <a:lstStyle/>
+          <a:p>
+            <a:pPr lvl="0" indent="0" marL="0">
+              <a:buNone/>
+            </a:pPr>
+            <a:r>
+              <a:rPr/>
+              <a:t>Let’s work with the lake trout data, as the weights are pretty cool and the assumptions may or may not hold. This easily translates to any of the other data frames you might want to use.</a:t>
             </a:r>
           </a:p>
         </p:txBody>
       </p:sp>
       <p:pic>
         <p:nvPicPr>
-          <p:cNvPr descr="nonparametric_t_tests_lecture_files/figure-pptx/unnamed-chunk-13-1.png" id="0" name="Picture 1"/>
+          <p:cNvPr descr="images/lake_trout.jpg" id="0" name="Picture 1"/>
+          <p:cNvPicPr>
+            <a:picLocks noGrp="1" noChangeAspect="1"/>
+          </p:cNvPicPr>
+          <p:nvPr/>
+        </p:nvPicPr>
+        <p:blipFill>
+          <a:blip r:embed="rId2"/>
+          <a:stretch>
+            <a:fillRect/>
+          </a:stretch>
+        </p:blipFill>
+        <p:spPr bwMode="auto">
+          <a:xfrm>
+            <a:off x="4749800" y="1955800"/>
+            <a:ext cx="4038600" cy="1447800"/>
+          </a:xfrm>
+          <a:prstGeom prst="rect">
+            <a:avLst/>
+          </a:prstGeom>
+          <a:noFill/>
+          <a:ln w="9525">
+            <a:noFill/>
+            <a:headEnd/>
+            <a:tailEnd/>
+          </a:ln>
+        </p:spPr>
+      </p:pic>
+      <p:sp>
+        <p:nvSpPr>
+          <p:cNvPr id="1" name="TextBox 3"/>
+          <p:cNvSpPr txBox="1"/>
+          <p:nvPr>
+            <p:ph idx="1"/>
+          </p:nvPr>
+        </p:nvSpPr>
+        <p:spPr>
+          <a:xfrm>
+            <a:off x="4749800" y="4064000"/>
+            <a:ext cx="4038600" cy="508000"/>
+          </a:xfrm>
+          <a:prstGeom prst="rect">
+            <a:avLst/>
+          </a:prstGeom>
+          <a:noFill/>
+        </p:spPr>
+        <p:txBody>
+          <a:bodyPr/>
+          <a:lstStyle/>
+          <a:p>
+            <a:pPr lvl="0" indent="0" marL="0" algn="ctr">
+              <a:buNone/>
+            </a:pPr>
+            <a:r>
+              <a:rPr/>
+              <a:t>Illustration of a lake trout in profile, showing its mottled brown-and-cream coloring and forked tail, the species whose weight and length data are used throughout this lecture.</a:t>
+            </a:r>
+          </a:p>
+        </p:txBody>
+      </p:sp>
+    </p:spTree>
+  </p:cSld>
+</p:sld>
+</file>
+
+<file path=ppt/slides/slide30.xml><?xml version="1.0" encoding="utf-8"?>
+<p:sld xmlns:a="http://schemas.openxmlformats.org/drawingml/2006/main" xmlns:r="http://schemas.openxmlformats.org/officeDocument/2006/relationships" xmlns:p="http://schemas.openxmlformats.org/presentationml/2006/main">
+  <p:cSld>
+    <p:spTree>
+      <p:nvGrpSpPr>
+        <p:cNvPr id="1" name=""/>
+        <p:cNvGrpSpPr/>
+        <p:nvPr/>
+      </p:nvGrpSpPr>
+      <p:grpSpPr>
+        <a:xfrm>
+          <a:off x="0" y="0"/>
+          <a:ext cx="0" cy="0"/>
+          <a:chOff x="0" y="0"/>
+          <a:chExt cx="0" cy="0"/>
+        </a:xfrm>
+      </p:grpSpPr>
+      <p:sp>
+        <p:nvSpPr>
+          <p:cNvPr id="2" name="Title 1"/>
+          <p:cNvSpPr>
+            <a:spLocks noGrp="1"/>
+          </p:cNvSpPr>
+          <p:nvPr>
+            <p:ph type="title"/>
+          </p:nvPr>
+        </p:nvSpPr>
+        <p:spPr>
+          <a:xfrm>
+            <a:off x="0" y="0"/>
+            <a:ext cx="9144000" cy="602780"/>
+          </a:xfrm>
+          <a:solidFill>
+            <a:srgbClr val="70121D"/>
+          </a:solidFill>
+        </p:spPr>
+        <p:txBody>
+          <a:bodyPr/>
+          <a:lstStyle/>
+          <a:p>
+            <a:pPr lvl="0" indent="0" marL="0">
+              <a:buNone/>
+            </a:pPr>
+            <a:r>
+              <a:rPr/>
+              <a:t>What that means in practice</a:t>
+            </a:r>
+          </a:p>
+        </p:txBody>
+      </p:sp>
+      <p:sp>
+        <p:nvSpPr>
+          <p:cNvPr id="3" name="Content Placeholder 2"/>
+          <p:cNvSpPr>
+            <a:spLocks noGrp="1"/>
+          </p:cNvSpPr>
+          <p:nvPr>
+            <p:ph idx="1" sz="half"/>
+          </p:nvPr>
+        </p:nvSpPr>
+        <p:spPr/>
+        <p:txBody>
+          <a:bodyPr/>
+          <a:lstStyle/>
+          <a:p>
+            <a:pPr lvl="0"/>
+            <a:r>
+              <a:rPr/>
+              <a:t>Non-parametric tests are the right call when normality is genuinely broken and cannot be fixed</a:t>
+            </a:r>
+          </a:p>
+          <a:p>
+            <a:pPr lvl="0"/>
+            <a:r>
+              <a:rPr/>
+              <a:t>But they are </a:t>
+            </a:r>
+            <a:r>
+              <a:rPr b="1"/>
+              <a:t>not free</a:t>
+            </a:r>
+            <a:r>
+              <a:rPr/>
+              <a:t>, and they are </a:t>
+            </a:r>
+            <a:r>
+              <a:rPr b="1"/>
+              <a:t>not a safe default</a:t>
+            </a:r>
+          </a:p>
+          <a:p>
+            <a:pPr lvl="0"/>
+            <a:r>
+              <a:rPr/>
+              <a:t>At small n they can be so blunt that no result could ever reach significance — check the floor </a:t>
+            </a:r>
+            <a:r>
+              <a:rPr b="1"/>
+              <a:t>before</a:t>
+            </a:r>
+            <a:r>
+              <a:rPr/>
+              <a:t> you run one</a:t>
+            </a:r>
+          </a:p>
+          <a:p>
+            <a:pPr lvl="0" indent="0" marL="1270000">
+              <a:buNone/>
+            </a:pPr>
+            <a:r>
+              <a:rPr sz="2000" b="1"/>
+              <a:t>Note</a:t>
+            </a:r>
+          </a:p>
+          <a:p>
+            <a:pPr lvl="0" indent="0" marL="1270000">
+              <a:buNone/>
+            </a:pPr>
+            <a:r>
+              <a:rPr sz="2000" b="1"/>
+              <a:t>✅ Key idea</a:t>
+            </a:r>
+          </a:p>
+          <a:p>
+            <a:pPr lvl="0" indent="0" marL="1270000">
+              <a:buNone/>
+            </a:pPr>
+            <a:r>
+              <a:rPr sz="2000"/>
+              <a:t>Choose the test that matches your data’s distribution, not the one that feels safest. For our four trees, the </a:t>
+            </a:r>
+            <a:r>
+              <a:rPr sz="2000" i="1"/>
+              <a:t>parametric</a:t>
+            </a:r>
+            <a:r>
+              <a:rPr sz="2000"/>
+              <a:t> paired t-test — whose assumptions we checked and could not reject — is the more honest and more informative choice.</a:t>
+            </a:r>
+          </a:p>
+        </p:txBody>
+      </p:sp>
+      <p:sp>
+        <p:nvSpPr>
+          <p:cNvPr id="4" name="Content Placeholder 3"/>
+          <p:cNvSpPr>
+            <a:spLocks noGrp="1"/>
+          </p:cNvSpPr>
+          <p:nvPr>
+            <p:ph idx="2" sz="half"/>
+          </p:nvPr>
+        </p:nvSpPr>
+        <p:spPr/>
+        <p:txBody>
+          <a:bodyPr/>
+          <a:lstStyle/>
+          <a:p>
+            <a:pPr lvl="0" indent="0" marL="1270000">
+              <a:buNone/>
+            </a:pPr>
+            <a:r>
+              <a:rPr sz="2000" b="1"/>
+              <a:t>Tip</a:t>
+            </a:r>
+          </a:p>
+          <a:p>
+            <a:pPr lvl="0" indent="0" marL="1270000">
+              <a:buNone/>
+            </a:pPr>
+            <a:r>
+              <a:rPr sz="2000" b="1"/>
+              <a:t>🖐 Try it yourself</a:t>
+            </a:r>
+          </a:p>
+          <a:p>
+            <a:pPr lvl="0" indent="0" marL="1270000">
+              <a:buNone/>
+            </a:pPr>
+            <a:r>
+              <a:rPr sz="2000"/>
+              <a:t>How many pairs would you need before a signed-rank test could reach p &lt; 0.05?</a:t>
+            </a:r>
+          </a:p>
+          <a:p>
+            <a:pPr lvl="0" indent="0">
+              <a:buNone/>
+            </a:pPr>
+            <a:r>
+              <a:rPr>
+                <a:solidFill>
+                  <a:srgbClr val="AD0000"/>
+                </a:solidFill>
+                <a:latin typeface="Courier"/>
+              </a:rPr>
+              <a:t>2</a:t>
+            </a:r>
+            <a:r>
+              <a:rPr>
+                <a:solidFill>
+                  <a:srgbClr val="003B4F"/>
+                </a:solidFill>
+                <a:latin typeface="Courier"/>
+              </a:rPr>
+              <a:t> </a:t>
+            </a:r>
+            <a:r>
+              <a:rPr>
+                <a:solidFill>
+                  <a:srgbClr val="5E5E5E"/>
+                </a:solidFill>
+                <a:latin typeface="Courier"/>
+              </a:rPr>
+              <a:t>/</a:t>
+            </a:r>
+            <a:r>
+              <a:rPr>
+                <a:solidFill>
+                  <a:srgbClr val="003B4F"/>
+                </a:solidFill>
+                <a:latin typeface="Courier"/>
+              </a:rPr>
+              <a:t> </a:t>
+            </a:r>
+            <a:r>
+              <a:rPr>
+                <a:solidFill>
+                  <a:srgbClr val="AD0000"/>
+                </a:solidFill>
+                <a:latin typeface="Courier"/>
+              </a:rPr>
+              <a:t>2</a:t>
+            </a:r>
+            <a:r>
+              <a:rPr>
+                <a:solidFill>
+                  <a:srgbClr val="5E5E5E"/>
+                </a:solidFill>
+                <a:latin typeface="Courier"/>
+              </a:rPr>
+              <a:t>^</a:t>
+            </a:r>
+            <a:r>
+              <a:rPr>
+                <a:solidFill>
+                  <a:srgbClr val="AD0000"/>
+                </a:solidFill>
+                <a:latin typeface="Courier"/>
+              </a:rPr>
+              <a:t>5</a:t>
+            </a:r>
+            <a:r>
+              <a:rPr>
+                <a:solidFill>
+                  <a:srgbClr val="003B4F"/>
+                </a:solidFill>
+                <a:latin typeface="Courier"/>
+              </a:rPr>
+              <a:t>    </a:t>
+            </a:r>
+            <a:r>
+              <a:rPr>
+                <a:solidFill>
+                  <a:srgbClr val="5E5E5E"/>
+                </a:solidFill>
+                <a:latin typeface="Courier"/>
+              </a:rPr>
+              <a:t># 5 pairs</a:t>
+            </a:r>
+            <a:br/>
+            <a:r>
+              <a:rPr>
+                <a:solidFill>
+                  <a:srgbClr val="AD0000"/>
+                </a:solidFill>
+                <a:latin typeface="Courier"/>
+              </a:rPr>
+              <a:t>2</a:t>
+            </a:r>
+            <a:r>
+              <a:rPr>
+                <a:solidFill>
+                  <a:srgbClr val="003B4F"/>
+                </a:solidFill>
+                <a:latin typeface="Courier"/>
+              </a:rPr>
+              <a:t> </a:t>
+            </a:r>
+            <a:r>
+              <a:rPr>
+                <a:solidFill>
+                  <a:srgbClr val="5E5E5E"/>
+                </a:solidFill>
+                <a:latin typeface="Courier"/>
+              </a:rPr>
+              <a:t>/</a:t>
+            </a:r>
+            <a:r>
+              <a:rPr>
+                <a:solidFill>
+                  <a:srgbClr val="003B4F"/>
+                </a:solidFill>
+                <a:latin typeface="Courier"/>
+              </a:rPr>
+              <a:t> </a:t>
+            </a:r>
+            <a:r>
+              <a:rPr>
+                <a:solidFill>
+                  <a:srgbClr val="AD0000"/>
+                </a:solidFill>
+                <a:latin typeface="Courier"/>
+              </a:rPr>
+              <a:t>2</a:t>
+            </a:r>
+            <a:r>
+              <a:rPr>
+                <a:solidFill>
+                  <a:srgbClr val="5E5E5E"/>
+                </a:solidFill>
+                <a:latin typeface="Courier"/>
+              </a:rPr>
+              <a:t>^</a:t>
+            </a:r>
+            <a:r>
+              <a:rPr>
+                <a:solidFill>
+                  <a:srgbClr val="AD0000"/>
+                </a:solidFill>
+                <a:latin typeface="Courier"/>
+              </a:rPr>
+              <a:t>6</a:t>
+            </a:r>
+            <a:r>
+              <a:rPr>
+                <a:solidFill>
+                  <a:srgbClr val="003B4F"/>
+                </a:solidFill>
+                <a:latin typeface="Courier"/>
+              </a:rPr>
+              <a:t>    </a:t>
+            </a:r>
+            <a:r>
+              <a:rPr>
+                <a:solidFill>
+                  <a:srgbClr val="5E5E5E"/>
+                </a:solidFill>
+                <a:latin typeface="Courier"/>
+              </a:rPr>
+              <a:t># 6 pairs</a:t>
+            </a:r>
+          </a:p>
+        </p:txBody>
+      </p:sp>
+    </p:spTree>
+  </p:cSld>
+</p:sld>
+</file>
+
+<file path=ppt/slides/slide31.xml><?xml version="1.0" encoding="utf-8"?>
+<p:sld xmlns:a="http://schemas.openxmlformats.org/drawingml/2006/main" xmlns:r="http://schemas.openxmlformats.org/officeDocument/2006/relationships" xmlns:p="http://schemas.openxmlformats.org/presentationml/2006/main">
+  <p:cSld>
+    <p:spTree>
+      <p:nvGrpSpPr>
+        <p:cNvPr id="1" name=""/>
+        <p:cNvGrpSpPr/>
+        <p:nvPr/>
+      </p:nvGrpSpPr>
+      <p:grpSpPr>
+        <a:xfrm>
+          <a:off x="0" y="0"/>
+          <a:ext cx="0" cy="0"/>
+          <a:chOff x="0" y="0"/>
+          <a:chExt cx="0" cy="0"/>
+        </a:xfrm>
+      </p:grpSpPr>
+      <p:sp>
+        <p:nvSpPr>
+          <p:cNvPr id="2" name="Title 1"/>
+          <p:cNvSpPr>
+            <a:spLocks noGrp="1"/>
+          </p:cNvSpPr>
+          <p:nvPr>
+            <p:ph type="title"/>
+          </p:nvPr>
+        </p:nvSpPr>
+        <p:spPr>
+          <a:xfrm>
+            <a:off x="0" y="0"/>
+            <a:ext cx="9144000" cy="582780"/>
+          </a:xfrm>
+        </p:spPr>
+        <p:txBody>
+          <a:bodyPr/>
+          <a:lstStyle/>
+          <a:p>
+            <a:pPr lvl="0" indent="0" marL="0">
+              <a:buNone/>
+            </a:pPr>
+            <a:r>
+              <a:rPr/>
+              <a:t>Part 6 · Permutation Tests</a:t>
+            </a:r>
+          </a:p>
+        </p:txBody>
+      </p:sp>
+    </p:spTree>
+  </p:cSld>
+</p:sld>
+</file>
+
+<file path=ppt/slides/slide32.xml><?xml version="1.0" encoding="utf-8"?>
+<p:sld xmlns:a="http://schemas.openxmlformats.org/drawingml/2006/main" xmlns:r="http://schemas.openxmlformats.org/officeDocument/2006/relationships" xmlns:p="http://schemas.openxmlformats.org/presentationml/2006/main">
+  <p:cSld>
+    <p:spTree>
+      <p:nvGrpSpPr>
+        <p:cNvPr id="1" name=""/>
+        <p:cNvGrpSpPr/>
+        <p:nvPr/>
+      </p:nvGrpSpPr>
+      <p:grpSpPr>
+        <a:xfrm>
+          <a:off x="0" y="0"/>
+          <a:ext cx="0" cy="0"/>
+          <a:chOff x="0" y="0"/>
+          <a:chExt cx="0" cy="0"/>
+        </a:xfrm>
+      </p:grpSpPr>
+      <p:sp>
+        <p:nvSpPr>
+          <p:cNvPr id="2" name="Title 1"/>
+          <p:cNvSpPr>
+            <a:spLocks noGrp="1"/>
+          </p:cNvSpPr>
+          <p:nvPr>
+            <p:ph type="title"/>
+          </p:nvPr>
+        </p:nvSpPr>
+        <p:spPr>
+          <a:xfrm>
+            <a:off x="0" y="0"/>
+            <a:ext cx="9144000" cy="602780"/>
+          </a:xfrm>
+          <a:solidFill>
+            <a:srgbClr val="70121D"/>
+          </a:solidFill>
+        </p:spPr>
+        <p:txBody>
+          <a:bodyPr/>
+          <a:lstStyle/>
+          <a:p>
+            <a:pPr lvl="0" indent="0" marL="0">
+              <a:buNone/>
+            </a:pPr>
+            <a:r>
+              <a:rPr/>
+              <a:t>Permutation Tests — Concept</a:t>
+            </a:r>
+          </a:p>
+        </p:txBody>
+      </p:sp>
+      <p:sp>
+        <p:nvSpPr>
+          <p:cNvPr id="3" name="Content Placeholder 2"/>
+          <p:cNvSpPr>
+            <a:spLocks noGrp="1"/>
+          </p:cNvSpPr>
+          <p:nvPr>
+            <p:ph idx="1" sz="half"/>
+          </p:nvPr>
+        </p:nvSpPr>
+        <p:spPr/>
+        <p:txBody>
+          <a:bodyPr/>
+          <a:lstStyle/>
+          <a:p>
+            <a:pPr lvl="0"/>
+            <a:r>
+              <a:rPr/>
+              <a:t>Permutation tests are based on resampling: reshuffling the original data</a:t>
+            </a:r>
+          </a:p>
+          <a:p>
+            <a:pPr lvl="0"/>
+            <a:r>
+              <a:rPr/>
+              <a:t>Resampling allows parameter estimation when the distribution is unknown, including SEs and CIs of statistics (means, medians)</a:t>
+            </a:r>
+          </a:p>
+          <a:p>
+            <a:pPr lvl="0"/>
+            <a:r>
+              <a:rPr/>
+              <a:t>A common approach is the bootstrap: resample with replacement many times, recalculate sample stats</a:t>
+            </a:r>
+          </a:p>
+          <a:p>
+            <a:pPr lvl="0"/>
+            <a:r>
+              <a:rPr/>
+              <a:t>We use the </a:t>
+            </a:r>
+            <a:r>
+              <a:rPr>
+                <a:latin typeface="Courier"/>
+              </a:rPr>
+              <a:t>perm</a:t>
+            </a:r>
+            <a:r>
+              <a:rPr/>
+              <a:t> package</a:t>
+            </a:r>
+          </a:p>
+          <a:p>
+            <a:pPr lvl="0"/>
+            <a:r>
+              <a:rPr/>
+              <a:t>H₀: µ_A = µ_B, Hₐ: µ_A ≠ µ_B</a:t>
+            </a:r>
+          </a:p>
+          <a:p>
+            <a:pPr lvl="0"/>
+            <a:r>
+              <a:rPr/>
+              <a:t>Calculates the difference Δ in means between two groups</a:t>
+            </a:r>
+          </a:p>
+        </p:txBody>
+      </p:sp>
+      <p:pic>
+        <p:nvPicPr>
+          <p:cNvPr descr="nonparametric_t_tests_lecture_files/figure-pptx/nonparametric-t-tests-17-1.png" id="0" name="Picture 1"/>
           <p:cNvPicPr>
             <a:picLocks noGrp="1" noChangeAspect="1"/>
           </p:cNvPicPr>
@@ -5934,1644 +7872,6 @@
 </p:sld>
 </file>
 
-<file path=ppt/slides/slide28.xml><?xml version="1.0" encoding="utf-8"?>
-<p:sld xmlns:a="http://schemas.openxmlformats.org/drawingml/2006/main" xmlns:r="http://schemas.openxmlformats.org/officeDocument/2006/relationships" xmlns:p="http://schemas.openxmlformats.org/presentationml/2006/main">
-  <p:cSld>
-    <p:spTree>
-      <p:nvGrpSpPr>
-        <p:cNvPr id="1" name=""/>
-        <p:cNvGrpSpPr/>
-        <p:nvPr/>
-      </p:nvGrpSpPr>
-      <p:grpSpPr>
-        <a:xfrm>
-          <a:off x="0" y="0"/>
-          <a:ext cx="0" cy="0"/>
-          <a:chOff x="0" y="0"/>
-          <a:chExt cx="0" cy="0"/>
-        </a:xfrm>
-      </p:grpSpPr>
-      <p:sp>
-        <p:nvSpPr>
-          <p:cNvPr id="2" name="Title 1"/>
-          <p:cNvSpPr>
-            <a:spLocks noGrp="1"/>
-          </p:cNvSpPr>
-          <p:nvPr>
-            <p:ph type="title"/>
-          </p:nvPr>
-        </p:nvSpPr>
-        <p:spPr>
-          <a:xfrm>
-            <a:off x="0" y="0"/>
-            <a:ext cx="9144000" cy="602780"/>
-          </a:xfrm>
-          <a:solidFill>
-            <a:srgbClr val="70121D"/>
-          </a:solidFill>
-        </p:spPr>
-        <p:txBody>
-          <a:bodyPr/>
-          <a:lstStyle/>
-          <a:p>
-            <a:pPr lvl="0" indent="0" marL="0">
-              <a:buNone/>
-            </a:pPr>
-            <a:r>
-              <a:rPr/>
-              <a:t>Permutation Tests — Method</a:t>
-            </a:r>
-          </a:p>
-        </p:txBody>
-      </p:sp>
-      <p:sp>
-        <p:nvSpPr>
-          <p:cNvPr id="3" name="Content Placeholder 2"/>
-          <p:cNvSpPr>
-            <a:spLocks noGrp="1"/>
-          </p:cNvSpPr>
-          <p:nvPr>
-            <p:ph idx="1" sz="half"/>
-          </p:nvPr>
-        </p:nvSpPr>
-        <p:spPr/>
-        <p:txBody>
-          <a:bodyPr/>
-          <a:lstStyle/>
-          <a:p>
-            <a:pPr lvl="0"/>
-            <a:r>
-              <a:rPr/>
-              <a:t>Randomly reshuffle observations between groups (keeping n₍NE 12₎ = 323 and n₍Island₎ = 10), calculate Δ</a:t>
-            </a:r>
-          </a:p>
-          <a:p>
-            <a:pPr lvl="0"/>
-            <a:r>
-              <a:rPr/>
-              <a:t>Repeat &gt; 1,000 times</a:t>
-            </a:r>
-          </a:p>
-          <a:p>
-            <a:pPr lvl="0"/>
-            <a:r>
-              <a:rPr/>
-              <a:t>Record the proportion of the differences in means as extreme as (or more extreme than) observed</a:t>
-            </a:r>
-          </a:p>
-          <a:p>
-            <a:pPr lvl="0"/>
-            <a:r>
-              <a:rPr/>
-              <a:t>This is equivalent to a p-value, and can be used in the “traditional” hypothesis-testing framework</a:t>
-            </a:r>
-          </a:p>
-        </p:txBody>
-      </p:sp>
-      <p:sp>
-        <p:nvSpPr>
-          <p:cNvPr id="4" name="Content Placeholder 3"/>
-          <p:cNvSpPr>
-            <a:spLocks noGrp="1"/>
-          </p:cNvSpPr>
-          <p:nvPr>
-            <p:ph idx="2" sz="half"/>
-          </p:nvPr>
-        </p:nvSpPr>
-        <p:spPr/>
-        <p:txBody>
-          <a:bodyPr/>
-          <a:lstStyle/>
-          <a:p>
-            <a:pPr lvl="0" indent="0" marL="1270000">
-              <a:buNone/>
-            </a:pPr>
-            <a:r>
-              <a:rPr sz="2000" b="1"/>
-              <a:t>Tip</a:t>
-            </a:r>
-          </a:p>
-          <a:p>
-            <a:pPr lvl="0" indent="0" marL="1270000">
-              <a:buNone/>
-            </a:pPr>
-            <a:r>
-              <a:rPr sz="2000" b="1"/>
-              <a:t>🖐 For a graphical explanation</a:t>
-            </a:r>
-          </a:p>
-          <a:p>
-            <a:pPr lvl="0" indent="0" marL="1270000">
-              <a:buNone/>
-            </a:pPr>
-            <a:r>
-              <a:rPr sz="2000">
-                <a:hlinkClick r:id="rId2"/>
-              </a:rPr>
-              <a:t>jwilber.me/permutationtest</a:t>
-            </a:r>
-          </a:p>
-        </p:txBody>
-      </p:sp>
-    </p:spTree>
-  </p:cSld>
-</p:sld>
-</file>
-
-<file path=ppt/slides/slide29.xml><?xml version="1.0" encoding="utf-8"?>
-<p:sld xmlns:a="http://schemas.openxmlformats.org/drawingml/2006/main" xmlns:r="http://schemas.openxmlformats.org/officeDocument/2006/relationships" xmlns:p="http://schemas.openxmlformats.org/presentationml/2006/main">
-  <p:cSld>
-    <p:spTree>
-      <p:nvGrpSpPr>
-        <p:cNvPr id="1" name=""/>
-        <p:cNvGrpSpPr/>
-        <p:nvPr/>
-      </p:nvGrpSpPr>
-      <p:grpSpPr>
-        <a:xfrm>
-          <a:off x="0" y="0"/>
-          <a:ext cx="0" cy="0"/>
-          <a:chOff x="0" y="0"/>
-          <a:chExt cx="0" cy="0"/>
-        </a:xfrm>
-      </p:grpSpPr>
-      <p:sp>
-        <p:nvSpPr>
-          <p:cNvPr id="2" name="Title 1"/>
-          <p:cNvSpPr>
-            <a:spLocks noGrp="1"/>
-          </p:cNvSpPr>
-          <p:nvPr>
-            <p:ph type="title"/>
-          </p:nvPr>
-        </p:nvSpPr>
-        <p:spPr>
-          <a:xfrm>
-            <a:off x="0" y="0"/>
-            <a:ext cx="9144000" cy="602780"/>
-          </a:xfrm>
-          <a:solidFill>
-            <a:srgbClr val="70121D"/>
-          </a:solidFill>
-        </p:spPr>
-        <p:txBody>
-          <a:bodyPr/>
-          <a:lstStyle/>
-          <a:p>
-            <a:pPr lvl="0" indent="0" marL="0">
-              <a:buNone/>
-            </a:pPr>
-            <a:r>
-              <a:rPr/>
-              <a:t>Permutation Test Implementation</a:t>
-            </a:r>
-          </a:p>
-        </p:txBody>
-      </p:sp>
-      <p:sp>
-        <p:nvSpPr>
-          <p:cNvPr id="3" name="Content Placeholder 2"/>
-          <p:cNvSpPr>
-            <a:spLocks noGrp="1"/>
-          </p:cNvSpPr>
-          <p:nvPr>
-            <p:ph idx="1" sz="half"/>
-          </p:nvPr>
-        </p:nvSpPr>
-        <p:spPr/>
-        <p:txBody>
-          <a:bodyPr/>
-          <a:lstStyle/>
-          <a:p>
-            <a:pPr lvl="0" indent="0" marL="0">
-              <a:buNone/>
-            </a:pPr>
-            <a:r>
-              <a:rPr/>
-              <a:t>In R, using the </a:t>
-            </a:r>
-            <a:r>
-              <a:rPr>
-                <a:latin typeface="Courier"/>
-              </a:rPr>
-              <a:t>perm</a:t>
-            </a:r>
-            <a:r>
-              <a:rPr/>
-              <a:t> package. Assumptions: both groups have a similar distribution; equal variance.</a:t>
-            </a:r>
-          </a:p>
-          <a:p>
-            <a:pPr lvl="0" indent="0">
-              <a:buNone/>
-            </a:pPr>
-            <a:r>
-              <a:rPr>
-                <a:solidFill>
-                  <a:srgbClr val="4758AB"/>
-                </a:solidFill>
-                <a:latin typeface="Courier"/>
-              </a:rPr>
-              <a:t>library</a:t>
-            </a:r>
-            <a:r>
-              <a:rPr>
-                <a:solidFill>
-                  <a:srgbClr val="003B4F"/>
-                </a:solidFill>
-                <a:latin typeface="Courier"/>
-              </a:rPr>
-              <a:t>(perm)</a:t>
-            </a:r>
-            <a:br/>
-            <a:br/>
-            <a:r>
-              <a:rPr>
-                <a:solidFill>
-                  <a:srgbClr val="003B4F"/>
-                </a:solidFill>
-                <a:latin typeface="Courier"/>
-              </a:rPr>
-              <a:t>ne12_perm_data &lt;- isl_ne12_df </a:t>
-            </a:r>
-            <a:r>
-              <a:rPr>
-                <a:solidFill>
-                  <a:srgbClr val="5E5E5E"/>
-                </a:solidFill>
-                <a:latin typeface="Courier"/>
-              </a:rPr>
-              <a:t>%&gt;%</a:t>
-            </a:r>
-            <a:br/>
-            <a:r>
-              <a:rPr>
-                <a:solidFill>
-                  <a:srgbClr val="003B4F"/>
-                </a:solidFill>
-                <a:latin typeface="Courier"/>
-              </a:rPr>
-              <a:t>  </a:t>
-            </a:r>
-            <a:r>
-              <a:rPr>
-                <a:solidFill>
-                  <a:srgbClr val="4758AB"/>
-                </a:solidFill>
-                <a:latin typeface="Courier"/>
-              </a:rPr>
-              <a:t>filter</a:t>
-            </a:r>
-            <a:r>
-              <a:rPr>
-                <a:solidFill>
-                  <a:srgbClr val="003B4F"/>
-                </a:solidFill>
-                <a:latin typeface="Courier"/>
-              </a:rPr>
-              <a:t>(lake </a:t>
-            </a:r>
-            <a:r>
-              <a:rPr>
-                <a:solidFill>
-                  <a:srgbClr val="5E5E5E"/>
-                </a:solidFill>
-                <a:latin typeface="Courier"/>
-              </a:rPr>
-              <a:t>==</a:t>
-            </a:r>
-            <a:r>
-              <a:rPr>
-                <a:solidFill>
-                  <a:srgbClr val="003B4F"/>
-                </a:solidFill>
-                <a:latin typeface="Courier"/>
-              </a:rPr>
-              <a:t> </a:t>
-            </a:r>
-            <a:r>
-              <a:rPr>
-                <a:solidFill>
-                  <a:srgbClr val="20794D"/>
-                </a:solidFill>
-                <a:latin typeface="Courier"/>
-              </a:rPr>
-              <a:t>"NE 12"</a:t>
-            </a:r>
-            <a:r>
-              <a:rPr>
-                <a:solidFill>
-                  <a:srgbClr val="003B4F"/>
-                </a:solidFill>
-                <a:latin typeface="Courier"/>
-              </a:rPr>
-              <a:t>) </a:t>
-            </a:r>
-            <a:r>
-              <a:rPr>
-                <a:solidFill>
-                  <a:srgbClr val="5E5E5E"/>
-                </a:solidFill>
-                <a:latin typeface="Courier"/>
-              </a:rPr>
-              <a:t>%&gt;%</a:t>
-            </a:r>
-            <a:br/>
-            <a:r>
-              <a:rPr>
-                <a:solidFill>
-                  <a:srgbClr val="003B4F"/>
-                </a:solidFill>
-                <a:latin typeface="Courier"/>
-              </a:rPr>
-              <a:t>  </a:t>
-            </a:r>
-            <a:r>
-              <a:rPr>
-                <a:solidFill>
-                  <a:srgbClr val="4758AB"/>
-                </a:solidFill>
-                <a:latin typeface="Courier"/>
-              </a:rPr>
-              <a:t>pull</a:t>
-            </a:r>
-            <a:r>
-              <a:rPr>
-                <a:solidFill>
-                  <a:srgbClr val="003B4F"/>
-                </a:solidFill>
-                <a:latin typeface="Courier"/>
-              </a:rPr>
-              <a:t>(length_mm)</a:t>
-            </a:r>
-            <a:br/>
-            <a:br/>
-            <a:r>
-              <a:rPr>
-                <a:solidFill>
-                  <a:srgbClr val="5E5E5E"/>
-                </a:solidFill>
-                <a:latin typeface="Courier"/>
-              </a:rPr>
-              <a:t># Randomly sample exactly 25 observations from NE 12</a:t>
-            </a:r>
-            <a:br/>
-            <a:r>
-              <a:rPr>
-                <a:solidFill>
-                  <a:srgbClr val="4758AB"/>
-                </a:solidFill>
-                <a:latin typeface="Courier"/>
-              </a:rPr>
-              <a:t>set.seed</a:t>
-            </a:r>
-            <a:r>
-              <a:rPr>
-                <a:solidFill>
-                  <a:srgbClr val="003B4F"/>
-                </a:solidFill>
-                <a:latin typeface="Courier"/>
-              </a:rPr>
-              <a:t>(</a:t>
-            </a:r>
-            <a:r>
-              <a:rPr>
-                <a:solidFill>
-                  <a:srgbClr val="AD0000"/>
-                </a:solidFill>
-                <a:latin typeface="Courier"/>
-              </a:rPr>
-              <a:t>123</a:t>
-            </a:r>
-            <a:r>
-              <a:rPr>
-                <a:solidFill>
-                  <a:srgbClr val="003B4F"/>
-                </a:solidFill>
-                <a:latin typeface="Courier"/>
-              </a:rPr>
-              <a:t>)</a:t>
-            </a:r>
-            <a:br/>
-            <a:r>
-              <a:rPr>
-                <a:solidFill>
-                  <a:srgbClr val="003B4F"/>
-                </a:solidFill>
-                <a:latin typeface="Courier"/>
-              </a:rPr>
-              <a:t>ne12_perm_data &lt;- </a:t>
-            </a:r>
-            <a:r>
-              <a:rPr>
-                <a:solidFill>
-                  <a:srgbClr val="4758AB"/>
-                </a:solidFill>
-                <a:latin typeface="Courier"/>
-              </a:rPr>
-              <a:t>sample</a:t>
-            </a:r>
-            <a:r>
-              <a:rPr>
-                <a:solidFill>
-                  <a:srgbClr val="003B4F"/>
-                </a:solidFill>
-                <a:latin typeface="Courier"/>
-              </a:rPr>
-              <a:t>(ne12_perm_data, </a:t>
-            </a:r>
-            <a:r>
-              <a:rPr>
-                <a:solidFill>
-                  <a:srgbClr val="657422"/>
-                </a:solidFill>
-                <a:latin typeface="Courier"/>
-              </a:rPr>
-              <a:t>size =</a:t>
-            </a:r>
-            <a:r>
-              <a:rPr>
-                <a:solidFill>
-                  <a:srgbClr val="003B4F"/>
-                </a:solidFill>
-                <a:latin typeface="Courier"/>
-              </a:rPr>
-              <a:t> </a:t>
-            </a:r>
-            <a:r>
-              <a:rPr>
-                <a:solidFill>
-                  <a:srgbClr val="AD0000"/>
-                </a:solidFill>
-                <a:latin typeface="Courier"/>
-              </a:rPr>
-              <a:t>25</a:t>
-            </a:r>
-            <a:r>
-              <a:rPr>
-                <a:solidFill>
-                  <a:srgbClr val="003B4F"/>
-                </a:solidFill>
-                <a:latin typeface="Courier"/>
-              </a:rPr>
-              <a:t>, </a:t>
-            </a:r>
-            <a:r>
-              <a:rPr>
-                <a:solidFill>
-                  <a:srgbClr val="657422"/>
-                </a:solidFill>
-                <a:latin typeface="Courier"/>
-              </a:rPr>
-              <a:t>replace =</a:t>
-            </a:r>
-            <a:r>
-              <a:rPr>
-                <a:solidFill>
-                  <a:srgbClr val="003B4F"/>
-                </a:solidFill>
-                <a:latin typeface="Courier"/>
-              </a:rPr>
-              <a:t> </a:t>
-            </a:r>
-            <a:r>
-              <a:rPr>
-                <a:solidFill>
-                  <a:srgbClr val="8F5902"/>
-                </a:solidFill>
-                <a:latin typeface="Courier"/>
-              </a:rPr>
-              <a:t>FALSE</a:t>
-            </a:r>
-            <a:r>
-              <a:rPr>
-                <a:solidFill>
-                  <a:srgbClr val="003B4F"/>
-                </a:solidFill>
-                <a:latin typeface="Courier"/>
-              </a:rPr>
-              <a:t>)</a:t>
-            </a:r>
-            <a:br/>
-            <a:br/>
-            <a:r>
-              <a:rPr>
-                <a:solidFill>
-                  <a:srgbClr val="003B4F"/>
-                </a:solidFill>
-                <a:latin typeface="Courier"/>
-              </a:rPr>
-              <a:t>island_perm_data &lt;- isl_ne12_df </a:t>
-            </a:r>
-            <a:r>
-              <a:rPr>
-                <a:solidFill>
-                  <a:srgbClr val="5E5E5E"/>
-                </a:solidFill>
-                <a:latin typeface="Courier"/>
-              </a:rPr>
-              <a:t>%&gt;%</a:t>
-            </a:r>
-            <a:br/>
-            <a:r>
-              <a:rPr>
-                <a:solidFill>
-                  <a:srgbClr val="003B4F"/>
-                </a:solidFill>
-                <a:latin typeface="Courier"/>
-              </a:rPr>
-              <a:t>  </a:t>
-            </a:r>
-            <a:r>
-              <a:rPr>
-                <a:solidFill>
-                  <a:srgbClr val="4758AB"/>
-                </a:solidFill>
-                <a:latin typeface="Courier"/>
-              </a:rPr>
-              <a:t>filter</a:t>
-            </a:r>
-            <a:r>
-              <a:rPr>
-                <a:solidFill>
-                  <a:srgbClr val="003B4F"/>
-                </a:solidFill>
-                <a:latin typeface="Courier"/>
-              </a:rPr>
-              <a:t>(lake </a:t>
-            </a:r>
-            <a:r>
-              <a:rPr>
-                <a:solidFill>
-                  <a:srgbClr val="5E5E5E"/>
-                </a:solidFill>
-                <a:latin typeface="Courier"/>
-              </a:rPr>
-              <a:t>==</a:t>
-            </a:r>
-            <a:r>
-              <a:rPr>
-                <a:solidFill>
-                  <a:srgbClr val="003B4F"/>
-                </a:solidFill>
-                <a:latin typeface="Courier"/>
-              </a:rPr>
-              <a:t> </a:t>
-            </a:r>
-            <a:r>
-              <a:rPr>
-                <a:solidFill>
-                  <a:srgbClr val="20794D"/>
-                </a:solidFill>
-                <a:latin typeface="Courier"/>
-              </a:rPr>
-              <a:t>"Island Lake"</a:t>
-            </a:r>
-            <a:r>
-              <a:rPr>
-                <a:solidFill>
-                  <a:srgbClr val="003B4F"/>
-                </a:solidFill>
-                <a:latin typeface="Courier"/>
-              </a:rPr>
-              <a:t>) </a:t>
-            </a:r>
-            <a:r>
-              <a:rPr>
-                <a:solidFill>
-                  <a:srgbClr val="5E5E5E"/>
-                </a:solidFill>
-                <a:latin typeface="Courier"/>
-              </a:rPr>
-              <a:t>%&gt;%</a:t>
-            </a:r>
-            <a:br/>
-            <a:r>
-              <a:rPr>
-                <a:solidFill>
-                  <a:srgbClr val="003B4F"/>
-                </a:solidFill>
-                <a:latin typeface="Courier"/>
-              </a:rPr>
-              <a:t>  </a:t>
-            </a:r>
-            <a:r>
-              <a:rPr>
-                <a:solidFill>
-                  <a:srgbClr val="4758AB"/>
-                </a:solidFill>
-                <a:latin typeface="Courier"/>
-              </a:rPr>
-              <a:t>pull</a:t>
-            </a:r>
-            <a:r>
-              <a:rPr>
-                <a:solidFill>
-                  <a:srgbClr val="003B4F"/>
-                </a:solidFill>
-                <a:latin typeface="Courier"/>
-              </a:rPr>
-              <a:t>(length_mm)</a:t>
-            </a:r>
-            <a:br/>
-            <a:br/>
-            <a:r>
-              <a:rPr>
-                <a:solidFill>
-                  <a:srgbClr val="003B4F"/>
-                </a:solidFill>
-                <a:latin typeface="Courier"/>
-              </a:rPr>
-              <a:t>observed_diff &lt;- </a:t>
-            </a:r>
-            <a:r>
-              <a:rPr>
-                <a:solidFill>
-                  <a:srgbClr val="4758AB"/>
-                </a:solidFill>
-                <a:latin typeface="Courier"/>
-              </a:rPr>
-              <a:t>mean</a:t>
-            </a:r>
-            <a:r>
-              <a:rPr>
-                <a:solidFill>
-                  <a:srgbClr val="003B4F"/>
-                </a:solidFill>
-                <a:latin typeface="Courier"/>
-              </a:rPr>
-              <a:t>(ne12_perm_data, </a:t>
-            </a:r>
-            <a:r>
-              <a:rPr>
-                <a:solidFill>
-                  <a:srgbClr val="657422"/>
-                </a:solidFill>
-                <a:latin typeface="Courier"/>
-              </a:rPr>
-              <a:t>na.rm =</a:t>
-            </a:r>
-            <a:r>
-              <a:rPr>
-                <a:solidFill>
-                  <a:srgbClr val="003B4F"/>
-                </a:solidFill>
-                <a:latin typeface="Courier"/>
-              </a:rPr>
-              <a:t> </a:t>
-            </a:r>
-            <a:r>
-              <a:rPr>
-                <a:solidFill>
-                  <a:srgbClr val="8F5902"/>
-                </a:solidFill>
-                <a:latin typeface="Courier"/>
-              </a:rPr>
-              <a:t>TRUE</a:t>
-            </a:r>
-            <a:r>
-              <a:rPr>
-                <a:solidFill>
-                  <a:srgbClr val="003B4F"/>
-                </a:solidFill>
-                <a:latin typeface="Courier"/>
-              </a:rPr>
-              <a:t>) </a:t>
-            </a:r>
-            <a:r>
-              <a:rPr>
-                <a:solidFill>
-                  <a:srgbClr val="5E5E5E"/>
-                </a:solidFill>
-                <a:latin typeface="Courier"/>
-              </a:rPr>
-              <a:t>-</a:t>
-            </a:r>
-            <a:r>
-              <a:rPr>
-                <a:solidFill>
-                  <a:srgbClr val="003B4F"/>
-                </a:solidFill>
-                <a:latin typeface="Courier"/>
-              </a:rPr>
-              <a:t> </a:t>
-            </a:r>
-            <a:r>
-              <a:rPr>
-                <a:solidFill>
-                  <a:srgbClr val="4758AB"/>
-                </a:solidFill>
-                <a:latin typeface="Courier"/>
-              </a:rPr>
-              <a:t>mean</a:t>
-            </a:r>
-            <a:r>
-              <a:rPr>
-                <a:solidFill>
-                  <a:srgbClr val="003B4F"/>
-                </a:solidFill>
-                <a:latin typeface="Courier"/>
-              </a:rPr>
-              <a:t>(island_perm_data, </a:t>
-            </a:r>
-            <a:r>
-              <a:rPr>
-                <a:solidFill>
-                  <a:srgbClr val="657422"/>
-                </a:solidFill>
-                <a:latin typeface="Courier"/>
-              </a:rPr>
-              <a:t>na.rm =</a:t>
-            </a:r>
-            <a:r>
-              <a:rPr>
-                <a:solidFill>
-                  <a:srgbClr val="003B4F"/>
-                </a:solidFill>
-                <a:latin typeface="Courier"/>
-              </a:rPr>
-              <a:t> </a:t>
-            </a:r>
-            <a:r>
-              <a:rPr>
-                <a:solidFill>
-                  <a:srgbClr val="8F5902"/>
-                </a:solidFill>
-                <a:latin typeface="Courier"/>
-              </a:rPr>
-              <a:t>TRUE</a:t>
-            </a:r>
-            <a:r>
-              <a:rPr>
-                <a:solidFill>
-                  <a:srgbClr val="003B4F"/>
-                </a:solidFill>
-                <a:latin typeface="Courier"/>
-              </a:rPr>
-              <a:t>)</a:t>
-            </a:r>
-          </a:p>
-        </p:txBody>
-      </p:sp>
-      <p:sp>
-        <p:nvSpPr>
-          <p:cNvPr id="4" name="Content Placeholder 3"/>
-          <p:cNvSpPr>
-            <a:spLocks noGrp="1"/>
-          </p:cNvSpPr>
-          <p:nvPr>
-            <p:ph idx="2" sz="half"/>
-          </p:nvPr>
-        </p:nvSpPr>
-        <p:spPr/>
-        <p:txBody>
-          <a:bodyPr/>
-          <a:lstStyle/>
-          <a:p>
-            <a:pPr lvl="0" indent="0">
-              <a:buNone/>
-            </a:pPr>
-            <a:r>
-              <a:rPr>
-                <a:solidFill>
-                  <a:srgbClr val="4758AB"/>
-                </a:solidFill>
-                <a:latin typeface="Courier"/>
-              </a:rPr>
-              <a:t>permTS</a:t>
-            </a:r>
-            <a:r>
-              <a:rPr>
-                <a:solidFill>
-                  <a:srgbClr val="003B4F"/>
-                </a:solidFill>
-                <a:latin typeface="Courier"/>
-              </a:rPr>
-              <a:t>(ne12_perm_data, island_perm_data,</a:t>
-            </a:r>
-            <a:br/>
-            <a:r>
-              <a:rPr>
-                <a:solidFill>
-                  <a:srgbClr val="003B4F"/>
-                </a:solidFill>
-                <a:latin typeface="Courier"/>
-              </a:rPr>
-              <a:t>       </a:t>
-            </a:r>
-            <a:r>
-              <a:rPr>
-                <a:solidFill>
-                  <a:srgbClr val="657422"/>
-                </a:solidFill>
-                <a:latin typeface="Courier"/>
-              </a:rPr>
-              <a:t>alternative =</a:t>
-            </a:r>
-            <a:r>
-              <a:rPr>
-                <a:solidFill>
-                  <a:srgbClr val="003B4F"/>
-                </a:solidFill>
-                <a:latin typeface="Courier"/>
-              </a:rPr>
-              <a:t> </a:t>
-            </a:r>
-            <a:r>
-              <a:rPr>
-                <a:solidFill>
-                  <a:srgbClr val="20794D"/>
-                </a:solidFill>
-                <a:latin typeface="Courier"/>
-              </a:rPr>
-              <a:t>"two.sided"</a:t>
-            </a:r>
-            <a:r>
-              <a:rPr>
-                <a:solidFill>
-                  <a:srgbClr val="003B4F"/>
-                </a:solidFill>
-                <a:latin typeface="Courier"/>
-              </a:rPr>
-              <a:t>,</a:t>
-            </a:r>
-            <a:br/>
-            <a:r>
-              <a:rPr>
-                <a:solidFill>
-                  <a:srgbClr val="003B4F"/>
-                </a:solidFill>
-                <a:latin typeface="Courier"/>
-              </a:rPr>
-              <a:t>       </a:t>
-            </a:r>
-            <a:r>
-              <a:rPr>
-                <a:solidFill>
-                  <a:srgbClr val="657422"/>
-                </a:solidFill>
-                <a:latin typeface="Courier"/>
-              </a:rPr>
-              <a:t>method =</a:t>
-            </a:r>
-            <a:r>
-              <a:rPr>
-                <a:solidFill>
-                  <a:srgbClr val="003B4F"/>
-                </a:solidFill>
-                <a:latin typeface="Courier"/>
-              </a:rPr>
-              <a:t> </a:t>
-            </a:r>
-            <a:r>
-              <a:rPr>
-                <a:solidFill>
-                  <a:srgbClr val="20794D"/>
-                </a:solidFill>
-                <a:latin typeface="Courier"/>
-              </a:rPr>
-              <a:t>"exact.mc"</a:t>
-            </a:r>
-            <a:r>
-              <a:rPr>
-                <a:solidFill>
-                  <a:srgbClr val="003B4F"/>
-                </a:solidFill>
-                <a:latin typeface="Courier"/>
-              </a:rPr>
-              <a:t>,</a:t>
-            </a:r>
-            <a:br/>
-            <a:r>
-              <a:rPr>
-                <a:solidFill>
-                  <a:srgbClr val="003B4F"/>
-                </a:solidFill>
-                <a:latin typeface="Courier"/>
-              </a:rPr>
-              <a:t>       </a:t>
-            </a:r>
-            <a:r>
-              <a:rPr>
-                <a:solidFill>
-                  <a:srgbClr val="657422"/>
-                </a:solidFill>
-                <a:latin typeface="Courier"/>
-              </a:rPr>
-              <a:t>control =</a:t>
-            </a:r>
-            <a:r>
-              <a:rPr>
-                <a:solidFill>
-                  <a:srgbClr val="003B4F"/>
-                </a:solidFill>
-                <a:latin typeface="Courier"/>
-              </a:rPr>
-              <a:t> </a:t>
-            </a:r>
-            <a:r>
-              <a:rPr>
-                <a:solidFill>
-                  <a:srgbClr val="4758AB"/>
-                </a:solidFill>
-                <a:latin typeface="Courier"/>
-              </a:rPr>
-              <a:t>permControl</a:t>
-            </a:r>
-            <a:r>
-              <a:rPr>
-                <a:solidFill>
-                  <a:srgbClr val="003B4F"/>
-                </a:solidFill>
-                <a:latin typeface="Courier"/>
-              </a:rPr>
-              <a:t>(</a:t>
-            </a:r>
-            <a:r>
-              <a:rPr>
-                <a:solidFill>
-                  <a:srgbClr val="657422"/>
-                </a:solidFill>
-                <a:latin typeface="Courier"/>
-              </a:rPr>
-              <a:t>nmc =</a:t>
-            </a:r>
-            <a:r>
-              <a:rPr>
-                <a:solidFill>
-                  <a:srgbClr val="003B4F"/>
-                </a:solidFill>
-                <a:latin typeface="Courier"/>
-              </a:rPr>
-              <a:t> </a:t>
-            </a:r>
-            <a:r>
-              <a:rPr>
-                <a:solidFill>
-                  <a:srgbClr val="AD0000"/>
-                </a:solidFill>
-                <a:latin typeface="Courier"/>
-              </a:rPr>
-              <a:t>10000</a:t>
-            </a:r>
-            <a:r>
-              <a:rPr>
-                <a:solidFill>
-                  <a:srgbClr val="003B4F"/>
-                </a:solidFill>
-                <a:latin typeface="Courier"/>
-              </a:rPr>
-              <a:t>))</a:t>
-            </a:r>
-          </a:p>
-          <a:p>
-            <a:pPr lvl="0" indent="0">
-              <a:buNone/>
-            </a:pPr>
-            <a:r>
-              <a:rPr>
-                <a:latin typeface="Courier"/>
-              </a:rPr>
-              <a:t>
-    Exact Permutation Test Estimated by Monte Carlo
-data:  GROUP 1 and GROUP 2
-p-value = 2e-04
-alternative hypothesis: true mean GROUP 1 - mean GROUP 2 is not equal to 0
-sample estimates:
-mean GROUP 1 - mean GROUP 2 
-                    -333.08 
-p-value estimated from 10000 Monte Carlo replications
-99 percent confidence interval on p-value:
- 0.000000000 0.001059383 </a:t>
-            </a:r>
-          </a:p>
-        </p:txBody>
-      </p:sp>
-    </p:spTree>
-  </p:cSld>
-</p:sld>
-</file>
-
-<file path=ppt/slides/slide3.xml><?xml version="1.0" encoding="utf-8"?>
-<p:sld xmlns:a="http://schemas.openxmlformats.org/drawingml/2006/main" xmlns:r="http://schemas.openxmlformats.org/officeDocument/2006/relationships" xmlns:p="http://schemas.openxmlformats.org/presentationml/2006/main">
-  <p:cSld>
-    <p:spTree>
-      <p:nvGrpSpPr>
-        <p:cNvPr id="1" name=""/>
-        <p:cNvGrpSpPr/>
-        <p:nvPr/>
-      </p:nvGrpSpPr>
-      <p:grpSpPr>
-        <a:xfrm>
-          <a:off x="0" y="0"/>
-          <a:ext cx="0" cy="0"/>
-          <a:chOff x="0" y="0"/>
-          <a:chExt cx="0" cy="0"/>
-        </a:xfrm>
-      </p:grpSpPr>
-      <p:sp>
-        <p:nvSpPr>
-          <p:cNvPr id="2" name="Title 1"/>
-          <p:cNvSpPr>
-            <a:spLocks noGrp="1"/>
-          </p:cNvSpPr>
-          <p:nvPr>
-            <p:ph type="title"/>
-          </p:nvPr>
-        </p:nvSpPr>
-        <p:spPr>
-          <a:xfrm>
-            <a:off x="139485" y="78119"/>
-            <a:ext cx="8229600" cy="607682"/>
-          </a:xfrm>
-        </p:spPr>
-        <p:txBody>
-          <a:bodyPr/>
-          <a:lstStyle/>
-          <a:p>
-            <a:pPr lvl="0" indent="0" marL="0">
-              <a:buNone/>
-            </a:pPr>
-            <a:r>
-              <a:rPr/>
-              <a:t>Today’s Overview</a:t>
-            </a:r>
-          </a:p>
-        </p:txBody>
-      </p:sp>
-      <p:sp>
-        <p:nvSpPr>
-          <p:cNvPr id="3" name="Text Placeholder 2"/>
-          <p:cNvSpPr>
-            <a:spLocks noGrp="1"/>
-          </p:cNvSpPr>
-          <p:nvPr>
-            <p:ph idx="1" type="body"/>
-          </p:nvPr>
-        </p:nvSpPr>
-        <p:spPr/>
-        <p:txBody>
-          <a:bodyPr/>
-          <a:lstStyle/>
-          <a:p>
-            <a:pPr lvl="0" indent="0" marL="0">
-              <a:buNone/>
-            </a:pPr>
-            <a:r>
-              <a:rPr/>
-              <a:t>What we will cover today:</a:t>
-            </a:r>
-          </a:p>
-          <a:p>
-            <a:pPr lvl="0"/>
-            <a:r>
-              <a:rPr/>
-              <a:t>What are the assumptions again, and how do you assess them?</a:t>
-            </a:r>
-          </a:p>
-          <a:p>
-            <a:pPr lvl="0"/>
-            <a:r>
-              <a:rPr/>
-              <a:t>What to do when assumptions fail:</a:t>
-            </a:r>
-          </a:p>
-          <a:p>
-            <a:pPr lvl="1"/>
-            <a:r>
-              <a:rPr/>
-              <a:t>Robust tests</a:t>
-            </a:r>
-          </a:p>
-          <a:p>
-            <a:pPr lvl="1"/>
-            <a:r>
-              <a:rPr/>
-              <a:t>Rank-based tests</a:t>
-            </a:r>
-          </a:p>
-          <a:p>
-            <a:pPr lvl="1"/>
-            <a:r>
-              <a:rPr/>
-              <a:t>Permutation tests</a:t>
-            </a:r>
-          </a:p>
-        </p:txBody>
-      </p:sp>
-      <p:sp>
-        <p:nvSpPr>
-          <p:cNvPr id="5" name="Text Placeholder 4"/>
-          <p:cNvSpPr>
-            <a:spLocks noGrp="1"/>
-          </p:cNvSpPr>
-          <p:nvPr>
-            <p:ph idx="3" sz="quarter" type="body"/>
-          </p:nvPr>
-        </p:nvSpPr>
-        <p:spPr/>
-        <p:txBody>
-          <a:bodyPr/>
-          <a:lstStyle/>
-          <a:p>
-            <a:pPr lvl="0" indent="0" marL="0">
-              <a:buNone/>
-            </a:pPr>
-            <a:r>
-              <a:rPr/>
-              <a:t>Let’s work with the lake trout data, as the weights are pretty cool and the assumptions may or may not hold. This easily translates to any of the other data frames you might want to use.</a:t>
-            </a:r>
-          </a:p>
-        </p:txBody>
-      </p:sp>
-      <p:pic>
-        <p:nvPicPr>
-          <p:cNvPr descr="images/lake_trout.jpg" id="0" name="Picture 1"/>
-          <p:cNvPicPr>
-            <a:picLocks noGrp="1" noChangeAspect="1"/>
-          </p:cNvPicPr>
-          <p:nvPr/>
-        </p:nvPicPr>
-        <p:blipFill>
-          <a:blip r:embed="rId2"/>
-          <a:stretch>
-            <a:fillRect/>
-          </a:stretch>
-        </p:blipFill>
-        <p:spPr bwMode="auto">
-          <a:xfrm>
-            <a:off x="4749800" y="1955800"/>
-            <a:ext cx="4038600" cy="1447800"/>
-          </a:xfrm>
-          <a:prstGeom prst="rect">
-            <a:avLst/>
-          </a:prstGeom>
-          <a:noFill/>
-          <a:ln w="9525">
-            <a:noFill/>
-            <a:headEnd/>
-            <a:tailEnd/>
-          </a:ln>
-        </p:spPr>
-      </p:pic>
-      <p:sp>
-        <p:nvSpPr>
-          <p:cNvPr id="1" name="TextBox 3"/>
-          <p:cNvSpPr txBox="1"/>
-          <p:nvPr>
-            <p:ph idx="1"/>
-          </p:nvPr>
-        </p:nvSpPr>
-        <p:spPr>
-          <a:xfrm>
-            <a:off x="4749800" y="4064000"/>
-            <a:ext cx="4038600" cy="508000"/>
-          </a:xfrm>
-          <a:prstGeom prst="rect">
-            <a:avLst/>
-          </a:prstGeom>
-          <a:noFill/>
-        </p:spPr>
-        <p:txBody>
-          <a:bodyPr/>
-          <a:lstStyle/>
-          <a:p>
-            <a:pPr lvl="0" indent="0" marL="0" algn="ctr">
-              <a:buNone/>
-            </a:pPr>
-            <a:r>
-              <a:rPr/>
-              <a:t>Illustration of a lake trout in profile, showing its mottled brown-and-cream coloring and forked tail, the species whose weight and length data are used throughout this lecture.</a:t>
-            </a:r>
-          </a:p>
-        </p:txBody>
-      </p:sp>
-    </p:spTree>
-  </p:cSld>
-</p:sld>
-</file>
-
-<file path=ppt/slides/slide30.xml><?xml version="1.0" encoding="utf-8"?>
-<p:sld xmlns:a="http://schemas.openxmlformats.org/drawingml/2006/main" xmlns:r="http://schemas.openxmlformats.org/officeDocument/2006/relationships" xmlns:p="http://schemas.openxmlformats.org/presentationml/2006/main">
-  <p:cSld>
-    <p:spTree>
-      <p:nvGrpSpPr>
-        <p:cNvPr id="1" name=""/>
-        <p:cNvGrpSpPr/>
-        <p:nvPr/>
-      </p:nvGrpSpPr>
-      <p:grpSpPr>
-        <a:xfrm>
-          <a:off x="0" y="0"/>
-          <a:ext cx="0" cy="0"/>
-          <a:chOff x="0" y="0"/>
-          <a:chExt cx="0" cy="0"/>
-        </a:xfrm>
-      </p:grpSpPr>
-      <p:sp>
-        <p:nvSpPr>
-          <p:cNvPr id="2" name="Title 1"/>
-          <p:cNvSpPr>
-            <a:spLocks noGrp="1"/>
-          </p:cNvSpPr>
-          <p:nvPr>
-            <p:ph type="title"/>
-          </p:nvPr>
-        </p:nvSpPr>
-        <p:spPr>
-          <a:xfrm>
-            <a:off x="0" y="0"/>
-            <a:ext cx="9144000" cy="582780"/>
-          </a:xfrm>
-        </p:spPr>
-        <p:txBody>
-          <a:bodyPr/>
-          <a:lstStyle/>
-          <a:p>
-            <a:pPr lvl="0" indent="0" marL="0">
-              <a:buNone/>
-            </a:pPr>
-            <a:r>
-              <a:rPr/>
-              <a:t>Part 7 · Summary</a:t>
-            </a:r>
-          </a:p>
-        </p:txBody>
-      </p:sp>
-    </p:spTree>
-  </p:cSld>
-</p:sld>
-</file>
-
-<file path=ppt/slides/slide31.xml><?xml version="1.0" encoding="utf-8"?>
-<p:sld xmlns:a="http://schemas.openxmlformats.org/drawingml/2006/main" xmlns:r="http://schemas.openxmlformats.org/officeDocument/2006/relationships" xmlns:p="http://schemas.openxmlformats.org/presentationml/2006/main">
-  <p:cSld>
-    <p:spTree>
-      <p:nvGrpSpPr>
-        <p:cNvPr id="1" name=""/>
-        <p:cNvGrpSpPr/>
-        <p:nvPr/>
-      </p:nvGrpSpPr>
-      <p:grpSpPr>
-        <a:xfrm>
-          <a:off x="0" y="0"/>
-          <a:ext cx="0" cy="0"/>
-          <a:chOff x="0" y="0"/>
-          <a:chExt cx="0" cy="0"/>
-        </a:xfrm>
-      </p:grpSpPr>
-      <p:sp>
-        <p:nvSpPr>
-          <p:cNvPr id="2" name="Title 1"/>
-          <p:cNvSpPr>
-            <a:spLocks noGrp="1"/>
-          </p:cNvSpPr>
-          <p:nvPr>
-            <p:ph type="title"/>
-          </p:nvPr>
-        </p:nvSpPr>
-        <p:spPr>
-          <a:xfrm>
-            <a:off x="0" y="0"/>
-            <a:ext cx="9144000" cy="602780"/>
-          </a:xfrm>
-          <a:solidFill>
-            <a:srgbClr val="70121D"/>
-          </a:solidFill>
-        </p:spPr>
-        <p:txBody>
-          <a:bodyPr/>
-          <a:lstStyle/>
-          <a:p>
-            <a:pPr lvl="0" indent="0" marL="0">
-              <a:buNone/>
-            </a:pPr>
-            <a:r>
-              <a:rPr/>
-              <a:t>Summary — Testing Assumptions</a:t>
-            </a:r>
-          </a:p>
-        </p:txBody>
-      </p:sp>
-      <p:sp>
-        <p:nvSpPr>
-          <p:cNvPr id="3" name="Content Placeholder 2"/>
-          <p:cNvSpPr>
-            <a:spLocks noGrp="1"/>
-          </p:cNvSpPr>
-          <p:nvPr>
-            <p:ph idx="1" sz="half"/>
-          </p:nvPr>
-        </p:nvSpPr>
-        <p:spPr/>
-        <p:txBody>
-          <a:bodyPr/>
-          <a:lstStyle/>
-          <a:p>
-            <a:pPr lvl="0" indent="0" marL="0">
-              <a:buNone/>
-            </a:pPr>
-            <a:r>
-              <a:rPr b="1"/>
-              <a:t>Key assumptions:</a:t>
-            </a:r>
-          </a:p>
-          <a:p>
-            <a:pPr lvl="0"/>
-            <a:r>
-              <a:rPr b="1"/>
-              <a:t>Random sampling</a:t>
-            </a:r>
-            <a:r>
-              <a:rPr/>
-              <a:t> — samples are randomly collected from populations</a:t>
-            </a:r>
-          </a:p>
-          <a:p>
-            <a:pPr lvl="0"/>
-            <a:r>
-              <a:rPr b="1"/>
-              <a:t>Normality</a:t>
-            </a:r>
-            <a:r>
-              <a:rPr/>
-              <a:t> — data follows a normal distribution</a:t>
-            </a:r>
-          </a:p>
-          <a:p>
-            <a:pPr lvl="0"/>
-            <a:r>
-              <a:rPr b="1"/>
-              <a:t>Equal variance</a:t>
-            </a:r>
-            <a:r>
-              <a:rPr/>
-              <a:t> — samples come from populations with similar variability</a:t>
-            </a:r>
-          </a:p>
-          <a:p>
-            <a:pPr lvl="0"/>
-            <a:r>
-              <a:rPr b="1"/>
-              <a:t>No outliers</a:t>
-            </a:r>
-            <a:r>
-              <a:rPr/>
-              <a:t> — no extreme values that can skew results</a:t>
-            </a:r>
-          </a:p>
-        </p:txBody>
-      </p:sp>
-      <p:sp>
-        <p:nvSpPr>
-          <p:cNvPr id="4" name="Content Placeholder 3"/>
-          <p:cNvSpPr>
-            <a:spLocks noGrp="1"/>
-          </p:cNvSpPr>
-          <p:nvPr>
-            <p:ph idx="2" sz="half"/>
-          </p:nvPr>
-        </p:nvSpPr>
-        <p:spPr/>
-        <p:txBody>
-          <a:bodyPr/>
-          <a:lstStyle/>
-          <a:p>
-            <a:pPr lvl="0" indent="0" marL="1270000">
-              <a:buNone/>
-            </a:pPr>
-            <a:r>
-              <a:rPr sz="2000" b="1"/>
-              <a:t>Note</a:t>
-            </a:r>
-          </a:p>
-          <a:p>
-            <a:pPr lvl="0" indent="0" marL="1270000">
-              <a:buNone/>
-            </a:pPr>
-            <a:r>
-              <a:rPr sz="2000" b="1"/>
-              <a:t>Assessing assumptions</a:t>
-            </a:r>
-          </a:p>
-          <a:p>
-            <a:pPr lvl="0"/>
-            <a:r>
-              <a:rPr sz="2000"/>
-              <a:t>Key to do </a:t>
-            </a:r>
-            <a:r>
-              <a:rPr sz="2000" i="1"/>
-              <a:t>every time</a:t>
-            </a:r>
-          </a:p>
-          <a:p>
-            <a:pPr lvl="0"/>
-            <a:r>
-              <a:rPr sz="2000"/>
-              <a:t>Should be acknowledged in the manuscript</a:t>
-            </a:r>
-          </a:p>
-        </p:txBody>
-      </p:sp>
-    </p:spTree>
-  </p:cSld>
-</p:sld>
-</file>
-
-<file path=ppt/slides/slide32.xml><?xml version="1.0" encoding="utf-8"?>
-<p:sld xmlns:a="http://schemas.openxmlformats.org/drawingml/2006/main" xmlns:r="http://schemas.openxmlformats.org/officeDocument/2006/relationships" xmlns:p="http://schemas.openxmlformats.org/presentationml/2006/main">
-  <p:cSld>
-    <p:spTree>
-      <p:nvGrpSpPr>
-        <p:cNvPr id="1" name=""/>
-        <p:cNvGrpSpPr/>
-        <p:nvPr/>
-      </p:nvGrpSpPr>
-      <p:grpSpPr>
-        <a:xfrm>
-          <a:off x="0" y="0"/>
-          <a:ext cx="0" cy="0"/>
-          <a:chOff x="0" y="0"/>
-          <a:chExt cx="0" cy="0"/>
-        </a:xfrm>
-      </p:grpSpPr>
-      <p:sp>
-        <p:nvSpPr>
-          <p:cNvPr id="2" name="Title 1"/>
-          <p:cNvSpPr>
-            <a:spLocks noGrp="1"/>
-          </p:cNvSpPr>
-          <p:nvPr>
-            <p:ph type="title"/>
-          </p:nvPr>
-        </p:nvSpPr>
-        <p:spPr>
-          <a:xfrm>
-            <a:off x="0" y="0"/>
-            <a:ext cx="9144000" cy="602780"/>
-          </a:xfrm>
-          <a:solidFill>
-            <a:srgbClr val="70121D"/>
-          </a:solidFill>
-        </p:spPr>
-        <p:txBody>
-          <a:bodyPr/>
-          <a:lstStyle/>
-          <a:p>
-            <a:pPr lvl="0" indent="0" marL="0">
-              <a:buNone/>
-            </a:pPr>
-            <a:r>
-              <a:rPr/>
-              <a:t>Summary — Data Transformations</a:t>
-            </a:r>
-          </a:p>
-        </p:txBody>
-      </p:sp>
-      <p:sp>
-        <p:nvSpPr>
-          <p:cNvPr id="3" name="Content Placeholder 2"/>
-          <p:cNvSpPr>
-            <a:spLocks noGrp="1"/>
-          </p:cNvSpPr>
-          <p:nvPr>
-            <p:ph idx="1" sz="half"/>
-          </p:nvPr>
-        </p:nvSpPr>
-        <p:spPr/>
-        <p:txBody>
-          <a:bodyPr/>
-          <a:lstStyle/>
-          <a:p>
-            <a:pPr lvl="0" indent="0" marL="0">
-              <a:buNone/>
-            </a:pPr>
-            <a:r>
-              <a:rPr/>
-              <a:t>When assumptions aren’t met, transformations may help normalize data:</a:t>
-            </a:r>
-          </a:p>
-          <a:p>
-            <a:pPr lvl="0"/>
-            <a:r>
-              <a:rPr b="1"/>
-              <a:t>Log transformation:</a:t>
-            </a:r>
-            <a:r>
-              <a:rPr/>
-              <a:t> </a:t>
-            </a:r>
-            <a:r>
-              <a:rPr>
-                <a:latin typeface="Courier"/>
-              </a:rPr>
-              <a:t>log10(x)</a:t>
-            </a:r>
-            <a:r>
-              <a:rPr/>
-              <a:t> — useful for right-skewed data, multiplicative effects</a:t>
-            </a:r>
-          </a:p>
-          <a:p>
-            <a:pPr lvl="0"/>
-            <a:r>
-              <a:rPr b="1"/>
-              <a:t>Square root:</a:t>
-            </a:r>
-            <a:r>
-              <a:rPr/>
-              <a:t> </a:t>
-            </a:r>
-            <a:r>
-              <a:rPr>
-                <a:latin typeface="Courier"/>
-              </a:rPr>
-              <a:t>sqrt(x)</a:t>
-            </a:r>
-            <a:r>
-              <a:rPr/>
-              <a:t> — useful for count data, moderately right-skewed distributions</a:t>
-            </a:r>
-          </a:p>
-          <a:p>
-            <a:pPr lvl="0"/>
-            <a:r>
-              <a:rPr b="1"/>
-              <a:t>Box-Cox:</a:t>
-            </a:r>
-            <a:r>
-              <a:rPr/>
-              <a:t> a more flexible family of power transformations</a:t>
-            </a:r>
-          </a:p>
-          <a:p>
-            <a:pPr lvl="0"/>
-            <a:r>
-              <a:rPr/>
-              <a:t>More specialized transformations exist, especially for percentages or proportions</a:t>
-            </a:r>
-          </a:p>
-        </p:txBody>
-      </p:sp>
-      <p:sp>
-        <p:nvSpPr>
-          <p:cNvPr id="4" name="Content Placeholder 3"/>
-          <p:cNvSpPr>
-            <a:spLocks noGrp="1"/>
-          </p:cNvSpPr>
-          <p:nvPr>
-            <p:ph idx="2" sz="half"/>
-          </p:nvPr>
-        </p:nvSpPr>
-        <p:spPr/>
-        <p:txBody>
-          <a:bodyPr/>
-          <a:lstStyle/>
-          <a:p>
-            <a:pPr lvl="0" indent="0" marL="1270000">
-              <a:buNone/>
-            </a:pPr>
-            <a:r>
-              <a:rPr sz="2000" b="1"/>
-              <a:t>Tip</a:t>
-            </a:r>
-          </a:p>
-          <a:p>
-            <a:pPr lvl="0" indent="0" marL="1270000">
-              <a:buNone/>
-            </a:pPr>
-            <a:r>
-              <a:rPr sz="2000" b="1"/>
-              <a:t>🖐 Recall</a:t>
-            </a:r>
-          </a:p>
-          <a:p>
-            <a:pPr lvl="0" indent="0" marL="1270000">
-              <a:buNone/>
-            </a:pPr>
-            <a:r>
-              <a:rPr sz="2000"/>
-              <a:t>We saw </a:t>
-            </a:r>
-            <a:r>
-              <a:rPr sz="2000">
-                <a:latin typeface="Courier"/>
-              </a:rPr>
-              <a:t>log10()</a:t>
-            </a:r>
-            <a:r>
-              <a:rPr sz="2000"/>
-              <a:t> shrink the gap between the NE 12 and Island Lake boxplots earlier — that’s the transformation working.</a:t>
-            </a:r>
-          </a:p>
-        </p:txBody>
-      </p:sp>
-    </p:spTree>
-  </p:cSld>
-</p:sld>
-</file>
-
 <file path=ppt/slides/slide33.xml><?xml version="1.0" encoding="utf-8"?>
 <p:sld xmlns:a="http://schemas.openxmlformats.org/drawingml/2006/main" xmlns:r="http://schemas.openxmlformats.org/officeDocument/2006/relationships" xmlns:p="http://schemas.openxmlformats.org/presentationml/2006/main">
   <p:cSld>
@@ -7617,7 +7917,7 @@
             </a:pPr>
             <a:r>
               <a:rPr/>
-              <a:t>Summary — Parametric Test Options</a:t>
+              <a:t>Permutation Tests — Method</a:t>
             </a:r>
           </a:p>
         </p:txBody>
@@ -7637,58 +7937,31 @@
           <a:bodyPr/>
           <a:lstStyle/>
           <a:p>
-            <a:pPr lvl="0" indent="0" marL="0">
-              <a:buNone/>
-            </a:pPr>
-            <a:r>
-              <a:rPr b="1"/>
-              <a:t>1. Standard t-test</a:t>
-            </a:r>
-          </a:p>
-          <a:p>
-            <a:pPr lvl="0" indent="0" marL="0">
-              <a:buNone/>
-            </a:pPr>
-            <a:r>
-              <a:rPr/>
-              <a:t>Strengths:</a:t>
-            </a:r>
-          </a:p>
-          <a:p>
             <a:pPr lvl="0"/>
             <a:r>
               <a:rPr/>
-              <a:t>High statistical power when assumptions are met</a:t>
+              <a:t>Randomly reshuffle observations between groups (keeping n₍NE 12₎ = 323 and n₍Island₎ = 10), calculate Δ</a:t>
             </a:r>
           </a:p>
           <a:p>
             <a:pPr lvl="0"/>
             <a:r>
               <a:rPr/>
-              <a:t>Well understood and widely accepted</a:t>
-            </a:r>
-          </a:p>
-          <a:p>
-            <a:pPr lvl="0" indent="0" marL="0">
-              <a:buNone/>
-            </a:pPr>
-            <a:r>
-              <a:rPr/>
-              <a:t>Weaknesses:</a:t>
+              <a:t>Repeat &gt; 1,000 times</a:t>
             </a:r>
           </a:p>
           <a:p>
             <a:pPr lvl="0"/>
             <a:r>
               <a:rPr/>
-              <a:t>Sensitive to violations of normality, equal variance</a:t>
+              <a:t>Record the proportion of the differences in means as extreme as (or more extreme than) observed</a:t>
             </a:r>
           </a:p>
           <a:p>
             <a:pPr lvl="0"/>
             <a:r>
               <a:rPr/>
-              <a:t>Heavily influenced by outliers</a:t>
+              <a:t>This is equivalent to a p-value, and can be used in the “traditional” hypothesis-testing framework</a:t>
             </a:r>
           </a:p>
         </p:txBody>
@@ -7708,65 +7981,32 @@
           <a:bodyPr/>
           <a:lstStyle/>
           <a:p>
-            <a:pPr lvl="0" indent="0" marL="0">
-              <a:buNone/>
-            </a:pPr>
-            <a:r>
-              <a:rPr b="1"/>
-              <a:t>2. Welch’s t-test</a:t>
-            </a:r>
-          </a:p>
-          <a:p>
-            <a:pPr lvl="0" indent="0" marL="0">
-              <a:buNone/>
-            </a:pPr>
-            <a:r>
-              <a:rPr/>
-              <a:t>Strengths:</a:t>
-            </a:r>
-          </a:p>
-          <a:p>
-            <a:pPr lvl="0"/>
-            <a:r>
-              <a:rPr/>
-              <a:t>Robust to violations of the equal-variance assumption</a:t>
-            </a:r>
-          </a:p>
-          <a:p>
-            <a:pPr lvl="0"/>
-            <a:r>
-              <a:rPr/>
-              <a:t>Handles unequal sample sizes well</a:t>
-            </a:r>
-          </a:p>
-          <a:p>
-            <a:pPr lvl="0"/>
-            <a:r>
-              <a:rPr/>
-              <a:t>Still parametric (assumes normality)</a:t>
-            </a:r>
-          </a:p>
-          <a:p>
-            <a:pPr lvl="0" indent="0" marL="0">
-              <a:buNone/>
-            </a:pPr>
-            <a:r>
-              <a:rPr/>
-              <a:t>Weaknesses:</a:t>
-            </a:r>
-          </a:p>
-          <a:p>
-            <a:pPr lvl="0"/>
-            <a:r>
-              <a:rPr/>
-              <a:t>Slightly less powerful than the standard t-test when variances are equal</a:t>
-            </a:r>
-          </a:p>
-          <a:p>
-            <a:pPr lvl="0"/>
-            <a:r>
-              <a:rPr/>
-              <a:t>Still assumes a normal distribution</a:t>
+            <a:pPr lvl="0" indent="0" marL="1270000">
+              <a:buNone/>
+            </a:pPr>
+            <a:r>
+              <a:rPr sz="2000" b="1"/>
+              <a:t>Tip</a:t>
+            </a:r>
+          </a:p>
+          <a:p>
+            <a:pPr lvl="0" indent="0" marL="1270000">
+              <a:buNone/>
+            </a:pPr>
+            <a:r>
+              <a:rPr sz="2000" b="1"/>
+              <a:t>🖐 For a graphical explanation</a:t>
+            </a:r>
+          </a:p>
+          <a:p>
+            <a:pPr lvl="0" indent="0" marL="1270000">
+              <a:buNone/>
+            </a:pPr>
+            <a:r>
+              <a:rPr sz="2000">
+                <a:hlinkClick r:id="rId2"/>
+              </a:rPr>
+              <a:t>jwilber.me/permutationtest</a:t>
             </a:r>
           </a:p>
         </p:txBody>
@@ -7821,7 +8061,7 @@
             </a:pPr>
             <a:r>
               <a:rPr/>
-              <a:t>Summary — Non-Parametric Options</a:t>
+              <a:t>Permutation Test Implementation</a:t>
             </a:r>
           </a:p>
         </p:txBody>
@@ -7845,68 +8085,568 @@
               <a:buNone/>
             </a:pPr>
             <a:r>
-              <a:rPr b="1"/>
-              <a:t>3. Mann-Whitney-Wilcoxon test</a:t>
-            </a:r>
-          </a:p>
-          <a:p>
-            <a:pPr lvl="0" indent="0" marL="0">
-              <a:buNone/>
-            </a:pPr>
-            <a:r>
-              <a:rPr/>
-              <a:t>Strengths:</a:t>
-            </a:r>
-          </a:p>
-          <a:p>
-            <a:pPr lvl="0"/>
-            <a:r>
-              <a:rPr/>
-              <a:t>Non-parametric: doesn’t assume normal distribution</a:t>
-            </a:r>
-          </a:p>
-          <a:p>
-            <a:pPr lvl="0"/>
-            <a:r>
-              <a:rPr/>
-              <a:t>Robust against outliers</a:t>
-            </a:r>
-          </a:p>
-          <a:p>
-            <a:pPr lvl="0"/>
-            <a:r>
-              <a:rPr/>
-              <a:t>Works with ordinal data</a:t>
-            </a:r>
-          </a:p>
-          <a:p>
-            <a:pPr lvl="0" indent="0" marL="0">
-              <a:buNone/>
-            </a:pPr>
-            <a:r>
-              <a:rPr/>
-              <a:t>Weaknesses:</a:t>
-            </a:r>
-          </a:p>
-          <a:p>
-            <a:pPr lvl="0"/>
-            <a:r>
-              <a:rPr/>
-              <a:t>Less statistical power than parametric tests</a:t>
-            </a:r>
-          </a:p>
-          <a:p>
-            <a:pPr lvl="0"/>
-            <a:r>
-              <a:rPr/>
-              <a:t>Still assumes similar distributions and approximately equal variance</a:t>
-            </a:r>
-          </a:p>
-          <a:p>
-            <a:pPr lvl="0"/>
-            <a:r>
-              <a:rPr/>
-              <a:t>Tests median differences rather than mean differences</a:t>
+              <a:rPr/>
+              <a:t>In R, using the </a:t>
+            </a:r>
+            <a:r>
+              <a:rPr>
+                <a:latin typeface="Courier"/>
+              </a:rPr>
+              <a:t>perm</a:t>
+            </a:r>
+            <a:r>
+              <a:rPr/>
+              <a:t> package. Assumptions: both groups have a similar distribution; equal variance.</a:t>
+            </a:r>
+          </a:p>
+          <a:p>
+            <a:pPr lvl="0" indent="0">
+              <a:buNone/>
+            </a:pPr>
+            <a:r>
+              <a:rPr>
+                <a:solidFill>
+                  <a:srgbClr val="4758AB"/>
+                </a:solidFill>
+                <a:latin typeface="Courier"/>
+              </a:rPr>
+              <a:t>library</a:t>
+            </a:r>
+            <a:r>
+              <a:rPr>
+                <a:solidFill>
+                  <a:srgbClr val="003B4F"/>
+                </a:solidFill>
+                <a:latin typeface="Courier"/>
+              </a:rPr>
+              <a:t>(perm)</a:t>
+            </a:r>
+            <a:br/>
+            <a:br/>
+            <a:r>
+              <a:rPr>
+                <a:solidFill>
+                  <a:srgbClr val="003B4F"/>
+                </a:solidFill>
+                <a:latin typeface="Courier"/>
+              </a:rPr>
+              <a:t>ne12_perm_data &lt;- isl_ne12_df </a:t>
+            </a:r>
+            <a:r>
+              <a:rPr>
+                <a:solidFill>
+                  <a:srgbClr val="5E5E5E"/>
+                </a:solidFill>
+                <a:latin typeface="Courier"/>
+              </a:rPr>
+              <a:t>%&gt;%</a:t>
+            </a:r>
+            <a:br/>
+            <a:r>
+              <a:rPr>
+                <a:solidFill>
+                  <a:srgbClr val="003B4F"/>
+                </a:solidFill>
+                <a:latin typeface="Courier"/>
+              </a:rPr>
+              <a:t>  </a:t>
+            </a:r>
+            <a:r>
+              <a:rPr>
+                <a:solidFill>
+                  <a:srgbClr val="4758AB"/>
+                </a:solidFill>
+                <a:latin typeface="Courier"/>
+              </a:rPr>
+              <a:t>filter</a:t>
+            </a:r>
+            <a:r>
+              <a:rPr>
+                <a:solidFill>
+                  <a:srgbClr val="003B4F"/>
+                </a:solidFill>
+                <a:latin typeface="Courier"/>
+              </a:rPr>
+              <a:t>(lake </a:t>
+            </a:r>
+            <a:r>
+              <a:rPr>
+                <a:solidFill>
+                  <a:srgbClr val="5E5E5E"/>
+                </a:solidFill>
+                <a:latin typeface="Courier"/>
+              </a:rPr>
+              <a:t>==</a:t>
+            </a:r>
+            <a:r>
+              <a:rPr>
+                <a:solidFill>
+                  <a:srgbClr val="003B4F"/>
+                </a:solidFill>
+                <a:latin typeface="Courier"/>
+              </a:rPr>
+              <a:t> </a:t>
+            </a:r>
+            <a:r>
+              <a:rPr>
+                <a:solidFill>
+                  <a:srgbClr val="20794D"/>
+                </a:solidFill>
+                <a:latin typeface="Courier"/>
+              </a:rPr>
+              <a:t>"NE 12"</a:t>
+            </a:r>
+            <a:r>
+              <a:rPr>
+                <a:solidFill>
+                  <a:srgbClr val="003B4F"/>
+                </a:solidFill>
+                <a:latin typeface="Courier"/>
+              </a:rPr>
+              <a:t>) </a:t>
+            </a:r>
+            <a:r>
+              <a:rPr>
+                <a:solidFill>
+                  <a:srgbClr val="5E5E5E"/>
+                </a:solidFill>
+                <a:latin typeface="Courier"/>
+              </a:rPr>
+              <a:t>%&gt;%</a:t>
+            </a:r>
+            <a:br/>
+            <a:r>
+              <a:rPr>
+                <a:solidFill>
+                  <a:srgbClr val="003B4F"/>
+                </a:solidFill>
+                <a:latin typeface="Courier"/>
+              </a:rPr>
+              <a:t>  </a:t>
+            </a:r>
+            <a:r>
+              <a:rPr>
+                <a:solidFill>
+                  <a:srgbClr val="4758AB"/>
+                </a:solidFill>
+                <a:latin typeface="Courier"/>
+              </a:rPr>
+              <a:t>pull</a:t>
+            </a:r>
+            <a:r>
+              <a:rPr>
+                <a:solidFill>
+                  <a:srgbClr val="003B4F"/>
+                </a:solidFill>
+                <a:latin typeface="Courier"/>
+              </a:rPr>
+              <a:t>(length_mm)</a:t>
+            </a:r>
+            <a:br/>
+            <a:br/>
+            <a:r>
+              <a:rPr>
+                <a:solidFill>
+                  <a:srgbClr val="5E5E5E"/>
+                </a:solidFill>
+                <a:latin typeface="Courier"/>
+              </a:rPr>
+              <a:t># Randomly sample exactly 25 observations from NE 12</a:t>
+            </a:r>
+            <a:br/>
+            <a:r>
+              <a:rPr>
+                <a:solidFill>
+                  <a:srgbClr val="4758AB"/>
+                </a:solidFill>
+                <a:latin typeface="Courier"/>
+              </a:rPr>
+              <a:t>set.seed</a:t>
+            </a:r>
+            <a:r>
+              <a:rPr>
+                <a:solidFill>
+                  <a:srgbClr val="003B4F"/>
+                </a:solidFill>
+                <a:latin typeface="Courier"/>
+              </a:rPr>
+              <a:t>(</a:t>
+            </a:r>
+            <a:r>
+              <a:rPr>
+                <a:solidFill>
+                  <a:srgbClr val="AD0000"/>
+                </a:solidFill>
+                <a:latin typeface="Courier"/>
+              </a:rPr>
+              <a:t>123</a:t>
+            </a:r>
+            <a:r>
+              <a:rPr>
+                <a:solidFill>
+                  <a:srgbClr val="003B4F"/>
+                </a:solidFill>
+                <a:latin typeface="Courier"/>
+              </a:rPr>
+              <a:t>)</a:t>
+            </a:r>
+            <a:br/>
+            <a:r>
+              <a:rPr>
+                <a:solidFill>
+                  <a:srgbClr val="003B4F"/>
+                </a:solidFill>
+                <a:latin typeface="Courier"/>
+              </a:rPr>
+              <a:t>ne12_perm_data &lt;- </a:t>
+            </a:r>
+            <a:r>
+              <a:rPr>
+                <a:solidFill>
+                  <a:srgbClr val="4758AB"/>
+                </a:solidFill>
+                <a:latin typeface="Courier"/>
+              </a:rPr>
+              <a:t>sample</a:t>
+            </a:r>
+            <a:r>
+              <a:rPr>
+                <a:solidFill>
+                  <a:srgbClr val="003B4F"/>
+                </a:solidFill>
+                <a:latin typeface="Courier"/>
+              </a:rPr>
+              <a:t>(ne12_perm_data, </a:t>
+            </a:r>
+            <a:r>
+              <a:rPr>
+                <a:solidFill>
+                  <a:srgbClr val="657422"/>
+                </a:solidFill>
+                <a:latin typeface="Courier"/>
+              </a:rPr>
+              <a:t>size =</a:t>
+            </a:r>
+            <a:r>
+              <a:rPr>
+                <a:solidFill>
+                  <a:srgbClr val="003B4F"/>
+                </a:solidFill>
+                <a:latin typeface="Courier"/>
+              </a:rPr>
+              <a:t> </a:t>
+            </a:r>
+            <a:r>
+              <a:rPr>
+                <a:solidFill>
+                  <a:srgbClr val="AD0000"/>
+                </a:solidFill>
+                <a:latin typeface="Courier"/>
+              </a:rPr>
+              <a:t>25</a:t>
+            </a:r>
+            <a:r>
+              <a:rPr>
+                <a:solidFill>
+                  <a:srgbClr val="003B4F"/>
+                </a:solidFill>
+                <a:latin typeface="Courier"/>
+              </a:rPr>
+              <a:t>, </a:t>
+            </a:r>
+            <a:r>
+              <a:rPr>
+                <a:solidFill>
+                  <a:srgbClr val="657422"/>
+                </a:solidFill>
+                <a:latin typeface="Courier"/>
+              </a:rPr>
+              <a:t>replace =</a:t>
+            </a:r>
+            <a:r>
+              <a:rPr>
+                <a:solidFill>
+                  <a:srgbClr val="003B4F"/>
+                </a:solidFill>
+                <a:latin typeface="Courier"/>
+              </a:rPr>
+              <a:t> </a:t>
+            </a:r>
+            <a:r>
+              <a:rPr>
+                <a:solidFill>
+                  <a:srgbClr val="8F5902"/>
+                </a:solidFill>
+                <a:latin typeface="Courier"/>
+              </a:rPr>
+              <a:t>FALSE</a:t>
+            </a:r>
+            <a:r>
+              <a:rPr>
+                <a:solidFill>
+                  <a:srgbClr val="003B4F"/>
+                </a:solidFill>
+                <a:latin typeface="Courier"/>
+              </a:rPr>
+              <a:t>)</a:t>
+            </a:r>
+            <a:br/>
+            <a:br/>
+            <a:r>
+              <a:rPr>
+                <a:solidFill>
+                  <a:srgbClr val="003B4F"/>
+                </a:solidFill>
+                <a:latin typeface="Courier"/>
+              </a:rPr>
+              <a:t>island_perm_data &lt;- isl_ne12_df </a:t>
+            </a:r>
+            <a:r>
+              <a:rPr>
+                <a:solidFill>
+                  <a:srgbClr val="5E5E5E"/>
+                </a:solidFill>
+                <a:latin typeface="Courier"/>
+              </a:rPr>
+              <a:t>%&gt;%</a:t>
+            </a:r>
+            <a:br/>
+            <a:r>
+              <a:rPr>
+                <a:solidFill>
+                  <a:srgbClr val="003B4F"/>
+                </a:solidFill>
+                <a:latin typeface="Courier"/>
+              </a:rPr>
+              <a:t>  </a:t>
+            </a:r>
+            <a:r>
+              <a:rPr>
+                <a:solidFill>
+                  <a:srgbClr val="4758AB"/>
+                </a:solidFill>
+                <a:latin typeface="Courier"/>
+              </a:rPr>
+              <a:t>filter</a:t>
+            </a:r>
+            <a:r>
+              <a:rPr>
+                <a:solidFill>
+                  <a:srgbClr val="003B4F"/>
+                </a:solidFill>
+                <a:latin typeface="Courier"/>
+              </a:rPr>
+              <a:t>(lake </a:t>
+            </a:r>
+            <a:r>
+              <a:rPr>
+                <a:solidFill>
+                  <a:srgbClr val="5E5E5E"/>
+                </a:solidFill>
+                <a:latin typeface="Courier"/>
+              </a:rPr>
+              <a:t>==</a:t>
+            </a:r>
+            <a:r>
+              <a:rPr>
+                <a:solidFill>
+                  <a:srgbClr val="003B4F"/>
+                </a:solidFill>
+                <a:latin typeface="Courier"/>
+              </a:rPr>
+              <a:t> </a:t>
+            </a:r>
+            <a:r>
+              <a:rPr>
+                <a:solidFill>
+                  <a:srgbClr val="20794D"/>
+                </a:solidFill>
+                <a:latin typeface="Courier"/>
+              </a:rPr>
+              <a:t>"Island Lake"</a:t>
+            </a:r>
+            <a:r>
+              <a:rPr>
+                <a:solidFill>
+                  <a:srgbClr val="003B4F"/>
+                </a:solidFill>
+                <a:latin typeface="Courier"/>
+              </a:rPr>
+              <a:t>) </a:t>
+            </a:r>
+            <a:r>
+              <a:rPr>
+                <a:solidFill>
+                  <a:srgbClr val="5E5E5E"/>
+                </a:solidFill>
+                <a:latin typeface="Courier"/>
+              </a:rPr>
+              <a:t>%&gt;%</a:t>
+            </a:r>
+            <a:br/>
+            <a:r>
+              <a:rPr>
+                <a:solidFill>
+                  <a:srgbClr val="003B4F"/>
+                </a:solidFill>
+                <a:latin typeface="Courier"/>
+              </a:rPr>
+              <a:t>  </a:t>
+            </a:r>
+            <a:r>
+              <a:rPr>
+                <a:solidFill>
+                  <a:srgbClr val="4758AB"/>
+                </a:solidFill>
+                <a:latin typeface="Courier"/>
+              </a:rPr>
+              <a:t>pull</a:t>
+            </a:r>
+            <a:r>
+              <a:rPr>
+                <a:solidFill>
+                  <a:srgbClr val="003B4F"/>
+                </a:solidFill>
+                <a:latin typeface="Courier"/>
+              </a:rPr>
+              <a:t>(length_mm)</a:t>
+            </a:r>
+            <a:br/>
+            <a:br/>
+            <a:r>
+              <a:rPr>
+                <a:solidFill>
+                  <a:srgbClr val="003B4F"/>
+                </a:solidFill>
+                <a:latin typeface="Courier"/>
+              </a:rPr>
+              <a:t>observed_diff &lt;- </a:t>
+            </a:r>
+            <a:r>
+              <a:rPr>
+                <a:solidFill>
+                  <a:srgbClr val="4758AB"/>
+                </a:solidFill>
+                <a:latin typeface="Courier"/>
+              </a:rPr>
+              <a:t>mean</a:t>
+            </a:r>
+            <a:r>
+              <a:rPr>
+                <a:solidFill>
+                  <a:srgbClr val="003B4F"/>
+                </a:solidFill>
+                <a:latin typeface="Courier"/>
+              </a:rPr>
+              <a:t>(ne12_perm_data, </a:t>
+            </a:r>
+            <a:r>
+              <a:rPr>
+                <a:solidFill>
+                  <a:srgbClr val="657422"/>
+                </a:solidFill>
+                <a:latin typeface="Courier"/>
+              </a:rPr>
+              <a:t>na.rm =</a:t>
+            </a:r>
+            <a:r>
+              <a:rPr>
+                <a:solidFill>
+                  <a:srgbClr val="003B4F"/>
+                </a:solidFill>
+                <a:latin typeface="Courier"/>
+              </a:rPr>
+              <a:t> </a:t>
+            </a:r>
+            <a:r>
+              <a:rPr>
+                <a:solidFill>
+                  <a:srgbClr val="8F5902"/>
+                </a:solidFill>
+                <a:latin typeface="Courier"/>
+              </a:rPr>
+              <a:t>TRUE</a:t>
+            </a:r>
+            <a:r>
+              <a:rPr>
+                <a:solidFill>
+                  <a:srgbClr val="003B4F"/>
+                </a:solidFill>
+                <a:latin typeface="Courier"/>
+              </a:rPr>
+              <a:t>) </a:t>
+            </a:r>
+            <a:r>
+              <a:rPr>
+                <a:solidFill>
+                  <a:srgbClr val="5E5E5E"/>
+                </a:solidFill>
+                <a:latin typeface="Courier"/>
+              </a:rPr>
+              <a:t>-</a:t>
+            </a:r>
+            <a:r>
+              <a:rPr>
+                <a:solidFill>
+                  <a:srgbClr val="003B4F"/>
+                </a:solidFill>
+                <a:latin typeface="Courier"/>
+              </a:rPr>
+              <a:t> </a:t>
+            </a:r>
+            <a:r>
+              <a:rPr>
+                <a:solidFill>
+                  <a:srgbClr val="4758AB"/>
+                </a:solidFill>
+                <a:latin typeface="Courier"/>
+              </a:rPr>
+              <a:t>mean</a:t>
+            </a:r>
+            <a:r>
+              <a:rPr>
+                <a:solidFill>
+                  <a:srgbClr val="003B4F"/>
+                </a:solidFill>
+                <a:latin typeface="Courier"/>
+              </a:rPr>
+              <a:t>(island_perm_data, </a:t>
+            </a:r>
+            <a:r>
+              <a:rPr>
+                <a:solidFill>
+                  <a:srgbClr val="657422"/>
+                </a:solidFill>
+                <a:latin typeface="Courier"/>
+              </a:rPr>
+              <a:t>na.rm =</a:t>
+            </a:r>
+            <a:r>
+              <a:rPr>
+                <a:solidFill>
+                  <a:srgbClr val="003B4F"/>
+                </a:solidFill>
+                <a:latin typeface="Courier"/>
+              </a:rPr>
+              <a:t> </a:t>
+            </a:r>
+            <a:r>
+              <a:rPr>
+                <a:solidFill>
+                  <a:srgbClr val="8F5902"/>
+                </a:solidFill>
+                <a:latin typeface="Courier"/>
+              </a:rPr>
+              <a:t>TRUE</a:t>
+            </a:r>
+            <a:r>
+              <a:rPr>
+                <a:solidFill>
+                  <a:srgbClr val="003B4F"/>
+                </a:solidFill>
+                <a:latin typeface="Courier"/>
+              </a:rPr>
+              <a:t>)</a:t>
             </a:r>
           </a:p>
         </p:txBody>
@@ -7926,79 +8666,221 @@
           <a:bodyPr/>
           <a:lstStyle/>
           <a:p>
-            <a:pPr lvl="0" indent="0" marL="0">
-              <a:buNone/>
-            </a:pPr>
-            <a:r>
-              <a:rPr b="1"/>
-              <a:t>4. Permutation tests</a:t>
-            </a:r>
-          </a:p>
-          <a:p>
-            <a:pPr lvl="0" indent="0" marL="0">
-              <a:buNone/>
-            </a:pPr>
-            <a:r>
-              <a:rPr/>
-              <a:t>Strengths:</a:t>
-            </a:r>
-          </a:p>
-          <a:p>
-            <a:pPr lvl="0"/>
-            <a:r>
-              <a:rPr/>
-              <a:t>Distribution-free: doesn’t assume a specific distribution</a:t>
-            </a:r>
-          </a:p>
-          <a:p>
-            <a:pPr lvl="0"/>
-            <a:r>
-              <a:rPr/>
-              <a:t>Can be applied to many types of test statistics</a:t>
-            </a:r>
-          </a:p>
-          <a:p>
-            <a:pPr lvl="0"/>
-            <a:r>
-              <a:rPr/>
-              <a:t>Handles small sample sizes well</a:t>
-            </a:r>
-          </a:p>
-          <a:p>
-            <a:pPr lvl="0"/>
-            <a:r>
-              <a:rPr/>
-              <a:t>Directly estimates p-values through resampling</a:t>
-            </a:r>
-          </a:p>
-          <a:p>
-            <a:pPr lvl="0" indent="0" marL="0">
-              <a:buNone/>
-            </a:pPr>
-            <a:r>
-              <a:rPr/>
-              <a:t>Weaknesses:</a:t>
-            </a:r>
-          </a:p>
-          <a:p>
-            <a:pPr lvl="0"/>
-            <a:r>
-              <a:rPr/>
-              <a:t>Computationally intensive</a:t>
-            </a:r>
-          </a:p>
-          <a:p>
-            <a:pPr lvl="0"/>
-            <a:r>
-              <a:rPr/>
-              <a:t>Assumes exchangeability under the null hypothesis</a:t>
-            </a:r>
-          </a:p>
-          <a:p>
-            <a:pPr lvl="0"/>
-            <a:r>
-              <a:rPr/>
-              <a:t>Requires similar distributions and equal variance</a:t>
+            <a:pPr lvl="0" indent="0">
+              <a:buNone/>
+            </a:pPr>
+            <a:r>
+              <a:rPr>
+                <a:solidFill>
+                  <a:srgbClr val="4758AB"/>
+                </a:solidFill>
+                <a:latin typeface="Courier"/>
+              </a:rPr>
+              <a:t>permTS</a:t>
+            </a:r>
+            <a:r>
+              <a:rPr>
+                <a:solidFill>
+                  <a:srgbClr val="003B4F"/>
+                </a:solidFill>
+                <a:latin typeface="Courier"/>
+              </a:rPr>
+              <a:t>(ne12_perm_data, island_perm_data,</a:t>
+            </a:r>
+            <a:br/>
+            <a:r>
+              <a:rPr>
+                <a:solidFill>
+                  <a:srgbClr val="003B4F"/>
+                </a:solidFill>
+                <a:latin typeface="Courier"/>
+              </a:rPr>
+              <a:t>       </a:t>
+            </a:r>
+            <a:r>
+              <a:rPr>
+                <a:solidFill>
+                  <a:srgbClr val="657422"/>
+                </a:solidFill>
+                <a:latin typeface="Courier"/>
+              </a:rPr>
+              <a:t>alternative =</a:t>
+            </a:r>
+            <a:r>
+              <a:rPr>
+                <a:solidFill>
+                  <a:srgbClr val="003B4F"/>
+                </a:solidFill>
+                <a:latin typeface="Courier"/>
+              </a:rPr>
+              <a:t> </a:t>
+            </a:r>
+            <a:r>
+              <a:rPr>
+                <a:solidFill>
+                  <a:srgbClr val="20794D"/>
+                </a:solidFill>
+                <a:latin typeface="Courier"/>
+              </a:rPr>
+              <a:t>"two.sided"</a:t>
+            </a:r>
+            <a:r>
+              <a:rPr>
+                <a:solidFill>
+                  <a:srgbClr val="003B4F"/>
+                </a:solidFill>
+                <a:latin typeface="Courier"/>
+              </a:rPr>
+              <a:t>,</a:t>
+            </a:r>
+            <a:br/>
+            <a:r>
+              <a:rPr>
+                <a:solidFill>
+                  <a:srgbClr val="003B4F"/>
+                </a:solidFill>
+                <a:latin typeface="Courier"/>
+              </a:rPr>
+              <a:t>       </a:t>
+            </a:r>
+            <a:r>
+              <a:rPr>
+                <a:solidFill>
+                  <a:srgbClr val="657422"/>
+                </a:solidFill>
+                <a:latin typeface="Courier"/>
+              </a:rPr>
+              <a:t>method =</a:t>
+            </a:r>
+            <a:r>
+              <a:rPr>
+                <a:solidFill>
+                  <a:srgbClr val="003B4F"/>
+                </a:solidFill>
+                <a:latin typeface="Courier"/>
+              </a:rPr>
+              <a:t> </a:t>
+            </a:r>
+            <a:r>
+              <a:rPr>
+                <a:solidFill>
+                  <a:srgbClr val="20794D"/>
+                </a:solidFill>
+                <a:latin typeface="Courier"/>
+              </a:rPr>
+              <a:t>"exact.mc"</a:t>
+            </a:r>
+            <a:r>
+              <a:rPr>
+                <a:solidFill>
+                  <a:srgbClr val="003B4F"/>
+                </a:solidFill>
+                <a:latin typeface="Courier"/>
+              </a:rPr>
+              <a:t>,</a:t>
+            </a:r>
+            <a:br/>
+            <a:r>
+              <a:rPr>
+                <a:solidFill>
+                  <a:srgbClr val="003B4F"/>
+                </a:solidFill>
+                <a:latin typeface="Courier"/>
+              </a:rPr>
+              <a:t>       </a:t>
+            </a:r>
+            <a:r>
+              <a:rPr>
+                <a:solidFill>
+                  <a:srgbClr val="657422"/>
+                </a:solidFill>
+                <a:latin typeface="Courier"/>
+              </a:rPr>
+              <a:t>control =</a:t>
+            </a:r>
+            <a:r>
+              <a:rPr>
+                <a:solidFill>
+                  <a:srgbClr val="003B4F"/>
+                </a:solidFill>
+                <a:latin typeface="Courier"/>
+              </a:rPr>
+              <a:t> </a:t>
+            </a:r>
+            <a:r>
+              <a:rPr>
+                <a:solidFill>
+                  <a:srgbClr val="4758AB"/>
+                </a:solidFill>
+                <a:latin typeface="Courier"/>
+              </a:rPr>
+              <a:t>permControl</a:t>
+            </a:r>
+            <a:r>
+              <a:rPr>
+                <a:solidFill>
+                  <a:srgbClr val="003B4F"/>
+                </a:solidFill>
+                <a:latin typeface="Courier"/>
+              </a:rPr>
+              <a:t>(</a:t>
+            </a:r>
+            <a:r>
+              <a:rPr>
+                <a:solidFill>
+                  <a:srgbClr val="657422"/>
+                </a:solidFill>
+                <a:latin typeface="Courier"/>
+              </a:rPr>
+              <a:t>nmc =</a:t>
+            </a:r>
+            <a:r>
+              <a:rPr>
+                <a:solidFill>
+                  <a:srgbClr val="003B4F"/>
+                </a:solidFill>
+                <a:latin typeface="Courier"/>
+              </a:rPr>
+              <a:t> </a:t>
+            </a:r>
+            <a:r>
+              <a:rPr>
+                <a:solidFill>
+                  <a:srgbClr val="AD0000"/>
+                </a:solidFill>
+                <a:latin typeface="Courier"/>
+              </a:rPr>
+              <a:t>10000</a:t>
+            </a:r>
+            <a:r>
+              <a:rPr>
+                <a:solidFill>
+                  <a:srgbClr val="003B4F"/>
+                </a:solidFill>
+                <a:latin typeface="Courier"/>
+              </a:rPr>
+              <a:t>))</a:t>
+            </a:r>
+          </a:p>
+          <a:p>
+            <a:pPr lvl="0" indent="0">
+              <a:buNone/>
+            </a:pPr>
+            <a:r>
+              <a:rPr>
+                <a:latin typeface="Courier"/>
+              </a:rPr>
+              <a:t>
+    Exact Permutation Test Estimated by Monte Carlo
+data:  GROUP 1 and GROUP 2
+p-value = 2e-04
+alternative hypothesis: true mean GROUP 1 - mean GROUP 2 is not equal to 0
+sample estimates:
+mean GROUP 1 - mean GROUP 2 
+                    -333.08 
+p-value estimated from 10000 Monte Carlo replications
+99 percent confidence interval on p-value:
+ 0.000000000 0.001059383 </a:t>
             </a:r>
           </a:p>
         </p:txBody>
@@ -8038,6 +8920,58 @@
         <p:spPr>
           <a:xfrm>
             <a:off x="0" y="0"/>
+            <a:ext cx="9144000" cy="582780"/>
+          </a:xfrm>
+        </p:spPr>
+        <p:txBody>
+          <a:bodyPr/>
+          <a:lstStyle/>
+          <a:p>
+            <a:pPr lvl="0" indent="0" marL="0">
+              <a:buNone/>
+            </a:pPr>
+            <a:r>
+              <a:rPr/>
+              <a:t>Part 7 · Summary</a:t>
+            </a:r>
+          </a:p>
+        </p:txBody>
+      </p:sp>
+    </p:spTree>
+  </p:cSld>
+</p:sld>
+</file>
+
+<file path=ppt/slides/slide36.xml><?xml version="1.0" encoding="utf-8"?>
+<p:sld xmlns:a="http://schemas.openxmlformats.org/drawingml/2006/main" xmlns:r="http://schemas.openxmlformats.org/officeDocument/2006/relationships" xmlns:p="http://schemas.openxmlformats.org/presentationml/2006/main">
+  <p:cSld>
+    <p:spTree>
+      <p:nvGrpSpPr>
+        <p:cNvPr id="1" name=""/>
+        <p:cNvGrpSpPr/>
+        <p:nvPr/>
+      </p:nvGrpSpPr>
+      <p:grpSpPr>
+        <a:xfrm>
+          <a:off x="0" y="0"/>
+          <a:ext cx="0" cy="0"/>
+          <a:chOff x="0" y="0"/>
+          <a:chExt cx="0" cy="0"/>
+        </a:xfrm>
+      </p:grpSpPr>
+      <p:sp>
+        <p:nvSpPr>
+          <p:cNvPr id="2" name="Title 1"/>
+          <p:cNvSpPr>
+            <a:spLocks noGrp="1"/>
+          </p:cNvSpPr>
+          <p:nvPr>
+            <p:ph type="title"/>
+          </p:nvPr>
+        </p:nvSpPr>
+        <p:spPr>
+          <a:xfrm>
+            <a:off x="0" y="0"/>
             <a:ext cx="9144000" cy="602780"/>
           </a:xfrm>
           <a:solidFill>
@@ -8053,7 +8987,7 @@
             </a:pPr>
             <a:r>
               <a:rPr/>
-              <a:t>Key Takeaway</a:t>
+              <a:t>Summary — Testing Assumptions</a:t>
             </a:r>
           </a:p>
         </p:txBody>
@@ -8077,17 +9011,52 @@
               <a:buNone/>
             </a:pPr>
             <a:r>
-              <a:rPr/>
-              <a:t>Statistical tests have different strengths and assumptions. The choice should be guided by your data’s characteristics, not just convenience.</a:t>
-            </a:r>
-          </a:p>
-          <a:p>
-            <a:pPr lvl="0" indent="0" marL="0">
-              <a:buNone/>
-            </a:pPr>
-            <a:r>
               <a:rPr b="1"/>
-              <a:t>Always visualize your data before deciding on the appropriate test.</a:t>
+              <a:t>Key assumptions:</a:t>
+            </a:r>
+          </a:p>
+          <a:p>
+            <a:pPr lvl="0"/>
+            <a:r>
+              <a:rPr b="1"/>
+              <a:t>Random sampling</a:t>
+            </a:r>
+            <a:r>
+              <a:rPr/>
+              <a:t> — samples are randomly collected from populations</a:t>
+            </a:r>
+          </a:p>
+          <a:p>
+            <a:pPr lvl="0"/>
+            <a:r>
+              <a:rPr b="1"/>
+              <a:t>Normality</a:t>
+            </a:r>
+            <a:r>
+              <a:rPr/>
+              <a:t> — data follows a normal distribution</a:t>
+            </a:r>
+          </a:p>
+          <a:p>
+            <a:pPr lvl="0"/>
+            <a:r>
+              <a:rPr b="1"/>
+              <a:t>Equal variance</a:t>
+            </a:r>
+            <a:r>
+              <a:rPr/>
+              <a:t> — samples come from populations with similar variability</a:t>
+            </a:r>
+          </a:p>
+          <a:p>
+            <a:pPr lvl="0"/>
+            <a:r>
+              <a:rPr b="1"/>
+              <a:t>No outliers</a:t>
+            </a:r>
+            <a:r>
+              <a:rPr/>
+              <a:t> — no extreme values that can skew results</a:t>
             </a:r>
           </a:p>
         </p:txBody>
@@ -8121,16 +9090,676 @@
             </a:pPr>
             <a:r>
               <a:rPr sz="2000" b="1"/>
-              <a:t>✅ Key idea</a:t>
-            </a:r>
-          </a:p>
+              <a:t>Assessing assumptions</a:t>
+            </a:r>
+          </a:p>
+          <a:p>
+            <a:pPr lvl="0"/>
+            <a:r>
+              <a:rPr sz="2000"/>
+              <a:t>Key to do </a:t>
+            </a:r>
+            <a:r>
+              <a:rPr sz="2000" i="1"/>
+              <a:t>every time</a:t>
+            </a:r>
+          </a:p>
+          <a:p>
+            <a:pPr lvl="0"/>
+            <a:r>
+              <a:rPr sz="2000"/>
+              <a:t>Should be acknowledged in the manuscript</a:t>
+            </a:r>
+          </a:p>
+        </p:txBody>
+      </p:sp>
+    </p:spTree>
+  </p:cSld>
+</p:sld>
+</file>
+
+<file path=ppt/slides/slide37.xml><?xml version="1.0" encoding="utf-8"?>
+<p:sld xmlns:a="http://schemas.openxmlformats.org/drawingml/2006/main" xmlns:r="http://schemas.openxmlformats.org/officeDocument/2006/relationships" xmlns:p="http://schemas.openxmlformats.org/presentationml/2006/main">
+  <p:cSld>
+    <p:spTree>
+      <p:nvGrpSpPr>
+        <p:cNvPr id="1" name=""/>
+        <p:cNvGrpSpPr/>
+        <p:nvPr/>
+      </p:nvGrpSpPr>
+      <p:grpSpPr>
+        <a:xfrm>
+          <a:off x="0" y="0"/>
+          <a:ext cx="0" cy="0"/>
+          <a:chOff x="0" y="0"/>
+          <a:chExt cx="0" cy="0"/>
+        </a:xfrm>
+      </p:grpSpPr>
+      <p:sp>
+        <p:nvSpPr>
+          <p:cNvPr id="2" name="Title 1"/>
+          <p:cNvSpPr>
+            <a:spLocks noGrp="1"/>
+          </p:cNvSpPr>
+          <p:nvPr>
+            <p:ph type="title"/>
+          </p:nvPr>
+        </p:nvSpPr>
+        <p:spPr>
+          <a:xfrm>
+            <a:off x="0" y="0"/>
+            <a:ext cx="9144000" cy="602780"/>
+          </a:xfrm>
+          <a:solidFill>
+            <a:srgbClr val="70121D"/>
+          </a:solidFill>
+        </p:spPr>
+        <p:txBody>
+          <a:bodyPr/>
+          <a:lstStyle/>
+          <a:p>
+            <a:pPr lvl="0" indent="0" marL="0">
+              <a:buNone/>
+            </a:pPr>
+            <a:r>
+              <a:rPr/>
+              <a:t>Summary — Data Transformations</a:t>
+            </a:r>
+          </a:p>
+        </p:txBody>
+      </p:sp>
+      <p:sp>
+        <p:nvSpPr>
+          <p:cNvPr id="3" name="Content Placeholder 2"/>
+          <p:cNvSpPr>
+            <a:spLocks noGrp="1"/>
+          </p:cNvSpPr>
+          <p:nvPr>
+            <p:ph idx="1" sz="half"/>
+          </p:nvPr>
+        </p:nvSpPr>
+        <p:spPr/>
+        <p:txBody>
+          <a:bodyPr/>
+          <a:lstStyle/>
+          <a:p>
+            <a:pPr lvl="0" indent="0" marL="0">
+              <a:buNone/>
+            </a:pPr>
+            <a:r>
+              <a:rPr/>
+              <a:t>When assumptions aren’t met, transformations may help normalize data:</a:t>
+            </a:r>
+          </a:p>
+          <a:p>
+            <a:pPr lvl="0"/>
+            <a:r>
+              <a:rPr b="1"/>
+              <a:t>Log transformation:</a:t>
+            </a:r>
+            <a:r>
+              <a:rPr/>
+              <a:t> </a:t>
+            </a:r>
+            <a:r>
+              <a:rPr>
+                <a:latin typeface="Courier"/>
+              </a:rPr>
+              <a:t>log10(x)</a:t>
+            </a:r>
+            <a:r>
+              <a:rPr/>
+              <a:t> — useful for right-skewed data, multiplicative effects</a:t>
+            </a:r>
+          </a:p>
+          <a:p>
+            <a:pPr lvl="0"/>
+            <a:r>
+              <a:rPr b="1"/>
+              <a:t>Square root:</a:t>
+            </a:r>
+            <a:r>
+              <a:rPr/>
+              <a:t> </a:t>
+            </a:r>
+            <a:r>
+              <a:rPr>
+                <a:latin typeface="Courier"/>
+              </a:rPr>
+              <a:t>sqrt(x)</a:t>
+            </a:r>
+            <a:r>
+              <a:rPr/>
+              <a:t> — useful for count data, moderately right-skewed distributions</a:t>
+            </a:r>
+          </a:p>
+          <a:p>
+            <a:pPr lvl="0"/>
+            <a:r>
+              <a:rPr b="1"/>
+              <a:t>Box-Cox:</a:t>
+            </a:r>
+            <a:r>
+              <a:rPr/>
+              <a:t> a more flexible family of power transformations</a:t>
+            </a:r>
+          </a:p>
+          <a:p>
+            <a:pPr lvl="0"/>
+            <a:r>
+              <a:rPr/>
+              <a:t>More specialized transformations exist, especially for percentages or proportions</a:t>
+            </a:r>
+          </a:p>
+        </p:txBody>
+      </p:sp>
+      <p:sp>
+        <p:nvSpPr>
+          <p:cNvPr id="4" name="Content Placeholder 3"/>
+          <p:cNvSpPr>
+            <a:spLocks noGrp="1"/>
+          </p:cNvSpPr>
+          <p:nvPr>
+            <p:ph idx="2" sz="half"/>
+          </p:nvPr>
+        </p:nvSpPr>
+        <p:spPr/>
+        <p:txBody>
+          <a:bodyPr/>
+          <a:lstStyle/>
           <a:p>
             <a:pPr lvl="0" indent="0" marL="1270000">
               <a:buNone/>
             </a:pPr>
             <a:r>
+              <a:rPr sz="2000" b="1"/>
+              <a:t>Tip</a:t>
+            </a:r>
+          </a:p>
+          <a:p>
+            <a:pPr lvl="0" indent="0" marL="1270000">
+              <a:buNone/>
+            </a:pPr>
+            <a:r>
+              <a:rPr sz="2000" b="1"/>
+              <a:t>🖐 Recall</a:t>
+            </a:r>
+          </a:p>
+          <a:p>
+            <a:pPr lvl="0" indent="0" marL="1270000">
+              <a:buNone/>
+            </a:pPr>
+            <a:r>
               <a:rPr sz="2000"/>
-              <a:t>Standard t-test → Welch’s → Mann-Whitney/Permutation isn’t a strict ladder of “better” tests — each answers a slightly different question (means vs. medians) under different assumptions. Pick based on what your data actually looks like.</a:t>
+              <a:t>We saw </a:t>
+            </a:r>
+            <a:r>
+              <a:rPr sz="2000">
+                <a:latin typeface="Courier"/>
+              </a:rPr>
+              <a:t>log10()</a:t>
+            </a:r>
+            <a:r>
+              <a:rPr sz="2000"/>
+              <a:t> shrink the gap between the NE 12 and Island Lake boxplots earlier — that’s the transformation working.</a:t>
+            </a:r>
+          </a:p>
+        </p:txBody>
+      </p:sp>
+    </p:spTree>
+  </p:cSld>
+</p:sld>
+</file>
+
+<file path=ppt/slides/slide38.xml><?xml version="1.0" encoding="utf-8"?>
+<p:sld xmlns:a="http://schemas.openxmlformats.org/drawingml/2006/main" xmlns:r="http://schemas.openxmlformats.org/officeDocument/2006/relationships" xmlns:p="http://schemas.openxmlformats.org/presentationml/2006/main">
+  <p:cSld>
+    <p:spTree>
+      <p:nvGrpSpPr>
+        <p:cNvPr id="1" name=""/>
+        <p:cNvGrpSpPr/>
+        <p:nvPr/>
+      </p:nvGrpSpPr>
+      <p:grpSpPr>
+        <a:xfrm>
+          <a:off x="0" y="0"/>
+          <a:ext cx="0" cy="0"/>
+          <a:chOff x="0" y="0"/>
+          <a:chExt cx="0" cy="0"/>
+        </a:xfrm>
+      </p:grpSpPr>
+      <p:sp>
+        <p:nvSpPr>
+          <p:cNvPr id="2" name="Title 1"/>
+          <p:cNvSpPr>
+            <a:spLocks noGrp="1"/>
+          </p:cNvSpPr>
+          <p:nvPr>
+            <p:ph type="title"/>
+          </p:nvPr>
+        </p:nvSpPr>
+        <p:spPr>
+          <a:xfrm>
+            <a:off x="0" y="0"/>
+            <a:ext cx="9144000" cy="602780"/>
+          </a:xfrm>
+          <a:solidFill>
+            <a:srgbClr val="70121D"/>
+          </a:solidFill>
+        </p:spPr>
+        <p:txBody>
+          <a:bodyPr/>
+          <a:lstStyle/>
+          <a:p>
+            <a:pPr lvl="0" indent="0" marL="0">
+              <a:buNone/>
+            </a:pPr>
+            <a:r>
+              <a:rPr/>
+              <a:t>Summary — Parametric Test Options</a:t>
+            </a:r>
+          </a:p>
+        </p:txBody>
+      </p:sp>
+      <p:sp>
+        <p:nvSpPr>
+          <p:cNvPr id="3" name="Content Placeholder 2"/>
+          <p:cNvSpPr>
+            <a:spLocks noGrp="1"/>
+          </p:cNvSpPr>
+          <p:nvPr>
+            <p:ph idx="1" sz="half"/>
+          </p:nvPr>
+        </p:nvSpPr>
+        <p:spPr/>
+        <p:txBody>
+          <a:bodyPr/>
+          <a:lstStyle/>
+          <a:p>
+            <a:pPr lvl="0" indent="0" marL="0">
+              <a:buNone/>
+            </a:pPr>
+            <a:r>
+              <a:rPr b="1"/>
+              <a:t>1. Standard t-test</a:t>
+            </a:r>
+          </a:p>
+          <a:p>
+            <a:pPr lvl="0" indent="0" marL="0">
+              <a:buNone/>
+            </a:pPr>
+            <a:r>
+              <a:rPr/>
+              <a:t>Strengths:</a:t>
+            </a:r>
+          </a:p>
+          <a:p>
+            <a:pPr lvl="0"/>
+            <a:r>
+              <a:rPr/>
+              <a:t>High statistical power when assumptions are met</a:t>
+            </a:r>
+          </a:p>
+          <a:p>
+            <a:pPr lvl="0"/>
+            <a:r>
+              <a:rPr/>
+              <a:t>Well understood and widely accepted</a:t>
+            </a:r>
+          </a:p>
+          <a:p>
+            <a:pPr lvl="0" indent="0" marL="0">
+              <a:buNone/>
+            </a:pPr>
+            <a:r>
+              <a:rPr/>
+              <a:t>Weaknesses:</a:t>
+            </a:r>
+          </a:p>
+          <a:p>
+            <a:pPr lvl="0"/>
+            <a:r>
+              <a:rPr/>
+              <a:t>Sensitive to violations of normality, equal variance</a:t>
+            </a:r>
+          </a:p>
+          <a:p>
+            <a:pPr lvl="0"/>
+            <a:r>
+              <a:rPr/>
+              <a:t>Heavily influenced by outliers</a:t>
+            </a:r>
+          </a:p>
+        </p:txBody>
+      </p:sp>
+      <p:sp>
+        <p:nvSpPr>
+          <p:cNvPr id="4" name="Content Placeholder 3"/>
+          <p:cNvSpPr>
+            <a:spLocks noGrp="1"/>
+          </p:cNvSpPr>
+          <p:nvPr>
+            <p:ph idx="2" sz="half"/>
+          </p:nvPr>
+        </p:nvSpPr>
+        <p:spPr/>
+        <p:txBody>
+          <a:bodyPr/>
+          <a:lstStyle/>
+          <a:p>
+            <a:pPr lvl="0" indent="0" marL="0">
+              <a:buNone/>
+            </a:pPr>
+            <a:r>
+              <a:rPr b="1"/>
+              <a:t>2. Welch’s t-test</a:t>
+            </a:r>
+          </a:p>
+          <a:p>
+            <a:pPr lvl="0" indent="0" marL="0">
+              <a:buNone/>
+            </a:pPr>
+            <a:r>
+              <a:rPr/>
+              <a:t>Strengths:</a:t>
+            </a:r>
+          </a:p>
+          <a:p>
+            <a:pPr lvl="0"/>
+            <a:r>
+              <a:rPr/>
+              <a:t>Robust to violations of the equal-variance assumption</a:t>
+            </a:r>
+          </a:p>
+          <a:p>
+            <a:pPr lvl="0"/>
+            <a:r>
+              <a:rPr/>
+              <a:t>Handles unequal sample sizes well</a:t>
+            </a:r>
+          </a:p>
+          <a:p>
+            <a:pPr lvl="0"/>
+            <a:r>
+              <a:rPr/>
+              <a:t>Still parametric (assumes normality)</a:t>
+            </a:r>
+          </a:p>
+          <a:p>
+            <a:pPr lvl="0" indent="0" marL="0">
+              <a:buNone/>
+            </a:pPr>
+            <a:r>
+              <a:rPr/>
+              <a:t>Weaknesses:</a:t>
+            </a:r>
+          </a:p>
+          <a:p>
+            <a:pPr lvl="0"/>
+            <a:r>
+              <a:rPr/>
+              <a:t>Slightly less powerful than the standard t-test when variances are equal</a:t>
+            </a:r>
+          </a:p>
+          <a:p>
+            <a:pPr lvl="0"/>
+            <a:r>
+              <a:rPr/>
+              <a:t>Still assumes a normal distribution</a:t>
+            </a:r>
+          </a:p>
+        </p:txBody>
+      </p:sp>
+    </p:spTree>
+  </p:cSld>
+</p:sld>
+</file>
+
+<file path=ppt/slides/slide39.xml><?xml version="1.0" encoding="utf-8"?>
+<p:sld xmlns:a="http://schemas.openxmlformats.org/drawingml/2006/main" xmlns:r="http://schemas.openxmlformats.org/officeDocument/2006/relationships" xmlns:p="http://schemas.openxmlformats.org/presentationml/2006/main">
+  <p:cSld>
+    <p:spTree>
+      <p:nvGrpSpPr>
+        <p:cNvPr id="1" name=""/>
+        <p:cNvGrpSpPr/>
+        <p:nvPr/>
+      </p:nvGrpSpPr>
+      <p:grpSpPr>
+        <a:xfrm>
+          <a:off x="0" y="0"/>
+          <a:ext cx="0" cy="0"/>
+          <a:chOff x="0" y="0"/>
+          <a:chExt cx="0" cy="0"/>
+        </a:xfrm>
+      </p:grpSpPr>
+      <p:sp>
+        <p:nvSpPr>
+          <p:cNvPr id="2" name="Title 1"/>
+          <p:cNvSpPr>
+            <a:spLocks noGrp="1"/>
+          </p:cNvSpPr>
+          <p:nvPr>
+            <p:ph type="title"/>
+          </p:nvPr>
+        </p:nvSpPr>
+        <p:spPr>
+          <a:xfrm>
+            <a:off x="0" y="0"/>
+            <a:ext cx="9144000" cy="602780"/>
+          </a:xfrm>
+          <a:solidFill>
+            <a:srgbClr val="70121D"/>
+          </a:solidFill>
+        </p:spPr>
+        <p:txBody>
+          <a:bodyPr/>
+          <a:lstStyle/>
+          <a:p>
+            <a:pPr lvl="0" indent="0" marL="0">
+              <a:buNone/>
+            </a:pPr>
+            <a:r>
+              <a:rPr/>
+              <a:t>Summary — Non-Parametric Options</a:t>
+            </a:r>
+          </a:p>
+        </p:txBody>
+      </p:sp>
+      <p:sp>
+        <p:nvSpPr>
+          <p:cNvPr id="3" name="Content Placeholder 2"/>
+          <p:cNvSpPr>
+            <a:spLocks noGrp="1"/>
+          </p:cNvSpPr>
+          <p:nvPr>
+            <p:ph idx="1" sz="half"/>
+          </p:nvPr>
+        </p:nvSpPr>
+        <p:spPr/>
+        <p:txBody>
+          <a:bodyPr/>
+          <a:lstStyle/>
+          <a:p>
+            <a:pPr lvl="0" indent="0" marL="0">
+              <a:buNone/>
+            </a:pPr>
+            <a:r>
+              <a:rPr b="1"/>
+              <a:t>3. Mann-Whitney-Wilcoxon test</a:t>
+            </a:r>
+          </a:p>
+          <a:p>
+            <a:pPr lvl="0" indent="0" marL="0">
+              <a:buNone/>
+            </a:pPr>
+            <a:r>
+              <a:rPr/>
+              <a:t>Strengths:</a:t>
+            </a:r>
+          </a:p>
+          <a:p>
+            <a:pPr lvl="0"/>
+            <a:r>
+              <a:rPr/>
+              <a:t>Non-parametric: doesn’t assume normal distribution</a:t>
+            </a:r>
+          </a:p>
+          <a:p>
+            <a:pPr lvl="0"/>
+            <a:r>
+              <a:rPr/>
+              <a:t>Robust against outliers</a:t>
+            </a:r>
+          </a:p>
+          <a:p>
+            <a:pPr lvl="0"/>
+            <a:r>
+              <a:rPr/>
+              <a:t>Works with ordinal data</a:t>
+            </a:r>
+          </a:p>
+          <a:p>
+            <a:pPr lvl="0" indent="0" marL="0">
+              <a:buNone/>
+            </a:pPr>
+            <a:r>
+              <a:rPr/>
+              <a:t>Weaknesses:</a:t>
+            </a:r>
+          </a:p>
+          <a:p>
+            <a:pPr lvl="0"/>
+            <a:r>
+              <a:rPr/>
+              <a:t>Less statistical power than parametric tests</a:t>
+            </a:r>
+          </a:p>
+          <a:p>
+            <a:pPr lvl="0"/>
+            <a:r>
+              <a:rPr/>
+              <a:t>Still assumes similar distributions and approximately equal variance</a:t>
+            </a:r>
+          </a:p>
+          <a:p>
+            <a:pPr lvl="0"/>
+            <a:r>
+              <a:rPr/>
+              <a:t>Tests median differences rather than mean differences</a:t>
+            </a:r>
+          </a:p>
+          <a:p>
+            <a:pPr lvl="0"/>
+            <a:r>
+              <a:rPr b="1"/>
+              <a:t>At small n there is a hard floor on the p-value</a:t>
+            </a:r>
+            <a:r>
+              <a:rPr/>
+              <a:t> — with 4 pairs a signed-rank test cannot go below 0.125 (see Part 5b)</a:t>
+            </a:r>
+          </a:p>
+        </p:txBody>
+      </p:sp>
+      <p:sp>
+        <p:nvSpPr>
+          <p:cNvPr id="4" name="Content Placeholder 3"/>
+          <p:cNvSpPr>
+            <a:spLocks noGrp="1"/>
+          </p:cNvSpPr>
+          <p:nvPr>
+            <p:ph idx="2" sz="half"/>
+          </p:nvPr>
+        </p:nvSpPr>
+        <p:spPr/>
+        <p:txBody>
+          <a:bodyPr/>
+          <a:lstStyle/>
+          <a:p>
+            <a:pPr lvl="0" indent="0" marL="0">
+              <a:buNone/>
+            </a:pPr>
+            <a:r>
+              <a:rPr b="1"/>
+              <a:t>4. Permutation tests</a:t>
+            </a:r>
+          </a:p>
+          <a:p>
+            <a:pPr lvl="0" indent="0" marL="0">
+              <a:buNone/>
+            </a:pPr>
+            <a:r>
+              <a:rPr/>
+              <a:t>Strengths:</a:t>
+            </a:r>
+          </a:p>
+          <a:p>
+            <a:pPr lvl="0"/>
+            <a:r>
+              <a:rPr/>
+              <a:t>Distribution-free: doesn’t assume a specific distribution</a:t>
+            </a:r>
+          </a:p>
+          <a:p>
+            <a:pPr lvl="0"/>
+            <a:r>
+              <a:rPr/>
+              <a:t>Can be applied to many types of test statistics</a:t>
+            </a:r>
+          </a:p>
+          <a:p>
+            <a:pPr lvl="0"/>
+            <a:r>
+              <a:rPr/>
+              <a:t>Valid at small n — the p-value is exact, not an approximation</a:t>
+            </a:r>
+          </a:p>
+          <a:p>
+            <a:pPr lvl="0"/>
+            <a:r>
+              <a:rPr/>
+              <a:t>Directly estimates p-values through resampling</a:t>
+            </a:r>
+          </a:p>
+          <a:p>
+            <a:pPr lvl="0" indent="0" marL="0">
+              <a:buNone/>
+            </a:pPr>
+            <a:r>
+              <a:rPr/>
+              <a:t>Weaknesses:</a:t>
+            </a:r>
+          </a:p>
+          <a:p>
+            <a:pPr lvl="0"/>
+            <a:r>
+              <a:rPr/>
+              <a:t>Computationally intensive</a:t>
+            </a:r>
+          </a:p>
+          <a:p>
+            <a:pPr lvl="0"/>
+            <a:r>
+              <a:rPr/>
+              <a:t>Assumes exchangeability under the null hypothesis</a:t>
+            </a:r>
+          </a:p>
+          <a:p>
+            <a:pPr lvl="0"/>
+            <a:r>
+              <a:rPr/>
+              <a:t>Requires similar distributions and equal variance</a:t>
+            </a:r>
+          </a:p>
+          <a:p>
+            <a:pPr lvl="0"/>
+            <a:r>
+              <a:rPr b="1"/>
+              <a:t>Hits the same small-n floor as the rank tests</a:t>
+            </a:r>
+            <a:r>
+              <a:rPr/>
+              <a:t> — being exact is not the same as being powerful, because there are only so many ways to rearrange 8 numbers</a:t>
             </a:r>
           </a:p>
         </p:txBody>
@@ -8183,6 +9812,138 @@
             <a:r>
               <a:rPr/>
               <a:t>Part 1 · Setting Up Our Analysis</a:t>
+            </a:r>
+          </a:p>
+        </p:txBody>
+      </p:sp>
+    </p:spTree>
+  </p:cSld>
+</p:sld>
+</file>
+
+<file path=ppt/slides/slide40.xml><?xml version="1.0" encoding="utf-8"?>
+<p:sld xmlns:a="http://schemas.openxmlformats.org/drawingml/2006/main" xmlns:r="http://schemas.openxmlformats.org/officeDocument/2006/relationships" xmlns:p="http://schemas.openxmlformats.org/presentationml/2006/main">
+  <p:cSld>
+    <p:spTree>
+      <p:nvGrpSpPr>
+        <p:cNvPr id="1" name=""/>
+        <p:cNvGrpSpPr/>
+        <p:nvPr/>
+      </p:nvGrpSpPr>
+      <p:grpSpPr>
+        <a:xfrm>
+          <a:off x="0" y="0"/>
+          <a:ext cx="0" cy="0"/>
+          <a:chOff x="0" y="0"/>
+          <a:chExt cx="0" cy="0"/>
+        </a:xfrm>
+      </p:grpSpPr>
+      <p:sp>
+        <p:nvSpPr>
+          <p:cNvPr id="2" name="Title 1"/>
+          <p:cNvSpPr>
+            <a:spLocks noGrp="1"/>
+          </p:cNvSpPr>
+          <p:nvPr>
+            <p:ph type="title"/>
+          </p:nvPr>
+        </p:nvSpPr>
+        <p:spPr>
+          <a:xfrm>
+            <a:off x="0" y="0"/>
+            <a:ext cx="9144000" cy="602780"/>
+          </a:xfrm>
+          <a:solidFill>
+            <a:srgbClr val="70121D"/>
+          </a:solidFill>
+        </p:spPr>
+        <p:txBody>
+          <a:bodyPr/>
+          <a:lstStyle/>
+          <a:p>
+            <a:pPr lvl="0" indent="0" marL="0">
+              <a:buNone/>
+            </a:pPr>
+            <a:r>
+              <a:rPr/>
+              <a:t>Key Takeaway</a:t>
+            </a:r>
+          </a:p>
+        </p:txBody>
+      </p:sp>
+      <p:sp>
+        <p:nvSpPr>
+          <p:cNvPr id="3" name="Content Placeholder 2"/>
+          <p:cNvSpPr>
+            <a:spLocks noGrp="1"/>
+          </p:cNvSpPr>
+          <p:nvPr>
+            <p:ph idx="1" sz="half"/>
+          </p:nvPr>
+        </p:nvSpPr>
+        <p:spPr/>
+        <p:txBody>
+          <a:bodyPr/>
+          <a:lstStyle/>
+          <a:p>
+            <a:pPr lvl="0" indent="0" marL="0">
+              <a:buNone/>
+            </a:pPr>
+            <a:r>
+              <a:rPr/>
+              <a:t>Statistical tests have different strengths and assumptions. The choice should be guided by your data’s characteristics, not just convenience.</a:t>
+            </a:r>
+          </a:p>
+          <a:p>
+            <a:pPr lvl="0" indent="0" marL="0">
+              <a:buNone/>
+            </a:pPr>
+            <a:r>
+              <a:rPr b="1"/>
+              <a:t>Always visualize your data before deciding on the appropriate test.</a:t>
+            </a:r>
+          </a:p>
+        </p:txBody>
+      </p:sp>
+      <p:sp>
+        <p:nvSpPr>
+          <p:cNvPr id="4" name="Content Placeholder 3"/>
+          <p:cNvSpPr>
+            <a:spLocks noGrp="1"/>
+          </p:cNvSpPr>
+          <p:nvPr>
+            <p:ph idx="2" sz="half"/>
+          </p:nvPr>
+        </p:nvSpPr>
+        <p:spPr/>
+        <p:txBody>
+          <a:bodyPr/>
+          <a:lstStyle/>
+          <a:p>
+            <a:pPr lvl="0" indent="0" marL="1270000">
+              <a:buNone/>
+            </a:pPr>
+            <a:r>
+              <a:rPr sz="2000" b="1"/>
+              <a:t>Note</a:t>
+            </a:r>
+          </a:p>
+          <a:p>
+            <a:pPr lvl="0" indent="0" marL="1270000">
+              <a:buNone/>
+            </a:pPr>
+            <a:r>
+              <a:rPr sz="2000" b="1"/>
+              <a:t>✅ Key idea</a:t>
+            </a:r>
+          </a:p>
+          <a:p>
+            <a:pPr lvl="0" indent="0" marL="1270000">
+              <a:buNone/>
+            </a:pPr>
+            <a:r>
+              <a:rPr sz="2000"/>
+              <a:t>Standard t-test → Welch’s → Mann-Whitney/Permutation isn’t a strict ladder of “better” tests — each answers a slightly different question (means vs. medians) under different assumptions. Pick based on what your data actually looks like.</a:t>
             </a:r>
           </a:p>
         </p:txBody>

--- a/docs/content/nonparametric_t_tests/nonparametric_t_tests_lecture.pptx
+++ b/docs/content/nonparametric_t_tests/nonparametric_t_tests_lecture.pptx
@@ -8126,11 +8126,86 @@
             <a:r>
               <a:rPr>
                 <a:solidFill>
+                  <a:srgbClr val="5E5E5E"/>
+                </a:solidFill>
+                <a:latin typeface="Courier"/>
+              </a:rPr>
+              <a:t># Balance the design: take 25 NE 12 fish, keep all of Island Lake</a:t>
+            </a:r>
+            <a:br/>
+            <a:r>
+              <a:rPr>
+                <a:solidFill>
+                  <a:srgbClr val="4758AB"/>
+                </a:solidFill>
+                <a:latin typeface="Courier"/>
+              </a:rPr>
+              <a:t>set.seed</a:t>
+            </a:r>
+            <a:r>
+              <a:rPr>
+                <a:solidFill>
                   <a:srgbClr val="003B4F"/>
                 </a:solidFill>
                 <a:latin typeface="Courier"/>
               </a:rPr>
-              <a:t>ne12_perm_data &lt;- isl_ne12_df </a:t>
+              <a:t>(</a:t>
+            </a:r>
+            <a:r>
+              <a:rPr>
+                <a:solidFill>
+                  <a:srgbClr val="AD0000"/>
+                </a:solidFill>
+                <a:latin typeface="Courier"/>
+              </a:rPr>
+              <a:t>123</a:t>
+            </a:r>
+            <a:r>
+              <a:rPr>
+                <a:solidFill>
+                  <a:srgbClr val="003B4F"/>
+                </a:solidFill>
+                <a:latin typeface="Courier"/>
+              </a:rPr>
+              <a:t>)</a:t>
+            </a:r>
+            <a:br/>
+            <a:r>
+              <a:rPr>
+                <a:solidFill>
+                  <a:srgbClr val="003B4F"/>
+                </a:solidFill>
+                <a:latin typeface="Courier"/>
+              </a:rPr>
+              <a:t>perm_df &lt;- </a:t>
+            </a:r>
+            <a:r>
+              <a:rPr>
+                <a:solidFill>
+                  <a:srgbClr val="4758AB"/>
+                </a:solidFill>
+                <a:latin typeface="Courier"/>
+              </a:rPr>
+              <a:t>bind_rows</a:t>
+            </a:r>
+            <a:r>
+              <a:rPr>
+                <a:solidFill>
+                  <a:srgbClr val="003B4F"/>
+                </a:solidFill>
+                <a:latin typeface="Courier"/>
+              </a:rPr>
+              <a:t>(</a:t>
+            </a:r>
+            <a:br/>
+            <a:r>
+              <a:rPr>
+                <a:solidFill>
+                  <a:srgbClr val="003B4F"/>
+                </a:solidFill>
+                <a:latin typeface="Courier"/>
+              </a:rPr>
+              <a:t>  isl_ne12_df </a:t>
             </a:r>
             <a:r>
               <a:rPr>
@@ -8149,7 +8224,7 @@
                 </a:solidFill>
                 <a:latin typeface="Courier"/>
               </a:rPr>
-              <a:t>  </a:t>
+              <a:t>    </a:t>
             </a:r>
             <a:r>
               <a:rPr>
@@ -8222,7 +8297,7 @@
                 </a:solidFill>
                 <a:latin typeface="Courier"/>
               </a:rPr>
-              <a:t>  </a:t>
+              <a:t>    </a:t>
             </a:r>
             <a:r>
               <a:rPr>
@@ -8231,7 +8306,7 @@
                 </a:solidFill>
                 <a:latin typeface="Courier"/>
               </a:rPr>
-              <a:t>pull</a:t>
+              <a:t>slice_sample</a:t>
             </a:r>
             <a:r>
               <a:rPr>
@@ -8240,7 +8315,136 @@
                 </a:solidFill>
                 <a:latin typeface="Courier"/>
               </a:rPr>
-              <a:t>(length_mm)</a:t>
+              <a:t>(</a:t>
+            </a:r>
+            <a:r>
+              <a:rPr>
+                <a:solidFill>
+                  <a:srgbClr val="657422"/>
+                </a:solidFill>
+                <a:latin typeface="Courier"/>
+              </a:rPr>
+              <a:t>n =</a:t>
+            </a:r>
+            <a:r>
+              <a:rPr>
+                <a:solidFill>
+                  <a:srgbClr val="003B4F"/>
+                </a:solidFill>
+                <a:latin typeface="Courier"/>
+              </a:rPr>
+              <a:t> </a:t>
+            </a:r>
+            <a:r>
+              <a:rPr>
+                <a:solidFill>
+                  <a:srgbClr val="AD0000"/>
+                </a:solidFill>
+                <a:latin typeface="Courier"/>
+              </a:rPr>
+              <a:t>25</a:t>
+            </a:r>
+            <a:r>
+              <a:rPr>
+                <a:solidFill>
+                  <a:srgbClr val="003B4F"/>
+                </a:solidFill>
+                <a:latin typeface="Courier"/>
+              </a:rPr>
+              <a:t>),</a:t>
+            </a:r>
+            <a:br/>
+            <a:r>
+              <a:rPr>
+                <a:solidFill>
+                  <a:srgbClr val="003B4F"/>
+                </a:solidFill>
+                <a:latin typeface="Courier"/>
+              </a:rPr>
+              <a:t>  isl_ne12_df </a:t>
+            </a:r>
+            <a:r>
+              <a:rPr>
+                <a:solidFill>
+                  <a:srgbClr val="5E5E5E"/>
+                </a:solidFill>
+                <a:latin typeface="Courier"/>
+              </a:rPr>
+              <a:t>%&gt;%</a:t>
+            </a:r>
+            <a:br/>
+            <a:r>
+              <a:rPr>
+                <a:solidFill>
+                  <a:srgbClr val="003B4F"/>
+                </a:solidFill>
+                <a:latin typeface="Courier"/>
+              </a:rPr>
+              <a:t>    </a:t>
+            </a:r>
+            <a:r>
+              <a:rPr>
+                <a:solidFill>
+                  <a:srgbClr val="4758AB"/>
+                </a:solidFill>
+                <a:latin typeface="Courier"/>
+              </a:rPr>
+              <a:t>filter</a:t>
+            </a:r>
+            <a:r>
+              <a:rPr>
+                <a:solidFill>
+                  <a:srgbClr val="003B4F"/>
+                </a:solidFill>
+                <a:latin typeface="Courier"/>
+              </a:rPr>
+              <a:t>(lake </a:t>
+            </a:r>
+            <a:r>
+              <a:rPr>
+                <a:solidFill>
+                  <a:srgbClr val="5E5E5E"/>
+                </a:solidFill>
+                <a:latin typeface="Courier"/>
+              </a:rPr>
+              <a:t>==</a:t>
+            </a:r>
+            <a:r>
+              <a:rPr>
+                <a:solidFill>
+                  <a:srgbClr val="003B4F"/>
+                </a:solidFill>
+                <a:latin typeface="Courier"/>
+              </a:rPr>
+              <a:t> </a:t>
+            </a:r>
+            <a:r>
+              <a:rPr>
+                <a:solidFill>
+                  <a:srgbClr val="20794D"/>
+                </a:solidFill>
+                <a:latin typeface="Courier"/>
+              </a:rPr>
+              <a:t>"Island Lake"</a:t>
+            </a:r>
+            <a:r>
+              <a:rPr>
+                <a:solidFill>
+                  <a:srgbClr val="003B4F"/>
+                </a:solidFill>
+                <a:latin typeface="Courier"/>
+              </a:rPr>
+              <a:t>)</a:t>
+            </a:r>
+            <a:br/>
+            <a:r>
+              <a:rPr>
+                <a:solidFill>
+                  <a:srgbClr val="003B4F"/>
+                </a:solidFill>
+                <a:latin typeface="Courier"/>
+              </a:rPr>
+              <a:t>)</a:t>
             </a:r>
             <a:br/>
             <a:br/>
@@ -8251,17 +8455,45 @@
                 </a:solidFill>
                 <a:latin typeface="Courier"/>
               </a:rPr>
-              <a:t># Randomly sample exactly 25 observations from NE 12</a:t>
+              <a:t># The difference the test is about</a:t>
             </a:r>
             <a:br/>
             <a:r>
               <a:rPr>
                 <a:solidFill>
+                  <a:srgbClr val="003B4F"/>
+                </a:solidFill>
+                <a:latin typeface="Courier"/>
+              </a:rPr>
+              <a:t>perm_df </a:t>
+            </a:r>
+            <a:r>
+              <a:rPr>
+                <a:solidFill>
+                  <a:srgbClr val="5E5E5E"/>
+                </a:solidFill>
+                <a:latin typeface="Courier"/>
+              </a:rPr>
+              <a:t>%&gt;%</a:t>
+            </a:r>
+            <a:br/>
+            <a:r>
+              <a:rPr>
+                <a:solidFill>
+                  <a:srgbClr val="003B4F"/>
+                </a:solidFill>
+                <a:latin typeface="Courier"/>
+              </a:rPr>
+              <a:t>  </a:t>
+            </a:r>
+            <a:r>
+              <a:rPr>
+                <a:solidFill>
                   <a:srgbClr val="4758AB"/>
                 </a:solidFill>
                 <a:latin typeface="Courier"/>
               </a:rPr>
-              <a:t>set.seed</a:t>
+              <a:t>group_by</a:t>
             </a:r>
             <a:r>
               <a:rPr>
@@ -8270,16 +8502,216 @@
                 </a:solidFill>
                 <a:latin typeface="Courier"/>
               </a:rPr>
+              <a:t>(lake) </a:t>
+            </a:r>
+            <a:r>
+              <a:rPr>
+                <a:solidFill>
+                  <a:srgbClr val="5E5E5E"/>
+                </a:solidFill>
+                <a:latin typeface="Courier"/>
+              </a:rPr>
+              <a:t>%&gt;%</a:t>
+            </a:r>
+            <a:br/>
+            <a:r>
+              <a:rPr>
+                <a:solidFill>
+                  <a:srgbClr val="003B4F"/>
+                </a:solidFill>
+                <a:latin typeface="Courier"/>
+              </a:rPr>
+              <a:t>  </a:t>
+            </a:r>
+            <a:r>
+              <a:rPr>
+                <a:solidFill>
+                  <a:srgbClr val="4758AB"/>
+                </a:solidFill>
+                <a:latin typeface="Courier"/>
+              </a:rPr>
+              <a:t>summarize</a:t>
+            </a:r>
+            <a:r>
+              <a:rPr>
+                <a:solidFill>
+                  <a:srgbClr val="003B4F"/>
+                </a:solidFill>
+                <a:latin typeface="Courier"/>
+              </a:rPr>
               <a:t>(</a:t>
             </a:r>
             <a:r>
               <a:rPr>
                 <a:solidFill>
+                  <a:srgbClr val="657422"/>
+                </a:solidFill>
+                <a:latin typeface="Courier"/>
+              </a:rPr>
+              <a:t>n       =</a:t>
+            </a:r>
+            <a:r>
+              <a:rPr>
+                <a:solidFill>
+                  <a:srgbClr val="003B4F"/>
+                </a:solidFill>
+                <a:latin typeface="Courier"/>
+              </a:rPr>
+              <a:t> </a:t>
+            </a:r>
+            <a:r>
+              <a:rPr>
+                <a:solidFill>
+                  <a:srgbClr val="4758AB"/>
+                </a:solidFill>
+                <a:latin typeface="Courier"/>
+              </a:rPr>
+              <a:t>sum</a:t>
+            </a:r>
+            <a:r>
+              <a:rPr>
+                <a:solidFill>
+                  <a:srgbClr val="003B4F"/>
+                </a:solidFill>
+                <a:latin typeface="Courier"/>
+              </a:rPr>
+              <a:t>(</a:t>
+            </a:r>
+            <a:r>
+              <a:rPr>
+                <a:solidFill>
+                  <a:srgbClr val="5E5E5E"/>
+                </a:solidFill>
+                <a:latin typeface="Courier"/>
+              </a:rPr>
+              <a:t>!</a:t>
+            </a:r>
+            <a:r>
+              <a:rPr>
+                <a:solidFill>
+                  <a:srgbClr val="4758AB"/>
+                </a:solidFill>
+                <a:latin typeface="Courier"/>
+              </a:rPr>
+              <a:t>is.na</a:t>
+            </a:r>
+            <a:r>
+              <a:rPr>
+                <a:solidFill>
+                  <a:srgbClr val="003B4F"/>
+                </a:solidFill>
+                <a:latin typeface="Courier"/>
+              </a:rPr>
+              <a:t>(length_mm)),</a:t>
+            </a:r>
+            <a:br/>
+            <a:r>
+              <a:rPr>
+                <a:solidFill>
+                  <a:srgbClr val="003B4F"/>
+                </a:solidFill>
+                <a:latin typeface="Courier"/>
+              </a:rPr>
+              <a:t>            </a:t>
+            </a:r>
+            <a:r>
+              <a:rPr>
+                <a:solidFill>
+                  <a:srgbClr val="657422"/>
+                </a:solidFill>
+                <a:latin typeface="Courier"/>
+              </a:rPr>
+              <a:t>mean_mm =</a:t>
+            </a:r>
+            <a:r>
+              <a:rPr>
+                <a:solidFill>
+                  <a:srgbClr val="003B4F"/>
+                </a:solidFill>
+                <a:latin typeface="Courier"/>
+              </a:rPr>
+              <a:t> </a:t>
+            </a:r>
+            <a:r>
+              <a:rPr>
+                <a:solidFill>
+                  <a:srgbClr val="4758AB"/>
+                </a:solidFill>
+                <a:latin typeface="Courier"/>
+              </a:rPr>
+              <a:t>round</a:t>
+            </a:r>
+            <a:r>
+              <a:rPr>
+                <a:solidFill>
+                  <a:srgbClr val="003B4F"/>
+                </a:solidFill>
+                <a:latin typeface="Courier"/>
+              </a:rPr>
+              <a:t>(</a:t>
+            </a:r>
+            <a:r>
+              <a:rPr>
+                <a:solidFill>
+                  <a:srgbClr val="4758AB"/>
+                </a:solidFill>
+                <a:latin typeface="Courier"/>
+              </a:rPr>
+              <a:t>mean</a:t>
+            </a:r>
+            <a:r>
+              <a:rPr>
+                <a:solidFill>
+                  <a:srgbClr val="003B4F"/>
+                </a:solidFill>
+                <a:latin typeface="Courier"/>
+              </a:rPr>
+              <a:t>(length_mm, </a:t>
+            </a:r>
+            <a:r>
+              <a:rPr>
+                <a:solidFill>
+                  <a:srgbClr val="657422"/>
+                </a:solidFill>
+                <a:latin typeface="Courier"/>
+              </a:rPr>
+              <a:t>na.rm =</a:t>
+            </a:r>
+            <a:r>
+              <a:rPr>
+                <a:solidFill>
+                  <a:srgbClr val="003B4F"/>
+                </a:solidFill>
+                <a:latin typeface="Courier"/>
+              </a:rPr>
+              <a:t> </a:t>
+            </a:r>
+            <a:r>
+              <a:rPr>
+                <a:solidFill>
+                  <a:srgbClr val="8F5902"/>
+                </a:solidFill>
+                <a:latin typeface="Courier"/>
+              </a:rPr>
+              <a:t>TRUE</a:t>
+            </a:r>
+            <a:r>
+              <a:rPr>
+                <a:solidFill>
+                  <a:srgbClr val="003B4F"/>
+                </a:solidFill>
+                <a:latin typeface="Courier"/>
+              </a:rPr>
+              <a:t>), </a:t>
+            </a:r>
+            <a:r>
+              <a:rPr>
+                <a:solidFill>
                   <a:srgbClr val="AD0000"/>
                 </a:solidFill>
                 <a:latin typeface="Courier"/>
               </a:rPr>
-              <a:t>123</a:t>
+              <a:t>2</a:t>
             </a:r>
             <a:r>
               <a:rPr>
@@ -8288,7 +8720,79 @@
                 </a:solidFill>
                 <a:latin typeface="Courier"/>
               </a:rPr>
-              <a:t>)</a:t>
+              <a:t>))</a:t>
+            </a:r>
+          </a:p>
+          <a:p>
+            <a:pPr lvl="0" indent="0">
+              <a:buNone/>
+            </a:pPr>
+            <a:r>
+              <a:rPr>
+                <a:latin typeface="Courier"/>
+              </a:rPr>
+              <a:t># A tibble: 2 × 3
+  lake            n mean_mm
+  &lt;chr&gt;       &lt;int&gt;   &lt;dbl&gt;
+1 Island Lake    10    698.
+2 NE 12          25    365.</a:t>
+            </a:r>
+          </a:p>
+        </p:txBody>
+      </p:sp>
+      <p:sp>
+        <p:nvSpPr>
+          <p:cNvPr id="4" name="Content Placeholder 3"/>
+          <p:cNvSpPr>
+            <a:spLocks noGrp="1"/>
+          </p:cNvSpPr>
+          <p:nvPr>
+            <p:ph idx="2" sz="half"/>
+          </p:nvPr>
+        </p:nvSpPr>
+        <p:spPr/>
+        <p:txBody>
+          <a:bodyPr/>
+          <a:lstStyle/>
+          <a:p>
+            <a:pPr lvl="0" indent="0">
+              <a:buNone/>
+            </a:pPr>
+            <a:r>
+              <a:rPr>
+                <a:solidFill>
+                  <a:srgbClr val="4758AB"/>
+                </a:solidFill>
+                <a:latin typeface="Courier"/>
+              </a:rPr>
+              <a:t>permTS</a:t>
+            </a:r>
+            <a:r>
+              <a:rPr>
+                <a:solidFill>
+                  <a:srgbClr val="003B4F"/>
+                </a:solidFill>
+                <a:latin typeface="Courier"/>
+              </a:rPr>
+              <a:t>(length_mm </a:t>
+            </a:r>
+            <a:r>
+              <a:rPr>
+                <a:solidFill>
+                  <a:srgbClr val="5E5E5E"/>
+                </a:solidFill>
+                <a:latin typeface="Courier"/>
+              </a:rPr>
+              <a:t>~</a:t>
+            </a:r>
+            <a:r>
+              <a:rPr>
+                <a:solidFill>
+                  <a:srgbClr val="003B4F"/>
+                </a:solidFill>
+                <a:latin typeface="Courier"/>
+              </a:rPr>
+              <a:t> lake,</a:t>
             </a:r>
             <a:br/>
             <a:r>
@@ -8298,16 +8802,16 @@
                 </a:solidFill>
                 <a:latin typeface="Courier"/>
               </a:rPr>
-              <a:t>ne12_perm_data &lt;- </a:t>
-            </a:r>
-            <a:r>
-              <a:rPr>
-                <a:solidFill>
-                  <a:srgbClr val="4758AB"/>
-                </a:solidFill>
-                <a:latin typeface="Courier"/>
-              </a:rPr>
-              <a:t>sample</a:t>
+              <a:t>       </a:t>
+            </a:r>
+            <a:r>
+              <a:rPr>
+                <a:solidFill>
+                  <a:srgbClr val="657422"/>
+                </a:solidFill>
+                <a:latin typeface="Courier"/>
+              </a:rPr>
+              <a:t>data =</a:t>
             </a:r>
             <a:r>
               <a:rPr>
@@ -8316,376 +8820,7 @@
                 </a:solidFill>
                 <a:latin typeface="Courier"/>
               </a:rPr>
-              <a:t>(ne12_perm_data, </a:t>
-            </a:r>
-            <a:r>
-              <a:rPr>
-                <a:solidFill>
-                  <a:srgbClr val="657422"/>
-                </a:solidFill>
-                <a:latin typeface="Courier"/>
-              </a:rPr>
-              <a:t>size =</a:t>
-            </a:r>
-            <a:r>
-              <a:rPr>
-                <a:solidFill>
-                  <a:srgbClr val="003B4F"/>
-                </a:solidFill>
-                <a:latin typeface="Courier"/>
-              </a:rPr>
-              <a:t> </a:t>
-            </a:r>
-            <a:r>
-              <a:rPr>
-                <a:solidFill>
-                  <a:srgbClr val="AD0000"/>
-                </a:solidFill>
-                <a:latin typeface="Courier"/>
-              </a:rPr>
-              <a:t>25</a:t>
-            </a:r>
-            <a:r>
-              <a:rPr>
-                <a:solidFill>
-                  <a:srgbClr val="003B4F"/>
-                </a:solidFill>
-                <a:latin typeface="Courier"/>
-              </a:rPr>
-              <a:t>, </a:t>
-            </a:r>
-            <a:r>
-              <a:rPr>
-                <a:solidFill>
-                  <a:srgbClr val="657422"/>
-                </a:solidFill>
-                <a:latin typeface="Courier"/>
-              </a:rPr>
-              <a:t>replace =</a:t>
-            </a:r>
-            <a:r>
-              <a:rPr>
-                <a:solidFill>
-                  <a:srgbClr val="003B4F"/>
-                </a:solidFill>
-                <a:latin typeface="Courier"/>
-              </a:rPr>
-              <a:t> </a:t>
-            </a:r>
-            <a:r>
-              <a:rPr>
-                <a:solidFill>
-                  <a:srgbClr val="8F5902"/>
-                </a:solidFill>
-                <a:latin typeface="Courier"/>
-              </a:rPr>
-              <a:t>FALSE</a:t>
-            </a:r>
-            <a:r>
-              <a:rPr>
-                <a:solidFill>
-                  <a:srgbClr val="003B4F"/>
-                </a:solidFill>
-                <a:latin typeface="Courier"/>
-              </a:rPr>
-              <a:t>)</a:t>
-            </a:r>
-            <a:br/>
-            <a:br/>
-            <a:r>
-              <a:rPr>
-                <a:solidFill>
-                  <a:srgbClr val="003B4F"/>
-                </a:solidFill>
-                <a:latin typeface="Courier"/>
-              </a:rPr>
-              <a:t>island_perm_data &lt;- isl_ne12_df </a:t>
-            </a:r>
-            <a:r>
-              <a:rPr>
-                <a:solidFill>
-                  <a:srgbClr val="5E5E5E"/>
-                </a:solidFill>
-                <a:latin typeface="Courier"/>
-              </a:rPr>
-              <a:t>%&gt;%</a:t>
-            </a:r>
-            <a:br/>
-            <a:r>
-              <a:rPr>
-                <a:solidFill>
-                  <a:srgbClr val="003B4F"/>
-                </a:solidFill>
-                <a:latin typeface="Courier"/>
-              </a:rPr>
-              <a:t>  </a:t>
-            </a:r>
-            <a:r>
-              <a:rPr>
-                <a:solidFill>
-                  <a:srgbClr val="4758AB"/>
-                </a:solidFill>
-                <a:latin typeface="Courier"/>
-              </a:rPr>
-              <a:t>filter</a:t>
-            </a:r>
-            <a:r>
-              <a:rPr>
-                <a:solidFill>
-                  <a:srgbClr val="003B4F"/>
-                </a:solidFill>
-                <a:latin typeface="Courier"/>
-              </a:rPr>
-              <a:t>(lake </a:t>
-            </a:r>
-            <a:r>
-              <a:rPr>
-                <a:solidFill>
-                  <a:srgbClr val="5E5E5E"/>
-                </a:solidFill>
-                <a:latin typeface="Courier"/>
-              </a:rPr>
-              <a:t>==</a:t>
-            </a:r>
-            <a:r>
-              <a:rPr>
-                <a:solidFill>
-                  <a:srgbClr val="003B4F"/>
-                </a:solidFill>
-                <a:latin typeface="Courier"/>
-              </a:rPr>
-              <a:t> </a:t>
-            </a:r>
-            <a:r>
-              <a:rPr>
-                <a:solidFill>
-                  <a:srgbClr val="20794D"/>
-                </a:solidFill>
-                <a:latin typeface="Courier"/>
-              </a:rPr>
-              <a:t>"Island Lake"</a:t>
-            </a:r>
-            <a:r>
-              <a:rPr>
-                <a:solidFill>
-                  <a:srgbClr val="003B4F"/>
-                </a:solidFill>
-                <a:latin typeface="Courier"/>
-              </a:rPr>
-              <a:t>) </a:t>
-            </a:r>
-            <a:r>
-              <a:rPr>
-                <a:solidFill>
-                  <a:srgbClr val="5E5E5E"/>
-                </a:solidFill>
-                <a:latin typeface="Courier"/>
-              </a:rPr>
-              <a:t>%&gt;%</a:t>
-            </a:r>
-            <a:br/>
-            <a:r>
-              <a:rPr>
-                <a:solidFill>
-                  <a:srgbClr val="003B4F"/>
-                </a:solidFill>
-                <a:latin typeface="Courier"/>
-              </a:rPr>
-              <a:t>  </a:t>
-            </a:r>
-            <a:r>
-              <a:rPr>
-                <a:solidFill>
-                  <a:srgbClr val="4758AB"/>
-                </a:solidFill>
-                <a:latin typeface="Courier"/>
-              </a:rPr>
-              <a:t>pull</a:t>
-            </a:r>
-            <a:r>
-              <a:rPr>
-                <a:solidFill>
-                  <a:srgbClr val="003B4F"/>
-                </a:solidFill>
-                <a:latin typeface="Courier"/>
-              </a:rPr>
-              <a:t>(length_mm)</a:t>
-            </a:r>
-            <a:br/>
-            <a:br/>
-            <a:r>
-              <a:rPr>
-                <a:solidFill>
-                  <a:srgbClr val="003B4F"/>
-                </a:solidFill>
-                <a:latin typeface="Courier"/>
-              </a:rPr>
-              <a:t>observed_diff &lt;- </a:t>
-            </a:r>
-            <a:r>
-              <a:rPr>
-                <a:solidFill>
-                  <a:srgbClr val="4758AB"/>
-                </a:solidFill>
-                <a:latin typeface="Courier"/>
-              </a:rPr>
-              <a:t>mean</a:t>
-            </a:r>
-            <a:r>
-              <a:rPr>
-                <a:solidFill>
-                  <a:srgbClr val="003B4F"/>
-                </a:solidFill>
-                <a:latin typeface="Courier"/>
-              </a:rPr>
-              <a:t>(ne12_perm_data, </a:t>
-            </a:r>
-            <a:r>
-              <a:rPr>
-                <a:solidFill>
-                  <a:srgbClr val="657422"/>
-                </a:solidFill>
-                <a:latin typeface="Courier"/>
-              </a:rPr>
-              <a:t>na.rm =</a:t>
-            </a:r>
-            <a:r>
-              <a:rPr>
-                <a:solidFill>
-                  <a:srgbClr val="003B4F"/>
-                </a:solidFill>
-                <a:latin typeface="Courier"/>
-              </a:rPr>
-              <a:t> </a:t>
-            </a:r>
-            <a:r>
-              <a:rPr>
-                <a:solidFill>
-                  <a:srgbClr val="8F5902"/>
-                </a:solidFill>
-                <a:latin typeface="Courier"/>
-              </a:rPr>
-              <a:t>TRUE</a:t>
-            </a:r>
-            <a:r>
-              <a:rPr>
-                <a:solidFill>
-                  <a:srgbClr val="003B4F"/>
-                </a:solidFill>
-                <a:latin typeface="Courier"/>
-              </a:rPr>
-              <a:t>) </a:t>
-            </a:r>
-            <a:r>
-              <a:rPr>
-                <a:solidFill>
-                  <a:srgbClr val="5E5E5E"/>
-                </a:solidFill>
-                <a:latin typeface="Courier"/>
-              </a:rPr>
-              <a:t>-</a:t>
-            </a:r>
-            <a:r>
-              <a:rPr>
-                <a:solidFill>
-                  <a:srgbClr val="003B4F"/>
-                </a:solidFill>
-                <a:latin typeface="Courier"/>
-              </a:rPr>
-              <a:t> </a:t>
-            </a:r>
-            <a:r>
-              <a:rPr>
-                <a:solidFill>
-                  <a:srgbClr val="4758AB"/>
-                </a:solidFill>
-                <a:latin typeface="Courier"/>
-              </a:rPr>
-              <a:t>mean</a:t>
-            </a:r>
-            <a:r>
-              <a:rPr>
-                <a:solidFill>
-                  <a:srgbClr val="003B4F"/>
-                </a:solidFill>
-                <a:latin typeface="Courier"/>
-              </a:rPr>
-              <a:t>(island_perm_data, </a:t>
-            </a:r>
-            <a:r>
-              <a:rPr>
-                <a:solidFill>
-                  <a:srgbClr val="657422"/>
-                </a:solidFill>
-                <a:latin typeface="Courier"/>
-              </a:rPr>
-              <a:t>na.rm =</a:t>
-            </a:r>
-            <a:r>
-              <a:rPr>
-                <a:solidFill>
-                  <a:srgbClr val="003B4F"/>
-                </a:solidFill>
-                <a:latin typeface="Courier"/>
-              </a:rPr>
-              <a:t> </a:t>
-            </a:r>
-            <a:r>
-              <a:rPr>
-                <a:solidFill>
-                  <a:srgbClr val="8F5902"/>
-                </a:solidFill>
-                <a:latin typeface="Courier"/>
-              </a:rPr>
-              <a:t>TRUE</a:t>
-            </a:r>
-            <a:r>
-              <a:rPr>
-                <a:solidFill>
-                  <a:srgbClr val="003B4F"/>
-                </a:solidFill>
-                <a:latin typeface="Courier"/>
-              </a:rPr>
-              <a:t>)</a:t>
-            </a:r>
-          </a:p>
-        </p:txBody>
-      </p:sp>
-      <p:sp>
-        <p:nvSpPr>
-          <p:cNvPr id="4" name="Content Placeholder 3"/>
-          <p:cNvSpPr>
-            <a:spLocks noGrp="1"/>
-          </p:cNvSpPr>
-          <p:nvPr>
-            <p:ph idx="2" sz="half"/>
-          </p:nvPr>
-        </p:nvSpPr>
-        <p:spPr/>
-        <p:txBody>
-          <a:bodyPr/>
-          <a:lstStyle/>
-          <a:p>
-            <a:pPr lvl="0" indent="0">
-              <a:buNone/>
-            </a:pPr>
-            <a:r>
-              <a:rPr>
-                <a:solidFill>
-                  <a:srgbClr val="4758AB"/>
-                </a:solidFill>
-                <a:latin typeface="Courier"/>
-              </a:rPr>
-              <a:t>permTS</a:t>
-            </a:r>
-            <a:r>
-              <a:rPr>
-                <a:solidFill>
-                  <a:srgbClr val="003B4F"/>
-                </a:solidFill>
-                <a:latin typeface="Courier"/>
-              </a:rPr>
-              <a:t>(ne12_perm_data, island_perm_data,</a:t>
+              <a:t> perm_df,</a:t>
             </a:r>
             <a:br/>
             <a:r>
@@ -8872,12 +9007,12 @@
               </a:rPr>
               <a:t>
     Exact Permutation Test Estimated by Monte Carlo
-data:  GROUP 1 and GROUP 2
+data:  length_mm by lake
 p-value = 2e-04
-alternative hypothesis: true mean GROUP 1 - mean GROUP 2 is not equal to 0
+alternative hypothesis: true mean lake=Island Lake - mean lake=NE 12 is not equal to 0
 sample estimates:
-mean GROUP 1 - mean GROUP 2 
-                    -333.08 
+mean lake=Island Lake - mean lake=NE 12 
+                                 333.08 
 p-value estimated from 10000 Monte Carlo replications
 99 percent confidence interval on p-value:
  0.000000000 0.001059383 </a:t>

--- a/docs/content/nonparametric_t_tests/nonparametric_t_tests_lecture.pptx
+++ b/docs/content/nonparametric_t_tests/nonparametric_t_tests_lecture.pptx
@@ -6175,33 +6175,6 @@
               <a:t>A t-test’s p-value is only trustworthy if its assumptions hold. Today is about how to tell whether they do — and what to do when they don’t.</a:t>
             </a:r>
           </a:p>
-          <a:p>
-            <a:pPr lvl="0" indent="0" marL="1270000">
-              <a:buNone/>
-            </a:pPr>
-            <a:r>
-              <a:rPr sz="2000" b="1"/>
-              <a:t>Warning</a:t>
-            </a:r>
-          </a:p>
-          <a:p>
-            <a:pPr lvl="0" indent="0" marL="1270000">
-              <a:buNone/>
-            </a:pPr>
-            <a:r>
-              <a:rPr sz="2000" b="1"/>
-              <a:t>⚠️ The trap we’re walking into first</a:t>
-            </a:r>
-          </a:p>
-          <a:p>
-            <a:pPr lvl="0" indent="0" marL="1270000">
-              <a:buNone/>
-            </a:pPr>
-            <a:r>
-              <a:rPr sz="2000"/>
-              <a:t>It is tempting to treat non-parametric tests as the “safe” option you can always fall back on. We are going to start by showing why that instinct is wrong.</a:t>
-            </a:r>
-          </a:p>
         </p:txBody>
       </p:sp>
       <p:pic>
@@ -6262,6 +6235,49 @@
             <a:r>
               <a:rPr/>
               <a:t>Photo comparing needle length and bundle count across six pine species (Pinus ponderosa, nigra, resinosa, strobus, sylvestris, banksiana).</a:t>
+            </a:r>
+          </a:p>
+        </p:txBody>
+      </p:sp>
+      <p:sp>
+        <p:nvSpPr>
+          <p:cNvPr id="4" name="Content Placeholder 3"/>
+          <p:cNvSpPr>
+            <a:spLocks noGrp="1"/>
+          </p:cNvSpPr>
+          <p:nvPr>
+            <p:ph idx="2" sz="half"/>
+          </p:nvPr>
+        </p:nvSpPr>
+        <p:spPr/>
+        <p:txBody>
+          <a:bodyPr/>
+          <a:lstStyle/>
+          <a:p>
+            <a:pPr lvl="0" indent="0" marL="1270000">
+              <a:buNone/>
+            </a:pPr>
+            <a:r>
+              <a:rPr sz="2000" b="1"/>
+              <a:t>Warning</a:t>
+            </a:r>
+          </a:p>
+          <a:p>
+            <a:pPr lvl="0" indent="0" marL="1270000">
+              <a:buNone/>
+            </a:pPr>
+            <a:r>
+              <a:rPr sz="2000" b="1"/>
+              <a:t>⚠️ The trap we’re walking into first</a:t>
+            </a:r>
+          </a:p>
+          <a:p>
+            <a:pPr lvl="0" indent="0" marL="1270000">
+              <a:buNone/>
+            </a:pPr>
+            <a:r>
+              <a:rPr sz="2000"/>
+              <a:t>It is tempting to treat non-parametric tests as the “safe” option you can always fall back on. We are going to start by showing why that instinct is wrong.</a:t>
             </a:r>
           </a:p>
         </p:txBody>
@@ -6616,47 +6632,6 @@
               <a:t> — sometimes not useful</a:t>
             </a:r>
           </a:p>
-          <a:p>
-            <a:pPr lvl="0" indent="0" marL="1270000">
-              <a:buNone/>
-            </a:pPr>
-            <a:r>
-              <a:rPr sz="2000" b="1"/>
-              <a:t>Warning</a:t>
-            </a:r>
-          </a:p>
-          <a:p>
-            <a:pPr lvl="0" indent="0" marL="1270000">
-              <a:buNone/>
-            </a:pPr>
-            <a:r>
-              <a:rPr sz="2000" b="1"/>
-              <a:t>⚠️ p prints as </a:t>
-            </a:r>
-            <a:r>
-              <a:rPr sz="2000" b="1">
-                <a:latin typeface="Courier"/>
-              </a:rPr>
-              <a:t>&lt; 2.2e-16</a:t>
-            </a:r>
-          </a:p>
-          <a:p>
-            <a:pPr lvl="0" indent="0" marL="1270000">
-              <a:buNone/>
-            </a:pPr>
-            <a:r>
-              <a:rPr sz="2000"/>
-              <a:t>That is R telling you the p-value is smaller than it will bother to print. Not a borderline call — NE 12 mass is </a:t>
-            </a:r>
-            <a:r>
-              <a:rPr sz="2000" b="1"/>
-              <a:t>strongly</a:t>
-            </a:r>
-            <a:r>
-              <a:rPr sz="2000"/>
-              <a:t> non-normal, exactly as the histogram and QQ-plot showed. This is the case the rest of the lecture is for.</a:t>
-            </a:r>
-          </a:p>
         </p:txBody>
       </p:sp>
       <p:sp>
@@ -6726,6 +6701,47 @@
     Shapiro-Wilk normality test
 data:  ne12_data$mass_g
 W = 0.85148, p-value &lt; 2.2e-16</a:t>
+            </a:r>
+          </a:p>
+          <a:p>
+            <a:pPr lvl="0" indent="0" marL="1270000">
+              <a:buNone/>
+            </a:pPr>
+            <a:r>
+              <a:rPr sz="2000" b="1"/>
+              <a:t>Warning</a:t>
+            </a:r>
+          </a:p>
+          <a:p>
+            <a:pPr lvl="0" indent="0" marL="1270000">
+              <a:buNone/>
+            </a:pPr>
+            <a:r>
+              <a:rPr sz="2000" b="1"/>
+              <a:t>⚠️ p prints as </a:t>
+            </a:r>
+            <a:r>
+              <a:rPr sz="2000" b="1">
+                <a:latin typeface="Courier"/>
+              </a:rPr>
+              <a:t>&lt; 2.2e-16</a:t>
+            </a:r>
+          </a:p>
+          <a:p>
+            <a:pPr lvl="0" indent="0" marL="1270000">
+              <a:buNone/>
+            </a:pPr>
+            <a:r>
+              <a:rPr sz="2000"/>
+              <a:t>That is R telling you the p-value is smaller than it will bother to print. Not a borderline call — NE 12 mass is </a:t>
+            </a:r>
+            <a:r>
+              <a:rPr sz="2000" b="1"/>
+              <a:t>strongly</a:t>
+            </a:r>
+            <a:r>
+              <a:rPr sz="2000"/>
+              <a:t> non-normal, exactly as the histogram and QQ-plot showed. This is the case the rest of the lecture is for.</a:t>
             </a:r>
           </a:p>
         </p:txBody>
@@ -7487,33 +7503,6 @@
             <a:r>
               <a:rPr/>
               <a:t>“Formal tests”: Grubbs’ test — no one really does this</a:t>
-            </a:r>
-          </a:p>
-          <a:p>
-            <a:pPr lvl="0" indent="0" marL="1270000">
-              <a:buNone/>
-            </a:pPr>
-            <a:r>
-              <a:rPr sz="2000" b="1"/>
-              <a:t>Warning</a:t>
-            </a:r>
-          </a:p>
-          <a:p>
-            <a:pPr lvl="0" indent="0" marL="1270000">
-              <a:buNone/>
-            </a:pPr>
-            <a:r>
-              <a:rPr sz="2000" b="1"/>
-              <a:t>⚠️ Watch out!</a:t>
-            </a:r>
-          </a:p>
-          <a:p>
-            <a:pPr lvl="0" indent="0" marL="1270000">
-              <a:buNone/>
-            </a:pPr>
-            <a:r>
-              <a:rPr sz="2000"/>
-              <a:t>Outliers are a problem for non-parametric tests as well — switching to a rank-based test doesn’t make an outlier stop mattering.</a:t>
             </a:r>
           </a:p>
         </p:txBody>
